--- a/docs/CX-Agent-Builder-Demo.pptx
+++ b/docs/CX-Agent-Builder-Demo.pptx
@@ -16,9 +16,10 @@
     <p:sldId id="264" r:id="rId10"/>
     <p:sldId id="265" r:id="rId11"/>
     <p:sldId id="266" r:id="rId12"/>
+    <p:sldId id="267" r:id="rId13"/>
   </p:sldIdLst>
   <p:notesMasterIdLst>
-    <p:notesMasterId r:id="rId13"/>
+    <p:notesMasterId r:id="rId14"/>
   </p:notesMasterIdLst>
   <p:sldSz cx="12192000" cy="6858000"/>
   <p:notesSz cx="6858000" cy="12192000"/>
@@ -600,7 +601,7 @@
           <a:p>
             <a:r>
               <a:rPr lang="en-US" dirty="0"/>
-              <a:t>Saying the caveats out loud earns credibility with an engineering audience. Full risk list is in docs/REVIEW.md.</a:t>
+              <a:t>45 seconds. Four reasons this is trustworthy. The rubric-bug story is a credibility builder — tell it.</a:t>
             </a:r>
             <a:endParaRPr lang="en-US" dirty="0"/>
           </a:p>
@@ -688,7 +689,7 @@
           <a:p>
             <a:r>
               <a:rPr lang="en-US" dirty="0"/>
-              <a:t>Close on the CTA. Paste the repo link in chat as the leave-behind. Feedback and PRs welcome.</a:t>
+              <a:t>Saying the caveats out loud earns credibility with an engineering audience. Full risk list is in docs/REVIEW.md.</a:t>
             </a:r>
             <a:endParaRPr lang="en-US" dirty="0"/>
           </a:p>
@@ -712,6 +713,94 @@
             <a:fld id="{F7021451-1387-4CA6-816F-3879F97B5CBC}" type="slidenum">
               <a:rPr lang="en-US"/>
               <a:t>11</a:t>
+            </a:fld>
+            <a:endParaRPr lang="en-US"/>
+          </a:p>
+        </p:txBody>
+      </p:sp>
+    </p:spTree>
+    <p:extLst>
+      <p:ext uri="{BB962C8B-B14F-4D97-AF65-F5344CB8AC3E}">
+        <p14:creationId xmlns:p14="http://schemas.microsoft.com/office/powerpoint/2010/main" val="1024086991"/>
+      </p:ext>
+    </p:extLst>
+  </p:cSld>
+  <p:clrMapOvr>
+    <a:masterClrMapping/>
+  </p:clrMapOvr>
+</p:notes>
+</file>
+
+<file path=ppt/notesSlides/notesSlide12.xml><?xml version="1.0" encoding="utf-8"?>
+<p:notes xmlns:a="http://schemas.openxmlformats.org/drawingml/2006/main" xmlns:r="http://schemas.openxmlformats.org/officeDocument/2006/relationships" xmlns:p="http://schemas.openxmlformats.org/presentationml/2006/main">
+  <p:cSld>
+    <p:spTree>
+      <p:nvGrpSpPr>
+        <p:cNvPr id="1" name=""/>
+        <p:cNvGrpSpPr/>
+        <p:nvPr/>
+      </p:nvGrpSpPr>
+      <p:grpSpPr>
+        <a:xfrm>
+          <a:off x="0" y="0"/>
+          <a:ext cx="0" cy="0"/>
+          <a:chOff x="0" y="0"/>
+          <a:chExt cx="0" cy="0"/>
+        </a:xfrm>
+      </p:grpSpPr>
+      <p:sp>
+        <p:nvSpPr>
+          <p:cNvPr id="2" name="Slide Image Placeholder 1"/>
+          <p:cNvSpPr>
+            <a:spLocks noGrp="1" noRot="1" noChangeAspect="1"/>
+          </p:cNvSpPr>
+          <p:nvPr>
+            <p:ph type="sldImg"/>
+          </p:nvPr>
+        </p:nvSpPr>
+        <p:spPr/>
+      </p:sp>
+      <p:sp>
+        <p:nvSpPr>
+          <p:cNvPr id="3" name="Notes Placeholder 2"/>
+          <p:cNvSpPr>
+            <a:spLocks noGrp="1"/>
+          </p:cNvSpPr>
+          <p:nvPr>
+            <p:ph type="body" idx="1"/>
+          </p:nvPr>
+        </p:nvSpPr>
+        <p:spPr/>
+        <p:txBody>
+          <a:bodyPr/>
+          <a:lstStyle/>
+          <a:p>
+            <a:r>
+              <a:rPr lang="en-US" dirty="0"/>
+              <a:t>Close on the CTA. Paste the repo link in chat as the leave-behind. Feedback and PRs welcome.</a:t>
+            </a:r>
+            <a:endParaRPr lang="en-US" dirty="0"/>
+          </a:p>
+        </p:txBody>
+      </p:sp>
+      <p:sp>
+        <p:nvSpPr>
+          <p:cNvPr id="4" name="Slide Number Placeholder 3"/>
+          <p:cNvSpPr>
+            <a:spLocks noGrp="1"/>
+          </p:cNvSpPr>
+          <p:nvPr>
+            <p:ph type="sldNum" sz="quarter" idx="10"/>
+          </p:nvPr>
+        </p:nvSpPr>
+        <p:spPr/>
+        <p:txBody>
+          <a:bodyPr/>
+          <a:lstStyle/>
+          <a:p>
+            <a:fld id="{F7021451-1387-4CA6-816F-3879F97B5CBC}" type="slidenum">
+              <a:rPr lang="en-US"/>
+              <a:t>12</a:t>
             </a:fld>
             <a:endParaRPr lang="en-US"/>
           </a:p>
@@ -952,7 +1041,7 @@
           <a:p>
             <a:r>
               <a:rPr lang="en-US" dirty="0"/>
-              <a:t>Quick sweep. Don't read every card; highlight 2, 4, 5, 7. These are the artifacts the audience will see in the demo tabs.</a:t>
+              <a:t>Key repositioning slide. Say: we don't reinvent Google's foundry skill — we sit above it. Our value is the interview gate, traceability, dual-emit, and quality bars; the official skills do the on-platform work. This is complementary, not competitive.</a:t>
             </a:r>
             <a:endParaRPr lang="en-US" dirty="0"/>
           </a:p>
@@ -1040,7 +1129,7 @@
           <a:p>
             <a:r>
               <a:rPr lang="en-US" dirty="0"/>
-              <a:t>Walk the four tabs 00-&gt;03. At interview, emphasize it refuses to proceed. If doing a live run, stop after the interview questions appear.</a:t>
+              <a:t>Quick sweep. Don't read every card; highlight 2, 4, 5, 7. These are the artifacts the audience will see in the demo tabs.</a:t>
             </a:r>
             <a:endParaRPr lang="en-US" dirty="0"/>
           </a:p>
@@ -1128,7 +1217,7 @@
           <a:p>
             <a:r>
               <a:rPr lang="en-US" dirty="0"/>
-              <a:t>This is the slide that wins engineers. Same resources, two representations, kept in sync. Show both halves of 04-build-package.md.</a:t>
+              <a:t>Walk the four tabs 00-&gt;03. At interview, emphasize it refuses to proceed. If doing a live run, stop after the interview questions appear.</a:t>
             </a:r>
             <a:endParaRPr lang="en-US" dirty="0"/>
           </a:p>
@@ -1216,7 +1305,7 @@
           <a:p>
             <a:r>
               <a:rPr lang="en-US" dirty="0"/>
-              <a:t>Every requirement has at least one test, and coverage is a reported number. Thresholds come from the interview's KPIs.</a:t>
+              <a:t>This is the slide that wins engineers. Same resources, two representations, kept in sync. Show both halves of 04-build-package.md.</a:t>
             </a:r>
             <a:endParaRPr lang="en-US" dirty="0"/>
           </a:p>
@@ -1304,7 +1393,7 @@
           <a:p>
             <a:r>
               <a:rPr lang="en-US" dirty="0"/>
-              <a:t>The closer. Walk the four steps. Emphasize: the fix generalizes, and the regression eval stays green in CI forever.</a:t>
+              <a:t>Every requirement has at least one test, and coverage is a reported number. Thresholds come from the interview's KPIs.</a:t>
             </a:r>
             <a:endParaRPr lang="en-US" dirty="0"/>
           </a:p>
@@ -1392,7 +1481,7 @@
           <a:p>
             <a:r>
               <a:rPr lang="en-US" dirty="0"/>
-              <a:t>45 seconds. Four reasons this is trustworthy. The rubric-bug story is a credibility builder — tell it.</a:t>
+              <a:t>The closer. Walk the four steps. Emphasize: the fix generalizes, and the regression eval stays green in CI forever.</a:t>
             </a:r>
             <a:endParaRPr lang="en-US" dirty="0"/>
           </a:p>
@@ -2107,7 +2196,7 @@
                 <a:ea typeface="Calibri" pitchFamily="34" charset="-122"/>
                 <a:cs typeface="Calibri" pitchFamily="34" charset="-120"/>
               </a:rPr>
-              <a:t>STRAIGHT TALK</a:t>
+              <a:t>WHY IT HOLDS UP</a:t>
             </a:r>
             <a:endParaRPr lang="en-US" sz="1200" dirty="0"/>
           </a:p>
@@ -2146,7 +2235,7 @@
                 <a:ea typeface="Cambria" pitchFamily="34" charset="-122"/>
                 <a:cs typeface="Cambria" pitchFamily="34" charset="-120"/>
               </a:rPr>
-              <a:t>Honest caveats — say these, they build trust</a:t>
+              <a:t>Engineering discipline, not a clever one-shot prompt</a:t>
             </a:r>
             <a:endParaRPr lang="en-US" sz="3000" dirty="0"/>
           </a:p>
@@ -2160,16 +2249,16 @@
         </p:nvSpPr>
         <p:spPr>
           <a:xfrm>
-            <a:off x="640080" y="1874520"/>
-            <a:ext cx="10908792" cy="960120"/>
+            <a:off x="640080" y="1920240"/>
+            <a:ext cx="5303520" cy="1463040"/>
           </a:xfrm>
           <a:prstGeom prst="roundRect">
             <a:avLst>
-              <a:gd name="adj" fmla="val 8571"/>
+              <a:gd name="adj" fmla="val 5625"/>
             </a:avLst>
           </a:prstGeom>
           <a:solidFill>
-            <a:srgbClr val="FBEEE6"/>
+            <a:srgbClr val="F2F6FF"/>
           </a:solidFill>
           <a:ln/>
           <a:effectLst>
@@ -2189,14 +2278,14 @@
         </p:nvSpPr>
         <p:spPr>
           <a:xfrm>
-            <a:off x="914400" y="2121408"/>
-            <a:ext cx="457200" cy="457200"/>
+            <a:off x="914400" y="2331720"/>
+            <a:ext cx="640080" cy="640080"/>
           </a:xfrm>
           <a:prstGeom prst="ellipse">
             <a:avLst/>
           </a:prstGeom>
           <a:solidFill>
-            <a:srgbClr val="1E2761"/>
+            <a:srgbClr val="00A896"/>
           </a:solidFill>
           <a:ln/>
         </p:spPr>
@@ -2209,8 +2298,8 @@
         </p:nvSpPr>
         <p:spPr>
           <a:xfrm>
-            <a:off x="914400" y="2121408"/>
-            <a:ext cx="457200" cy="457200"/>
+            <a:off x="914400" y="2331720"/>
+            <a:ext cx="640080" cy="640080"/>
           </a:xfrm>
           <a:prstGeom prst="rect">
             <a:avLst/>
@@ -2226,7 +2315,7 @@
               <a:buNone/>
             </a:pPr>
             <a:r>
-              <a:rPr lang="en-US" sz="1300" b="1" dirty="0">
+              <a:rPr lang="en-US" sz="1800" b="1" dirty="0">
                 <a:solidFill>
                   <a:srgbClr val="FFFFFF"/>
                 </a:solidFill>
@@ -2236,7 +2325,7 @@
               </a:rPr>
               <a:t>1</a:t>
             </a:r>
-            <a:endParaRPr lang="en-US" sz="1300" dirty="0"/>
+            <a:endParaRPr lang="en-US" sz="1800" dirty="0"/>
           </a:p>
         </p:txBody>
       </p:sp>
@@ -2248,24 +2337,24 @@
         </p:nvSpPr>
         <p:spPr>
           <a:xfrm>
-            <a:off x="1600200" y="1984248"/>
-            <a:ext cx="4206240" cy="731520"/>
-          </a:xfrm>
-          <a:prstGeom prst="rect">
-            <a:avLst/>
-          </a:prstGeom>
-          <a:noFill/>
-          <a:ln/>
-        </p:spPr>
-        <p:txBody>
-          <a:bodyPr wrap="square" lIns="0" tIns="0" rIns="0" bIns="0" rtlCol="0" anchor="ctr"/>
-          <a:lstStyle/>
-          <a:p>
-            <a:pPr indent="0" marL="0">
-              <a:buNone/>
-            </a:pPr>
-            <a:r>
-              <a:rPr lang="en-US" sz="1500" b="1" dirty="0">
+            <a:off x="1737360" y="2103120"/>
+            <a:ext cx="4023360" cy="457200"/>
+          </a:xfrm>
+          <a:prstGeom prst="rect">
+            <a:avLst/>
+          </a:prstGeom>
+          <a:noFill/>
+          <a:ln/>
+        </p:spPr>
+        <p:txBody>
+          <a:bodyPr wrap="square" lIns="0" tIns="0" rIns="0" bIns="0" rtlCol="0" anchor="ctr"/>
+          <a:lstStyle/>
+          <a:p>
+            <a:pPr indent="0" marL="0">
+              <a:buNone/>
+            </a:pPr>
+            <a:r>
+              <a:rPr lang="en-US" sz="1700" b="1" dirty="0">
                 <a:solidFill>
                   <a:srgbClr val="1E2761"/>
                 </a:solidFill>
@@ -2273,9 +2362,9 @@
                 <a:ea typeface="Cambria" pitchFamily="34" charset="-122"/>
                 <a:cs typeface="Cambria" pitchFamily="34" charset="-120"/>
               </a:rPr>
-              <a:t>Examples are authored reference runs</a:t>
-            </a:r>
-            <a:endParaRPr lang="en-US" sz="1500" dirty="0"/>
+              <a:t>Traceability</a:t>
+            </a:r>
+            <a:endParaRPr lang="en-US" sz="1700" dirty="0"/>
           </a:p>
         </p:txBody>
       </p:sp>
@@ -2287,24 +2376,24 @@
         </p:nvSpPr>
         <p:spPr>
           <a:xfrm>
-            <a:off x="5943600" y="1984248"/>
-            <a:ext cx="5486400" cy="731520"/>
-          </a:xfrm>
-          <a:prstGeom prst="rect">
-            <a:avLst/>
-          </a:prstGeom>
-          <a:noFill/>
-          <a:ln/>
-        </p:spPr>
-        <p:txBody>
-          <a:bodyPr wrap="square" lIns="0" tIns="0" rIns="0" bIns="0" rtlCol="0" anchor="ctr"/>
-          <a:lstStyle/>
-          <a:p>
-            <a:pPr indent="0" marL="0">
-              <a:buNone/>
-            </a:pPr>
-            <a:r>
-              <a:rPr lang="en-US" sz="1250" dirty="0">
+            <a:off x="1737360" y="2578608"/>
+            <a:ext cx="4023360" cy="731520"/>
+          </a:xfrm>
+          <a:prstGeom prst="rect">
+            <a:avLst/>
+          </a:prstGeom>
+          <a:noFill/>
+          <a:ln/>
+        </p:spPr>
+        <p:txBody>
+          <a:bodyPr wrap="square" lIns="0" tIns="0" rIns="0" bIns="0" rtlCol="0" anchor="ctr"/>
+          <a:lstStyle/>
+          <a:p>
+            <a:pPr indent="0" marL="0">
+              <a:buNone/>
+            </a:pPr>
+            <a:r>
+              <a:rPr lang="en-US" sz="1300" dirty="0">
                 <a:solidFill>
                   <a:srgbClr val="22284B"/>
                 </a:solidFill>
@@ -2312,9 +2401,9 @@
                 <a:ea typeface="Calibri" pitchFamily="34" charset="-122"/>
                 <a:cs typeface="Calibri" pitchFamily="34" charset="-120"/>
               </a:rPr>
-              <a:t>They conform to the contracts and are QA’d, but aren’t a live transcript yet. Labeled as such.</a:t>
-            </a:r>
-            <a:endParaRPr lang="en-US" sz="1250" dirty="0"/>
+              <a:t>Requirement → design → eval, with coverage as a number.</a:t>
+            </a:r>
+            <a:endParaRPr lang="en-US" sz="1300" dirty="0"/>
           </a:p>
         </p:txBody>
       </p:sp>
@@ -2326,12 +2415,12 @@
         </p:nvSpPr>
         <p:spPr>
           <a:xfrm>
-            <a:off x="640080" y="3017520"/>
-            <a:ext cx="10908792" cy="960120"/>
+            <a:off x="6217920" y="1920240"/>
+            <a:ext cx="5303520" cy="1463040"/>
           </a:xfrm>
           <a:prstGeom prst="roundRect">
             <a:avLst>
-              <a:gd name="adj" fmla="val 8571"/>
+              <a:gd name="adj" fmla="val 5625"/>
             </a:avLst>
           </a:prstGeom>
           <a:solidFill>
@@ -2355,14 +2444,14 @@
         </p:nvSpPr>
         <p:spPr>
           <a:xfrm>
-            <a:off x="914400" y="3264408"/>
-            <a:ext cx="457200" cy="457200"/>
+            <a:off x="6492240" y="2331720"/>
+            <a:ext cx="640080" cy="640080"/>
           </a:xfrm>
           <a:prstGeom prst="ellipse">
             <a:avLst/>
           </a:prstGeom>
           <a:solidFill>
-            <a:srgbClr val="1E2761"/>
+            <a:srgbClr val="00A896"/>
           </a:solidFill>
           <a:ln/>
         </p:spPr>
@@ -2375,8 +2464,8 @@
         </p:nvSpPr>
         <p:spPr>
           <a:xfrm>
-            <a:off x="914400" y="3264408"/>
-            <a:ext cx="457200" cy="457200"/>
+            <a:off x="6492240" y="2331720"/>
+            <a:ext cx="640080" cy="640080"/>
           </a:xfrm>
           <a:prstGeom prst="rect">
             <a:avLst/>
@@ -2392,7 +2481,7 @@
               <a:buNone/>
             </a:pPr>
             <a:r>
-              <a:rPr lang="en-US" sz="1300" b="1" dirty="0">
+              <a:rPr lang="en-US" sz="1800" b="1" dirty="0">
                 <a:solidFill>
                   <a:srgbClr val="FFFFFF"/>
                 </a:solidFill>
@@ -2402,7 +2491,7 @@
               </a:rPr>
               <a:t>2</a:t>
             </a:r>
-            <a:endParaRPr lang="en-US" sz="1300" dirty="0"/>
+            <a:endParaRPr lang="en-US" sz="1800" dirty="0"/>
           </a:p>
         </p:txBody>
       </p:sp>
@@ -2414,24 +2503,24 @@
         </p:nvSpPr>
         <p:spPr>
           <a:xfrm>
-            <a:off x="1600200" y="3127248"/>
-            <a:ext cx="4206240" cy="731520"/>
-          </a:xfrm>
-          <a:prstGeom prst="rect">
-            <a:avLst/>
-          </a:prstGeom>
-          <a:noFill/>
-          <a:ln/>
-        </p:spPr>
-        <p:txBody>
-          <a:bodyPr wrap="square" lIns="0" tIns="0" rIns="0" bIns="0" rtlCol="0" anchor="ctr"/>
-          <a:lstStyle/>
-          <a:p>
-            <a:pPr indent="0" marL="0">
-              <a:buNone/>
-            </a:pPr>
-            <a:r>
-              <a:rPr lang="en-US" sz="1500" b="1" dirty="0">
+            <a:off x="7315200" y="2103120"/>
+            <a:ext cx="4023360" cy="457200"/>
+          </a:xfrm>
+          <a:prstGeom prst="rect">
+            <a:avLst/>
+          </a:prstGeom>
+          <a:noFill/>
+          <a:ln/>
+        </p:spPr>
+        <p:txBody>
+          <a:bodyPr wrap="square" lIns="0" tIns="0" rIns="0" bIns="0" rtlCol="0" anchor="ctr"/>
+          <a:lstStyle/>
+          <a:p>
+            <a:pPr indent="0" marL="0">
+              <a:buNone/>
+            </a:pPr>
+            <a:r>
+              <a:rPr lang="en-US" sz="1700" b="1" dirty="0">
                 <a:solidFill>
                   <a:srgbClr val="1E2761"/>
                 </a:solidFill>
@@ -2439,9 +2528,9 @@
                 <a:ea typeface="Cambria" pitchFamily="34" charset="-122"/>
                 <a:cs typeface="Cambria" pitchFamily="34" charset="-120"/>
               </a:rPr>
-              <a:t>Pin the scrapi API</a:t>
-            </a:r>
-            <a:endParaRPr lang="en-US" sz="1500" dirty="0"/>
+              <a:t>Grounded</a:t>
+            </a:r>
+            <a:endParaRPr lang="en-US" sz="1700" dirty="0"/>
           </a:p>
         </p:txBody>
       </p:sp>
@@ -2453,24 +2542,24 @@
         </p:nvSpPr>
         <p:spPr>
           <a:xfrm>
-            <a:off x="5943600" y="3127248"/>
-            <a:ext cx="5486400" cy="731520"/>
-          </a:xfrm>
-          <a:prstGeom prst="rect">
-            <a:avLst/>
-          </a:prstGeom>
-          <a:noFill/>
-          <a:ln/>
-        </p:spPr>
-        <p:txBody>
-          <a:bodyPr wrap="square" lIns="0" tIns="0" rIns="0" bIns="0" rtlCol="0" anchor="ctr"/>
-          <a:lstStyle/>
-          <a:p>
-            <a:pPr indent="0" marL="0">
-              <a:buNone/>
-            </a:pPr>
-            <a:r>
-              <a:rPr lang="en-US" sz="1250" dirty="0">
+            <a:off x="7315200" y="2578608"/>
+            <a:ext cx="4023360" cy="731520"/>
+          </a:xfrm>
+          <a:prstGeom prst="rect">
+            <a:avLst/>
+          </a:prstGeom>
+          <a:noFill/>
+          <a:ln/>
+        </p:spPr>
+        <p:txBody>
+          <a:bodyPr wrap="square" lIns="0" tIns="0" rIns="0" bIns="0" rtlCol="0" anchor="ctr"/>
+          <a:lstStyle/>
+          <a:p>
+            <a:pPr indent="0" marL="0">
+              <a:buNone/>
+            </a:pPr>
+            <a:r>
+              <a:rPr lang="en-US" sz="1300" dirty="0">
                 <a:solidFill>
                   <a:srgbClr val="22284B"/>
                 </a:solidFill>
@@ -2478,9 +2567,9 @@
                 <a:ea typeface="Calibri" pitchFamily="34" charset="-122"/>
                 <a:cs typeface="Calibri" pitchFamily="34" charset="-120"/>
               </a:rPr>
-              <a:t>Method names follow the docs; verify against your installed cxas-scrapi version. Smoke test on the roadmap.</a:t>
-            </a:r>
-            <a:endParaRPr lang="en-US" sz="1250" dirty="0"/>
+              <a:t>Facts route through tools; guardrails on every agent.</a:t>
+            </a:r>
+            <a:endParaRPr lang="en-US" sz="1300" dirty="0"/>
           </a:p>
         </p:txBody>
       </p:sp>
@@ -2492,12 +2581,12 @@
         </p:nvSpPr>
         <p:spPr>
           <a:xfrm>
-            <a:off x="640080" y="4160520"/>
-            <a:ext cx="10908792" cy="960120"/>
+            <a:off x="640080" y="3611880"/>
+            <a:ext cx="5303520" cy="1463040"/>
           </a:xfrm>
           <a:prstGeom prst="roundRect">
             <a:avLst>
-              <a:gd name="adj" fmla="val 8571"/>
+              <a:gd name="adj" fmla="val 5625"/>
             </a:avLst>
           </a:prstGeom>
           <a:solidFill>
@@ -2521,14 +2610,14 @@
         </p:nvSpPr>
         <p:spPr>
           <a:xfrm>
-            <a:off x="914400" y="4407408"/>
-            <a:ext cx="457200" cy="457200"/>
+            <a:off x="914400" y="4023360"/>
+            <a:ext cx="640080" cy="640080"/>
           </a:xfrm>
           <a:prstGeom prst="ellipse">
             <a:avLst/>
           </a:prstGeom>
           <a:solidFill>
-            <a:srgbClr val="1E2761"/>
+            <a:srgbClr val="00A896"/>
           </a:solidFill>
           <a:ln/>
         </p:spPr>
@@ -2541,8 +2630,8 @@
         </p:nvSpPr>
         <p:spPr>
           <a:xfrm>
-            <a:off x="914400" y="4407408"/>
-            <a:ext cx="457200" cy="457200"/>
+            <a:off x="914400" y="4023360"/>
+            <a:ext cx="640080" cy="640080"/>
           </a:xfrm>
           <a:prstGeom prst="rect">
             <a:avLst/>
@@ -2558,7 +2647,7 @@
               <a:buNone/>
             </a:pPr>
             <a:r>
-              <a:rPr lang="en-US" sz="1300" b="1" dirty="0">
+              <a:rPr lang="en-US" sz="1800" b="1" dirty="0">
                 <a:solidFill>
                   <a:srgbClr val="FFFFFF"/>
                 </a:solidFill>
@@ -2568,7 +2657,7 @@
               </a:rPr>
               <a:t>3</a:t>
             </a:r>
-            <a:endParaRPr lang="en-US" sz="1300" dirty="0"/>
+            <a:endParaRPr lang="en-US" sz="1800" dirty="0"/>
           </a:p>
         </p:txBody>
       </p:sp>
@@ -2580,24 +2669,24 @@
         </p:nvSpPr>
         <p:spPr>
           <a:xfrm>
-            <a:off x="1600200" y="4270248"/>
-            <a:ext cx="4206240" cy="731520"/>
-          </a:xfrm>
-          <a:prstGeom prst="rect">
-            <a:avLst/>
-          </a:prstGeom>
-          <a:noFill/>
-          <a:ln/>
-        </p:spPr>
-        <p:txBody>
-          <a:bodyPr wrap="square" lIns="0" tIns="0" rIns="0" bIns="0" rtlCol="0" anchor="ctr"/>
-          <a:lstStyle/>
-          <a:p>
-            <a:pPr indent="0" marL="0">
-              <a:buNone/>
-            </a:pPr>
-            <a:r>
-              <a:rPr lang="en-US" sz="1500" b="1" dirty="0">
+            <a:off x="1737360" y="3794760"/>
+            <a:ext cx="4023360" cy="457200"/>
+          </a:xfrm>
+          <a:prstGeom prst="rect">
+            <a:avLst/>
+          </a:prstGeom>
+          <a:noFill/>
+          <a:ln/>
+        </p:spPr>
+        <p:txBody>
+          <a:bodyPr wrap="square" lIns="0" tIns="0" rIns="0" bIns="0" rtlCol="0" anchor="ctr"/>
+          <a:lstStyle/>
+          <a:p>
+            <a:pPr indent="0" marL="0">
+              <a:buNone/>
+            </a:pPr>
+            <a:r>
+              <a:rPr lang="en-US" sz="1700" b="1" dirty="0">
                 <a:solidFill>
                   <a:srgbClr val="1E2761"/>
                 </a:solidFill>
@@ -2605,9 +2694,9 @@
                 <a:ea typeface="Cambria" pitchFamily="34" charset="-122"/>
                 <a:cs typeface="Cambria" pitchFamily="34" charset="-120"/>
               </a:rPr>
-              <a:t>Ground-truth has a shelf life</a:t>
-            </a:r>
-            <a:endParaRPr lang="en-US" sz="1500" dirty="0"/>
+              <a:t>Self-auditing</a:t>
+            </a:r>
+            <a:endParaRPr lang="en-US" sz="1700" dirty="0"/>
           </a:p>
         </p:txBody>
       </p:sp>
@@ -2619,24 +2708,24 @@
         </p:nvSpPr>
         <p:spPr>
           <a:xfrm>
-            <a:off x="5943600" y="4270248"/>
-            <a:ext cx="5486400" cy="731520"/>
-          </a:xfrm>
-          <a:prstGeom prst="rect">
-            <a:avLst/>
-          </a:prstGeom>
-          <a:noFill/>
-          <a:ln/>
-        </p:spPr>
-        <p:txBody>
-          <a:bodyPr wrap="square" lIns="0" tIns="0" rIns="0" bIns="0" rtlCol="0" anchor="ctr"/>
-          <a:lstStyle/>
-          <a:p>
-            <a:pPr indent="0" marL="0">
-              <a:buNone/>
-            </a:pPr>
-            <a:r>
-              <a:rPr lang="en-US" sz="1250" dirty="0">
+            <a:off x="1737360" y="4270248"/>
+            <a:ext cx="4023360" cy="731520"/>
+          </a:xfrm>
+          <a:prstGeom prst="rect">
+            <a:avLst/>
+          </a:prstGeom>
+          <a:noFill/>
+          <a:ln/>
+        </p:spPr>
+        <p:txBody>
+          <a:bodyPr wrap="square" lIns="0" tIns="0" rIns="0" bIns="0" rtlCol="0" anchor="ctr"/>
+          <a:lstStyle/>
+          <a:p>
+            <a:pPr indent="0" marL="0">
+              <a:buNone/>
+            </a:pPr>
+            <a:r>
+              <a:rPr lang="en-US" sz="1300" dirty="0">
                 <a:solidFill>
                   <a:srgbClr val="22284B"/>
                 </a:solidFill>
@@ -2644,15 +2733,181 @@
                 <a:ea typeface="Calibri" pitchFamily="34" charset="-122"/>
                 <a:cs typeface="Calibri" pitchFamily="34" charset="-120"/>
               </a:rPr>
-              <a:t>“One sample agent, Nov 2025” and eval names will drift — re-verify per release.</a:t>
-            </a:r>
-            <a:endParaRPr lang="en-US" sz="1250" dirty="0"/>
-          </a:p>
-        </p:txBody>
-      </p:sp>
-      <p:sp>
-        <p:nvSpPr>
-          <p:cNvPr id="19" name="Text 17"/>
+              <a:t>An assessor scores the prompts — it even caught a bug in its own rubric.</a:t>
+            </a:r>
+            <a:endParaRPr lang="en-US" sz="1300" dirty="0"/>
+          </a:p>
+        </p:txBody>
+      </p:sp>
+      <p:sp>
+        <p:nvSpPr>
+          <p:cNvPr id="19" name="Shape 17"/>
+          <p:cNvSpPr/>
+          <p:nvPr/>
+        </p:nvSpPr>
+        <p:spPr>
+          <a:xfrm>
+            <a:off x="6217920" y="3611880"/>
+            <a:ext cx="5303520" cy="1463040"/>
+          </a:xfrm>
+          <a:prstGeom prst="roundRect">
+            <a:avLst>
+              <a:gd name="adj" fmla="val 5625"/>
+            </a:avLst>
+          </a:prstGeom>
+          <a:solidFill>
+            <a:srgbClr val="F2F6FF"/>
+          </a:solidFill>
+          <a:ln/>
+          <a:effectLst>
+            <a:outerShdw sx="100000" sy="100000" kx="0" ky="0" algn="bl" rotWithShape="0" blurRad="88900" dist="38100" dir="5400000">
+              <a:srgbClr val="000000">
+                <a:alpha val="13000"/>
+              </a:srgbClr>
+            </a:outerShdw>
+          </a:effectLst>
+        </p:spPr>
+      </p:sp>
+      <p:sp>
+        <p:nvSpPr>
+          <p:cNvPr id="20" name="Shape 18"/>
+          <p:cNvSpPr/>
+          <p:nvPr/>
+        </p:nvSpPr>
+        <p:spPr>
+          <a:xfrm>
+            <a:off x="6492240" y="4023360"/>
+            <a:ext cx="640080" cy="640080"/>
+          </a:xfrm>
+          <a:prstGeom prst="ellipse">
+            <a:avLst/>
+          </a:prstGeom>
+          <a:solidFill>
+            <a:srgbClr val="00A896"/>
+          </a:solidFill>
+          <a:ln/>
+        </p:spPr>
+      </p:sp>
+      <p:sp>
+        <p:nvSpPr>
+          <p:cNvPr id="21" name="Text 19"/>
+          <p:cNvSpPr/>
+          <p:nvPr/>
+        </p:nvSpPr>
+        <p:spPr>
+          <a:xfrm>
+            <a:off x="6492240" y="4023360"/>
+            <a:ext cx="640080" cy="640080"/>
+          </a:xfrm>
+          <a:prstGeom prst="rect">
+            <a:avLst/>
+          </a:prstGeom>
+          <a:noFill/>
+          <a:ln/>
+        </p:spPr>
+        <p:txBody>
+          <a:bodyPr wrap="square" lIns="0" tIns="0" rIns="0" bIns="0" rtlCol="0" anchor="ctr"/>
+          <a:lstStyle/>
+          <a:p>
+            <a:pPr algn="ctr" indent="0" marL="0">
+              <a:buNone/>
+            </a:pPr>
+            <a:r>
+              <a:rPr lang="en-US" sz="1800" b="1" dirty="0">
+                <a:solidFill>
+                  <a:srgbClr val="FFFFFF"/>
+                </a:solidFill>
+                <a:latin typeface="Cambria" pitchFamily="34" charset="0"/>
+                <a:ea typeface="Cambria" pitchFamily="34" charset="-122"/>
+                <a:cs typeface="Cambria" pitchFamily="34" charset="-120"/>
+              </a:rPr>
+              <a:t>4</a:t>
+            </a:r>
+            <a:endParaRPr lang="en-US" sz="1800" dirty="0"/>
+          </a:p>
+        </p:txBody>
+      </p:sp>
+      <p:sp>
+        <p:nvSpPr>
+          <p:cNvPr id="22" name="Text 20"/>
+          <p:cNvSpPr/>
+          <p:nvPr/>
+        </p:nvSpPr>
+        <p:spPr>
+          <a:xfrm>
+            <a:off x="7315200" y="3794760"/>
+            <a:ext cx="4023360" cy="457200"/>
+          </a:xfrm>
+          <a:prstGeom prst="rect">
+            <a:avLst/>
+          </a:prstGeom>
+          <a:noFill/>
+          <a:ln/>
+        </p:spPr>
+        <p:txBody>
+          <a:bodyPr wrap="square" lIns="0" tIns="0" rIns="0" bIns="0" rtlCol="0" anchor="ctr"/>
+          <a:lstStyle/>
+          <a:p>
+            <a:pPr indent="0" marL="0">
+              <a:buNone/>
+            </a:pPr>
+            <a:r>
+              <a:rPr lang="en-US" sz="1700" b="1" dirty="0">
+                <a:solidFill>
+                  <a:srgbClr val="1E2761"/>
+                </a:solidFill>
+                <a:latin typeface="Cambria" pitchFamily="34" charset="0"/>
+                <a:ea typeface="Cambria" pitchFamily="34" charset="-122"/>
+                <a:cs typeface="Cambria" pitchFamily="34" charset="-120"/>
+              </a:rPr>
+              <a:t>Full lifecycle</a:t>
+            </a:r>
+            <a:endParaRPr lang="en-US" sz="1700" dirty="0"/>
+          </a:p>
+        </p:txBody>
+      </p:sp>
+      <p:sp>
+        <p:nvSpPr>
+          <p:cNvPr id="23" name="Text 21"/>
+          <p:cNvSpPr/>
+          <p:nvPr/>
+        </p:nvSpPr>
+        <p:spPr>
+          <a:xfrm>
+            <a:off x="7315200" y="4270248"/>
+            <a:ext cx="4023360" cy="731520"/>
+          </a:xfrm>
+          <a:prstGeom prst="rect">
+            <a:avLst/>
+          </a:prstGeom>
+          <a:noFill/>
+          <a:ln/>
+        </p:spPr>
+        <p:txBody>
+          <a:bodyPr wrap="square" lIns="0" tIns="0" rIns="0" bIns="0" rtlCol="0" anchor="ctr"/>
+          <a:lstStyle/>
+          <a:p>
+            <a:pPr indent="0" marL="0">
+              <a:buNone/>
+            </a:pPr>
+            <a:r>
+              <a:rPr lang="en-US" sz="1300" dirty="0">
+                <a:solidFill>
+                  <a:srgbClr val="22284B"/>
+                </a:solidFill>
+                <a:latin typeface="Calibri" pitchFamily="34" charset="0"/>
+                <a:ea typeface="Calibri" pitchFamily="34" charset="-122"/>
+                <a:cs typeface="Calibri" pitchFamily="34" charset="-120"/>
+              </a:rPr>
+              <a:t>Interview through debug/regression, not just generation.</a:t>
+            </a:r>
+            <a:endParaRPr lang="en-US" sz="1300" dirty="0"/>
+          </a:p>
+        </p:txBody>
+      </p:sp>
+      <p:sp>
+        <p:nvSpPr>
+          <p:cNvPr id="24" name="Text 22"/>
           <p:cNvSpPr/>
           <p:nvPr/>
         </p:nvSpPr>
@@ -2691,7 +2946,7 @@
       </p:sp>
       <p:sp>
         <p:nvSpPr>
-          <p:cNvPr id="20" name="Text 18"/>
+          <p:cNvPr id="25" name="Text 23"/>
           <p:cNvSpPr/>
           <p:nvPr/>
         </p:nvSpPr>
@@ -2739,6 +2994,692 @@
 <file path=ppt/slides/slide11.xml><?xml version="1.0" encoding="utf-8"?>
 <p:sld xmlns:a="http://schemas.openxmlformats.org/drawingml/2006/main" xmlns:r="http://schemas.openxmlformats.org/officeDocument/2006/relationships" xmlns:p="http://schemas.openxmlformats.org/presentationml/2006/main">
   <p:cSld name="Slide 11">
+    <p:bg>
+      <p:bgPr>
+        <a:solidFill>
+          <a:srgbClr val="FFFFFF"/>
+        </a:solidFill>
+      </p:bgPr>
+    </p:bg>
+    <p:spTree>
+      <p:nvGrpSpPr>
+        <p:cNvPr id="1" name=""/>
+        <p:cNvGrpSpPr/>
+        <p:nvPr/>
+      </p:nvGrpSpPr>
+      <p:grpSpPr>
+        <a:xfrm>
+          <a:off x="0" y="0"/>
+          <a:ext cx="0" cy="0"/>
+          <a:chOff x="0" y="0"/>
+          <a:chExt cx="0" cy="0"/>
+        </a:xfrm>
+      </p:grpSpPr>
+      <p:sp>
+        <p:nvSpPr>
+          <p:cNvPr id="2" name="Text 0"/>
+          <p:cNvSpPr/>
+          <p:nvPr/>
+        </p:nvSpPr>
+        <p:spPr>
+          <a:xfrm>
+            <a:off x="640080" y="411480"/>
+            <a:ext cx="10058400" cy="274320"/>
+          </a:xfrm>
+          <a:prstGeom prst="rect">
+            <a:avLst/>
+          </a:prstGeom>
+          <a:noFill/>
+          <a:ln/>
+        </p:spPr>
+        <p:txBody>
+          <a:bodyPr wrap="square" lIns="0" tIns="0" rIns="0" bIns="0" rtlCol="0" anchor="ctr"/>
+          <a:lstStyle/>
+          <a:p>
+            <a:pPr indent="0" marL="0">
+              <a:buNone/>
+            </a:pPr>
+            <a:r>
+              <a:rPr lang="en-US" sz="1200" b="1" spc="200" kern="0" dirty="0">
+                <a:solidFill>
+                  <a:srgbClr val="00A896"/>
+                </a:solidFill>
+                <a:latin typeface="Calibri" pitchFamily="34" charset="0"/>
+                <a:ea typeface="Calibri" pitchFamily="34" charset="-122"/>
+                <a:cs typeface="Calibri" pitchFamily="34" charset="-120"/>
+              </a:rPr>
+              <a:t>STRAIGHT TALK</a:t>
+            </a:r>
+            <a:endParaRPr lang="en-US" sz="1200" dirty="0"/>
+          </a:p>
+        </p:txBody>
+      </p:sp>
+      <p:sp>
+        <p:nvSpPr>
+          <p:cNvPr id="3" name="Text 1"/>
+          <p:cNvSpPr/>
+          <p:nvPr/>
+        </p:nvSpPr>
+        <p:spPr>
+          <a:xfrm>
+            <a:off x="640080" y="658368"/>
+            <a:ext cx="10908792" cy="731520"/>
+          </a:xfrm>
+          <a:prstGeom prst="rect">
+            <a:avLst/>
+          </a:prstGeom>
+          <a:noFill/>
+          <a:ln/>
+        </p:spPr>
+        <p:txBody>
+          <a:bodyPr wrap="square" lIns="0" tIns="0" rIns="0" bIns="0" rtlCol="0" anchor="ctr"/>
+          <a:lstStyle/>
+          <a:p>
+            <a:pPr indent="0" marL="0">
+              <a:buNone/>
+            </a:pPr>
+            <a:r>
+              <a:rPr lang="en-US" sz="3000" b="1" dirty="0">
+                <a:solidFill>
+                  <a:srgbClr val="1E2761"/>
+                </a:solidFill>
+                <a:latin typeface="Cambria" pitchFamily="34" charset="0"/>
+                <a:ea typeface="Cambria" pitchFamily="34" charset="-122"/>
+                <a:cs typeface="Cambria" pitchFamily="34" charset="-120"/>
+              </a:rPr>
+              <a:t>Honest caveats — say these, they build trust</a:t>
+            </a:r>
+            <a:endParaRPr lang="en-US" sz="3000" dirty="0"/>
+          </a:p>
+        </p:txBody>
+      </p:sp>
+      <p:sp>
+        <p:nvSpPr>
+          <p:cNvPr id="4" name="Shape 2"/>
+          <p:cNvSpPr/>
+          <p:nvPr/>
+        </p:nvSpPr>
+        <p:spPr>
+          <a:xfrm>
+            <a:off x="640080" y="1874520"/>
+            <a:ext cx="10908792" cy="960120"/>
+          </a:xfrm>
+          <a:prstGeom prst="roundRect">
+            <a:avLst>
+              <a:gd name="adj" fmla="val 8571"/>
+            </a:avLst>
+          </a:prstGeom>
+          <a:solidFill>
+            <a:srgbClr val="FBEEE6"/>
+          </a:solidFill>
+          <a:ln/>
+          <a:effectLst>
+            <a:outerShdw sx="100000" sy="100000" kx="0" ky="0" algn="bl" rotWithShape="0" blurRad="88900" dist="38100" dir="5400000">
+              <a:srgbClr val="000000">
+                <a:alpha val="13000"/>
+              </a:srgbClr>
+            </a:outerShdw>
+          </a:effectLst>
+        </p:spPr>
+      </p:sp>
+      <p:sp>
+        <p:nvSpPr>
+          <p:cNvPr id="5" name="Shape 3"/>
+          <p:cNvSpPr/>
+          <p:nvPr/>
+        </p:nvSpPr>
+        <p:spPr>
+          <a:xfrm>
+            <a:off x="914400" y="2121408"/>
+            <a:ext cx="457200" cy="457200"/>
+          </a:xfrm>
+          <a:prstGeom prst="ellipse">
+            <a:avLst/>
+          </a:prstGeom>
+          <a:solidFill>
+            <a:srgbClr val="1E2761"/>
+          </a:solidFill>
+          <a:ln/>
+        </p:spPr>
+      </p:sp>
+      <p:sp>
+        <p:nvSpPr>
+          <p:cNvPr id="6" name="Text 4"/>
+          <p:cNvSpPr/>
+          <p:nvPr/>
+        </p:nvSpPr>
+        <p:spPr>
+          <a:xfrm>
+            <a:off x="914400" y="2121408"/>
+            <a:ext cx="457200" cy="457200"/>
+          </a:xfrm>
+          <a:prstGeom prst="rect">
+            <a:avLst/>
+          </a:prstGeom>
+          <a:noFill/>
+          <a:ln/>
+        </p:spPr>
+        <p:txBody>
+          <a:bodyPr wrap="square" lIns="0" tIns="0" rIns="0" bIns="0" rtlCol="0" anchor="ctr"/>
+          <a:lstStyle/>
+          <a:p>
+            <a:pPr algn="ctr" indent="0" marL="0">
+              <a:buNone/>
+            </a:pPr>
+            <a:r>
+              <a:rPr lang="en-US" sz="1300" b="1" dirty="0">
+                <a:solidFill>
+                  <a:srgbClr val="FFFFFF"/>
+                </a:solidFill>
+                <a:latin typeface="Cambria" pitchFamily="34" charset="0"/>
+                <a:ea typeface="Cambria" pitchFamily="34" charset="-122"/>
+                <a:cs typeface="Cambria" pitchFamily="34" charset="-120"/>
+              </a:rPr>
+              <a:t>1</a:t>
+            </a:r>
+            <a:endParaRPr lang="en-US" sz="1300" dirty="0"/>
+          </a:p>
+        </p:txBody>
+      </p:sp>
+      <p:sp>
+        <p:nvSpPr>
+          <p:cNvPr id="7" name="Text 5"/>
+          <p:cNvSpPr/>
+          <p:nvPr/>
+        </p:nvSpPr>
+        <p:spPr>
+          <a:xfrm>
+            <a:off x="1600200" y="1984248"/>
+            <a:ext cx="4206240" cy="731520"/>
+          </a:xfrm>
+          <a:prstGeom prst="rect">
+            <a:avLst/>
+          </a:prstGeom>
+          <a:noFill/>
+          <a:ln/>
+        </p:spPr>
+        <p:txBody>
+          <a:bodyPr wrap="square" lIns="0" tIns="0" rIns="0" bIns="0" rtlCol="0" anchor="ctr"/>
+          <a:lstStyle/>
+          <a:p>
+            <a:pPr indent="0" marL="0">
+              <a:buNone/>
+            </a:pPr>
+            <a:r>
+              <a:rPr lang="en-US" sz="1500" b="1" dirty="0">
+                <a:solidFill>
+                  <a:srgbClr val="1E2761"/>
+                </a:solidFill>
+                <a:latin typeface="Cambria" pitchFamily="34" charset="0"/>
+                <a:ea typeface="Cambria" pitchFamily="34" charset="-122"/>
+                <a:cs typeface="Cambria" pitchFamily="34" charset="-120"/>
+              </a:rPr>
+              <a:t>Examples are authored reference runs</a:t>
+            </a:r>
+            <a:endParaRPr lang="en-US" sz="1500" dirty="0"/>
+          </a:p>
+        </p:txBody>
+      </p:sp>
+      <p:sp>
+        <p:nvSpPr>
+          <p:cNvPr id="8" name="Text 6"/>
+          <p:cNvSpPr/>
+          <p:nvPr/>
+        </p:nvSpPr>
+        <p:spPr>
+          <a:xfrm>
+            <a:off x="5943600" y="1984248"/>
+            <a:ext cx="5486400" cy="731520"/>
+          </a:xfrm>
+          <a:prstGeom prst="rect">
+            <a:avLst/>
+          </a:prstGeom>
+          <a:noFill/>
+          <a:ln/>
+        </p:spPr>
+        <p:txBody>
+          <a:bodyPr wrap="square" lIns="0" tIns="0" rIns="0" bIns="0" rtlCol="0" anchor="ctr"/>
+          <a:lstStyle/>
+          <a:p>
+            <a:pPr indent="0" marL="0">
+              <a:buNone/>
+            </a:pPr>
+            <a:r>
+              <a:rPr lang="en-US" sz="1250" dirty="0">
+                <a:solidFill>
+                  <a:srgbClr val="22284B"/>
+                </a:solidFill>
+                <a:latin typeface="Calibri" pitchFamily="34" charset="0"/>
+                <a:ea typeface="Calibri" pitchFamily="34" charset="-122"/>
+                <a:cs typeface="Calibri" pitchFamily="34" charset="-120"/>
+              </a:rPr>
+              <a:t>They conform to the contracts and are QA’d, but aren’t a live transcript yet. Labeled as such.</a:t>
+            </a:r>
+            <a:endParaRPr lang="en-US" sz="1250" dirty="0"/>
+          </a:p>
+        </p:txBody>
+      </p:sp>
+      <p:sp>
+        <p:nvSpPr>
+          <p:cNvPr id="9" name="Shape 7"/>
+          <p:cNvSpPr/>
+          <p:nvPr/>
+        </p:nvSpPr>
+        <p:spPr>
+          <a:xfrm>
+            <a:off x="640080" y="3017520"/>
+            <a:ext cx="10908792" cy="960120"/>
+          </a:xfrm>
+          <a:prstGeom prst="roundRect">
+            <a:avLst>
+              <a:gd name="adj" fmla="val 8571"/>
+            </a:avLst>
+          </a:prstGeom>
+          <a:solidFill>
+            <a:srgbClr val="F2F6FF"/>
+          </a:solidFill>
+          <a:ln/>
+          <a:effectLst>
+            <a:outerShdw sx="100000" sy="100000" kx="0" ky="0" algn="bl" rotWithShape="0" blurRad="88900" dist="38100" dir="5400000">
+              <a:srgbClr val="000000">
+                <a:alpha val="13000"/>
+              </a:srgbClr>
+            </a:outerShdw>
+          </a:effectLst>
+        </p:spPr>
+      </p:sp>
+      <p:sp>
+        <p:nvSpPr>
+          <p:cNvPr id="10" name="Shape 8"/>
+          <p:cNvSpPr/>
+          <p:nvPr/>
+        </p:nvSpPr>
+        <p:spPr>
+          <a:xfrm>
+            <a:off x="914400" y="3264408"/>
+            <a:ext cx="457200" cy="457200"/>
+          </a:xfrm>
+          <a:prstGeom prst="ellipse">
+            <a:avLst/>
+          </a:prstGeom>
+          <a:solidFill>
+            <a:srgbClr val="1E2761"/>
+          </a:solidFill>
+          <a:ln/>
+        </p:spPr>
+      </p:sp>
+      <p:sp>
+        <p:nvSpPr>
+          <p:cNvPr id="11" name="Text 9"/>
+          <p:cNvSpPr/>
+          <p:nvPr/>
+        </p:nvSpPr>
+        <p:spPr>
+          <a:xfrm>
+            <a:off x="914400" y="3264408"/>
+            <a:ext cx="457200" cy="457200"/>
+          </a:xfrm>
+          <a:prstGeom prst="rect">
+            <a:avLst/>
+          </a:prstGeom>
+          <a:noFill/>
+          <a:ln/>
+        </p:spPr>
+        <p:txBody>
+          <a:bodyPr wrap="square" lIns="0" tIns="0" rIns="0" bIns="0" rtlCol="0" anchor="ctr"/>
+          <a:lstStyle/>
+          <a:p>
+            <a:pPr algn="ctr" indent="0" marL="0">
+              <a:buNone/>
+            </a:pPr>
+            <a:r>
+              <a:rPr lang="en-US" sz="1300" b="1" dirty="0">
+                <a:solidFill>
+                  <a:srgbClr val="FFFFFF"/>
+                </a:solidFill>
+                <a:latin typeface="Cambria" pitchFamily="34" charset="0"/>
+                <a:ea typeface="Cambria" pitchFamily="34" charset="-122"/>
+                <a:cs typeface="Cambria" pitchFamily="34" charset="-120"/>
+              </a:rPr>
+              <a:t>2</a:t>
+            </a:r>
+            <a:endParaRPr lang="en-US" sz="1300" dirty="0"/>
+          </a:p>
+        </p:txBody>
+      </p:sp>
+      <p:sp>
+        <p:nvSpPr>
+          <p:cNvPr id="12" name="Text 10"/>
+          <p:cNvSpPr/>
+          <p:nvPr/>
+        </p:nvSpPr>
+        <p:spPr>
+          <a:xfrm>
+            <a:off x="1600200" y="3127248"/>
+            <a:ext cx="4206240" cy="731520"/>
+          </a:xfrm>
+          <a:prstGeom prst="rect">
+            <a:avLst/>
+          </a:prstGeom>
+          <a:noFill/>
+          <a:ln/>
+        </p:spPr>
+        <p:txBody>
+          <a:bodyPr wrap="square" lIns="0" tIns="0" rIns="0" bIns="0" rtlCol="0" anchor="ctr"/>
+          <a:lstStyle/>
+          <a:p>
+            <a:pPr indent="0" marL="0">
+              <a:buNone/>
+            </a:pPr>
+            <a:r>
+              <a:rPr lang="en-US" sz="1500" b="1" dirty="0">
+                <a:solidFill>
+                  <a:srgbClr val="1E2761"/>
+                </a:solidFill>
+                <a:latin typeface="Cambria" pitchFamily="34" charset="0"/>
+                <a:ea typeface="Cambria" pitchFamily="34" charset="-122"/>
+                <a:cs typeface="Cambria" pitchFamily="34" charset="-120"/>
+              </a:rPr>
+              <a:t>Pin the scrapi API</a:t>
+            </a:r>
+            <a:endParaRPr lang="en-US" sz="1500" dirty="0"/>
+          </a:p>
+        </p:txBody>
+      </p:sp>
+      <p:sp>
+        <p:nvSpPr>
+          <p:cNvPr id="13" name="Text 11"/>
+          <p:cNvSpPr/>
+          <p:nvPr/>
+        </p:nvSpPr>
+        <p:spPr>
+          <a:xfrm>
+            <a:off x="5943600" y="3127248"/>
+            <a:ext cx="5486400" cy="731520"/>
+          </a:xfrm>
+          <a:prstGeom prst="rect">
+            <a:avLst/>
+          </a:prstGeom>
+          <a:noFill/>
+          <a:ln/>
+        </p:spPr>
+        <p:txBody>
+          <a:bodyPr wrap="square" lIns="0" tIns="0" rIns="0" bIns="0" rtlCol="0" anchor="ctr"/>
+          <a:lstStyle/>
+          <a:p>
+            <a:pPr indent="0" marL="0">
+              <a:buNone/>
+            </a:pPr>
+            <a:r>
+              <a:rPr lang="en-US" sz="1250" dirty="0">
+                <a:solidFill>
+                  <a:srgbClr val="22284B"/>
+                </a:solidFill>
+                <a:latin typeface="Calibri" pitchFamily="34" charset="0"/>
+                <a:ea typeface="Calibri" pitchFamily="34" charset="-122"/>
+                <a:cs typeface="Calibri" pitchFamily="34" charset="-120"/>
+              </a:rPr>
+              <a:t>Method names follow the docs; verify against your installed cxas-scrapi version. Smoke test on the roadmap.</a:t>
+            </a:r>
+            <a:endParaRPr lang="en-US" sz="1250" dirty="0"/>
+          </a:p>
+        </p:txBody>
+      </p:sp>
+      <p:sp>
+        <p:nvSpPr>
+          <p:cNvPr id="14" name="Shape 12"/>
+          <p:cNvSpPr/>
+          <p:nvPr/>
+        </p:nvSpPr>
+        <p:spPr>
+          <a:xfrm>
+            <a:off x="640080" y="4160520"/>
+            <a:ext cx="10908792" cy="960120"/>
+          </a:xfrm>
+          <a:prstGeom prst="roundRect">
+            <a:avLst>
+              <a:gd name="adj" fmla="val 8571"/>
+            </a:avLst>
+          </a:prstGeom>
+          <a:solidFill>
+            <a:srgbClr val="F2F6FF"/>
+          </a:solidFill>
+          <a:ln/>
+          <a:effectLst>
+            <a:outerShdw sx="100000" sy="100000" kx="0" ky="0" algn="bl" rotWithShape="0" blurRad="88900" dist="38100" dir="5400000">
+              <a:srgbClr val="000000">
+                <a:alpha val="13000"/>
+              </a:srgbClr>
+            </a:outerShdw>
+          </a:effectLst>
+        </p:spPr>
+      </p:sp>
+      <p:sp>
+        <p:nvSpPr>
+          <p:cNvPr id="15" name="Shape 13"/>
+          <p:cNvSpPr/>
+          <p:nvPr/>
+        </p:nvSpPr>
+        <p:spPr>
+          <a:xfrm>
+            <a:off x="914400" y="4407408"/>
+            <a:ext cx="457200" cy="457200"/>
+          </a:xfrm>
+          <a:prstGeom prst="ellipse">
+            <a:avLst/>
+          </a:prstGeom>
+          <a:solidFill>
+            <a:srgbClr val="1E2761"/>
+          </a:solidFill>
+          <a:ln/>
+        </p:spPr>
+      </p:sp>
+      <p:sp>
+        <p:nvSpPr>
+          <p:cNvPr id="16" name="Text 14"/>
+          <p:cNvSpPr/>
+          <p:nvPr/>
+        </p:nvSpPr>
+        <p:spPr>
+          <a:xfrm>
+            <a:off x="914400" y="4407408"/>
+            <a:ext cx="457200" cy="457200"/>
+          </a:xfrm>
+          <a:prstGeom prst="rect">
+            <a:avLst/>
+          </a:prstGeom>
+          <a:noFill/>
+          <a:ln/>
+        </p:spPr>
+        <p:txBody>
+          <a:bodyPr wrap="square" lIns="0" tIns="0" rIns="0" bIns="0" rtlCol="0" anchor="ctr"/>
+          <a:lstStyle/>
+          <a:p>
+            <a:pPr algn="ctr" indent="0" marL="0">
+              <a:buNone/>
+            </a:pPr>
+            <a:r>
+              <a:rPr lang="en-US" sz="1300" b="1" dirty="0">
+                <a:solidFill>
+                  <a:srgbClr val="FFFFFF"/>
+                </a:solidFill>
+                <a:latin typeface="Cambria" pitchFamily="34" charset="0"/>
+                <a:ea typeface="Cambria" pitchFamily="34" charset="-122"/>
+                <a:cs typeface="Cambria" pitchFamily="34" charset="-120"/>
+              </a:rPr>
+              <a:t>3</a:t>
+            </a:r>
+            <a:endParaRPr lang="en-US" sz="1300" dirty="0"/>
+          </a:p>
+        </p:txBody>
+      </p:sp>
+      <p:sp>
+        <p:nvSpPr>
+          <p:cNvPr id="17" name="Text 15"/>
+          <p:cNvSpPr/>
+          <p:nvPr/>
+        </p:nvSpPr>
+        <p:spPr>
+          <a:xfrm>
+            <a:off x="1600200" y="4270248"/>
+            <a:ext cx="4206240" cy="731520"/>
+          </a:xfrm>
+          <a:prstGeom prst="rect">
+            <a:avLst/>
+          </a:prstGeom>
+          <a:noFill/>
+          <a:ln/>
+        </p:spPr>
+        <p:txBody>
+          <a:bodyPr wrap="square" lIns="0" tIns="0" rIns="0" bIns="0" rtlCol="0" anchor="ctr"/>
+          <a:lstStyle/>
+          <a:p>
+            <a:pPr indent="0" marL="0">
+              <a:buNone/>
+            </a:pPr>
+            <a:r>
+              <a:rPr lang="en-US" sz="1500" b="1" dirty="0">
+                <a:solidFill>
+                  <a:srgbClr val="1E2761"/>
+                </a:solidFill>
+                <a:latin typeface="Cambria" pitchFamily="34" charset="0"/>
+                <a:ea typeface="Cambria" pitchFamily="34" charset="-122"/>
+                <a:cs typeface="Cambria" pitchFamily="34" charset="-120"/>
+              </a:rPr>
+              <a:t>Ground-truth has a shelf life</a:t>
+            </a:r>
+            <a:endParaRPr lang="en-US" sz="1500" dirty="0"/>
+          </a:p>
+        </p:txBody>
+      </p:sp>
+      <p:sp>
+        <p:nvSpPr>
+          <p:cNvPr id="18" name="Text 16"/>
+          <p:cNvSpPr/>
+          <p:nvPr/>
+        </p:nvSpPr>
+        <p:spPr>
+          <a:xfrm>
+            <a:off x="5943600" y="4270248"/>
+            <a:ext cx="5486400" cy="731520"/>
+          </a:xfrm>
+          <a:prstGeom prst="rect">
+            <a:avLst/>
+          </a:prstGeom>
+          <a:noFill/>
+          <a:ln/>
+        </p:spPr>
+        <p:txBody>
+          <a:bodyPr wrap="square" lIns="0" tIns="0" rIns="0" bIns="0" rtlCol="0" anchor="ctr"/>
+          <a:lstStyle/>
+          <a:p>
+            <a:pPr indent="0" marL="0">
+              <a:buNone/>
+            </a:pPr>
+            <a:r>
+              <a:rPr lang="en-US" sz="1250" dirty="0">
+                <a:solidFill>
+                  <a:srgbClr val="22284B"/>
+                </a:solidFill>
+                <a:latin typeface="Calibri" pitchFamily="34" charset="0"/>
+                <a:ea typeface="Calibri" pitchFamily="34" charset="-122"/>
+                <a:cs typeface="Calibri" pitchFamily="34" charset="-120"/>
+              </a:rPr>
+              <a:t>“One sample agent, Nov 2025” and eval names will drift — re-verify per release.</a:t>
+            </a:r>
+            <a:endParaRPr lang="en-US" sz="1250" dirty="0"/>
+          </a:p>
+        </p:txBody>
+      </p:sp>
+      <p:sp>
+        <p:nvSpPr>
+          <p:cNvPr id="19" name="Text 17"/>
+          <p:cNvSpPr/>
+          <p:nvPr/>
+        </p:nvSpPr>
+        <p:spPr>
+          <a:xfrm>
+            <a:off x="640080" y="6473952"/>
+            <a:ext cx="8229600" cy="274320"/>
+          </a:xfrm>
+          <a:prstGeom prst="rect">
+            <a:avLst/>
+          </a:prstGeom>
+          <a:noFill/>
+          <a:ln/>
+        </p:spPr>
+        <p:txBody>
+          <a:bodyPr wrap="square" lIns="0" tIns="0" rIns="0" bIns="0" rtlCol="0" anchor="ctr"/>
+          <a:lstStyle/>
+          <a:p>
+            <a:pPr indent="0" marL="0">
+              <a:buNone/>
+            </a:pPr>
+            <a:r>
+              <a:rPr lang="en-US" sz="900" dirty="0">
+                <a:solidFill>
+                  <a:srgbClr val="5B6785"/>
+                </a:solidFill>
+                <a:latin typeface="Calibri" pitchFamily="34" charset="0"/>
+                <a:ea typeface="Calibri" pitchFamily="34" charset="-122"/>
+                <a:cs typeface="Calibri" pitchFamily="34" charset="-120"/>
+              </a:rPr>
+              <a:t>CX Agent Builder  ·  github.com/srikanthpyaraka/cxas-prompt-pipeline</a:t>
+            </a:r>
+            <a:endParaRPr lang="en-US" sz="900" dirty="0"/>
+          </a:p>
+        </p:txBody>
+      </p:sp>
+      <p:sp>
+        <p:nvSpPr>
+          <p:cNvPr id="20" name="Text 18"/>
+          <p:cNvSpPr/>
+          <p:nvPr/>
+        </p:nvSpPr>
+        <p:spPr>
+          <a:xfrm>
+            <a:off x="11274552" y="6473952"/>
+            <a:ext cx="365760" cy="274320"/>
+          </a:xfrm>
+          <a:prstGeom prst="rect">
+            <a:avLst/>
+          </a:prstGeom>
+          <a:noFill/>
+          <a:ln/>
+        </p:spPr>
+        <p:txBody>
+          <a:bodyPr wrap="square" lIns="0" tIns="0" rIns="0" bIns="0" rtlCol="0" anchor="ctr"/>
+          <a:lstStyle/>
+          <a:p>
+            <a:pPr algn="r" indent="0" marL="0">
+              <a:buNone/>
+            </a:pPr>
+            <a:r>
+              <a:rPr lang="en-US" sz="900" dirty="0">
+                <a:solidFill>
+                  <a:srgbClr val="5B6785"/>
+                </a:solidFill>
+                <a:latin typeface="Calibri" pitchFamily="34" charset="0"/>
+                <a:ea typeface="Calibri" pitchFamily="34" charset="-122"/>
+                <a:cs typeface="Calibri" pitchFamily="34" charset="-120"/>
+              </a:rPr>
+              <a:t>11</a:t>
+            </a:r>
+            <a:endParaRPr lang="en-US" sz="900" dirty="0"/>
+          </a:p>
+        </p:txBody>
+      </p:sp>
+    </p:spTree>
+  </p:cSld>
+  <p:clrMapOvr>
+    <a:masterClrMapping/>
+  </p:clrMapOvr>
+</p:sld>
+</file>
+
+<file path=ppt/slides/slide12.xml><?xml version="1.0" encoding="utf-8"?>
+<p:sld xmlns:a="http://schemas.openxmlformats.org/drawingml/2006/main" xmlns:r="http://schemas.openxmlformats.org/officeDocument/2006/relationships" xmlns:p="http://schemas.openxmlformats.org/presentationml/2006/main">
+  <p:cSld name="Slide 12">
     <p:bg>
       <p:bgPr>
         <a:solidFill>
@@ -5179,7 +6120,7 @@
                 <a:ea typeface="Calibri" pitchFamily="34" charset="-122"/>
                 <a:cs typeface="Calibri" pitchFamily="34" charset="-120"/>
               </a:rPr>
-              <a:t>WHAT YOU GET</a:t>
+              <a:t>HOW IT FITS</a:t>
             </a:r>
             <a:endParaRPr lang="en-US" sz="1200" dirty="0"/>
           </a:p>
@@ -5218,7 +6159,7 @@
                 <a:ea typeface="Cambria" pitchFamily="34" charset="-122"/>
                 <a:cs typeface="Cambria" pitchFamily="34" charset="-120"/>
               </a:rPr>
-              <a:t>Each stage emits a typed artifact — chained end to end</a:t>
+              <a:t>Built on top of the official cxas-scrapi skills</a:t>
             </a:r>
             <a:endParaRPr lang="en-US" sz="3000" dirty="0"/>
           </a:p>
@@ -5232,16 +6173,16 @@
         </p:nvSpPr>
         <p:spPr>
           <a:xfrm>
-            <a:off x="640080" y="1874520"/>
-            <a:ext cx="2670048" cy="1737360"/>
+            <a:off x="640080" y="1600200"/>
+            <a:ext cx="10908792" cy="1234440"/>
           </a:xfrm>
           <a:prstGeom prst="roundRect">
             <a:avLst>
-              <a:gd name="adj" fmla="val 4737"/>
+              <a:gd name="adj" fmla="val 6667"/>
             </a:avLst>
           </a:prstGeom>
           <a:solidFill>
-            <a:srgbClr val="F2F6FF"/>
+            <a:srgbClr val="1E2761"/>
           </a:solidFill>
           <a:ln/>
           <a:effectLst>
@@ -5261,94 +6202,399 @@
         </p:nvSpPr>
         <p:spPr>
           <a:xfrm>
-            <a:off x="896112" y="2075688"/>
-            <a:ext cx="2212848" cy="457200"/>
-          </a:xfrm>
-          <a:prstGeom prst="rect">
-            <a:avLst/>
-          </a:prstGeom>
-          <a:noFill/>
-          <a:ln/>
-        </p:spPr>
-        <p:txBody>
-          <a:bodyPr wrap="square" lIns="0" tIns="0" rIns="0" bIns="0" rtlCol="0" anchor="ctr"/>
-          <a:lstStyle/>
-          <a:p>
-            <a:pPr indent="0" marL="0">
-              <a:buNone/>
-            </a:pPr>
-            <a:r>
-              <a:rPr lang="en-US" sz="1500" b="1" dirty="0">
-                <a:solidFill>
-                  <a:srgbClr val="1E2761"/>
+            <a:off x="960120" y="1737360"/>
+            <a:ext cx="10515600" cy="411480"/>
+          </a:xfrm>
+          <a:prstGeom prst="rect">
+            <a:avLst/>
+          </a:prstGeom>
+          <a:noFill/>
+          <a:ln/>
+        </p:spPr>
+        <p:txBody>
+          <a:bodyPr wrap="square" lIns="0" tIns="0" rIns="0" bIns="0" rtlCol="0" anchor="ctr"/>
+          <a:lstStyle/>
+          <a:p>
+            <a:pPr indent="0" marL="0">
+              <a:buNone/>
+            </a:pPr>
+            <a:r>
+              <a:rPr lang="en-US" sz="1700" b="1" dirty="0">
+                <a:solidFill>
+                  <a:srgbClr val="FFFFFF"/>
                 </a:solidFill>
                 <a:latin typeface="Cambria" pitchFamily="34" charset="0"/>
                 <a:ea typeface="Cambria" pitchFamily="34" charset="-122"/>
                 <a:cs typeface="Cambria" pitchFamily="34" charset="-120"/>
               </a:rPr>
-              <a:t>1  Ingest</a:t>
-            </a:r>
-            <a:endParaRPr lang="en-US" sz="1500" dirty="0"/>
-          </a:p>
-        </p:txBody>
-      </p:sp>
-      <p:sp>
-        <p:nvSpPr>
-          <p:cNvPr id="6" name="Text 4"/>
-          <p:cNvSpPr/>
-          <p:nvPr/>
-        </p:nvSpPr>
-        <p:spPr>
-          <a:xfrm>
-            <a:off x="896112" y="2532888"/>
-            <a:ext cx="2212848" cy="960120"/>
-          </a:xfrm>
-          <a:prstGeom prst="rect">
-            <a:avLst/>
-          </a:prstGeom>
-          <a:noFill/>
-          <a:ln/>
-        </p:spPr>
-        <p:txBody>
-          <a:bodyPr wrap="square" lIns="0" tIns="0" rIns="0" bIns="0" rtlCol="0" anchor="ctr"/>
-          <a:lstStyle/>
-          <a:p>
-            <a:pPr indent="0" marL="0">
-              <a:buNone/>
-            </a:pPr>
-            <a:r>
-              <a:rPr lang="en-US" sz="1200" dirty="0">
-                <a:solidFill>
-                  <a:srgbClr val="22284B"/>
-                </a:solidFill>
-                <a:latin typeface="Calibri" pitchFamily="34" charset="0"/>
-                <a:ea typeface="Calibri" pitchFamily="34" charset="-122"/>
-                <a:cs typeface="Calibri" pitchFamily="34" charset="-120"/>
-              </a:rPr>
-              <a:t>Normalized brief; every requirement gets an ID + priority. Flags UNKNOWNs, never invents.</a:t>
-            </a:r>
-            <a:endParaRPr lang="en-US" sz="1200" dirty="0"/>
-          </a:p>
-        </p:txBody>
-      </p:sp>
-      <p:sp>
-        <p:nvSpPr>
-          <p:cNvPr id="7" name="Shape 5"/>
-          <p:cNvSpPr/>
-          <p:nvPr/>
-        </p:nvSpPr>
-        <p:spPr>
-          <a:xfrm>
-            <a:off x="3438144" y="1874520"/>
-            <a:ext cx="2670048" cy="1737360"/>
+              <a:t>This package  —  decides WHAT to build, holds the quality bars</a:t>
+            </a:r>
+            <a:endParaRPr lang="en-US" sz="1700" dirty="0"/>
+          </a:p>
+        </p:txBody>
+      </p:sp>
+      <p:sp>
+        <p:nvSpPr>
+          <p:cNvPr id="6" name="Shape 4"/>
+          <p:cNvSpPr/>
+          <p:nvPr/>
+        </p:nvSpPr>
+        <p:spPr>
+          <a:xfrm>
+            <a:off x="960120" y="2240280"/>
+            <a:ext cx="1993392" cy="457200"/>
           </a:xfrm>
           <a:prstGeom prst="roundRect">
             <a:avLst>
-              <a:gd name="adj" fmla="val 4737"/>
+              <a:gd name="adj" fmla="val 12000"/>
             </a:avLst>
           </a:prstGeom>
           <a:solidFill>
-            <a:srgbClr val="F2F6FF"/>
+            <a:srgbClr val="141A47"/>
+          </a:solidFill>
+          <a:ln/>
+        </p:spPr>
+      </p:sp>
+      <p:sp>
+        <p:nvSpPr>
+          <p:cNvPr id="7" name="Text 5"/>
+          <p:cNvSpPr/>
+          <p:nvPr/>
+        </p:nvSpPr>
+        <p:spPr>
+          <a:xfrm>
+            <a:off x="960120" y="2240280"/>
+            <a:ext cx="1993392" cy="457200"/>
+          </a:xfrm>
+          <a:prstGeom prst="rect">
+            <a:avLst/>
+          </a:prstGeom>
+          <a:noFill/>
+          <a:ln/>
+        </p:spPr>
+        <p:txBody>
+          <a:bodyPr wrap="square" lIns="0" tIns="0" rIns="0" bIns="0" rtlCol="0" anchor="ctr"/>
+          <a:lstStyle/>
+          <a:p>
+            <a:pPr algn="ctr" indent="0" marL="0">
+              <a:buNone/>
+            </a:pPr>
+            <a:r>
+              <a:rPr lang="en-US" sz="1050" b="1" dirty="0">
+                <a:solidFill>
+                  <a:srgbClr val="CADCFC"/>
+                </a:solidFill>
+                <a:latin typeface="Calibri" pitchFamily="34" charset="0"/>
+                <a:ea typeface="Calibri" pitchFamily="34" charset="-122"/>
+                <a:cs typeface="Calibri" pitchFamily="34" charset="-120"/>
+              </a:rPr>
+              <a:t>Intake / normalize</a:t>
+            </a:r>
+            <a:endParaRPr lang="en-US" sz="1050" dirty="0"/>
+          </a:p>
+        </p:txBody>
+      </p:sp>
+      <p:sp>
+        <p:nvSpPr>
+          <p:cNvPr id="8" name="Shape 6"/>
+          <p:cNvSpPr/>
+          <p:nvPr/>
+        </p:nvSpPr>
+        <p:spPr>
+          <a:xfrm>
+            <a:off x="3099816" y="2240280"/>
+            <a:ext cx="1993392" cy="457200"/>
+          </a:xfrm>
+          <a:prstGeom prst="roundRect">
+            <a:avLst>
+              <a:gd name="adj" fmla="val 12000"/>
+            </a:avLst>
+          </a:prstGeom>
+          <a:solidFill>
+            <a:srgbClr val="141A47"/>
+          </a:solidFill>
+          <a:ln/>
+        </p:spPr>
+      </p:sp>
+      <p:sp>
+        <p:nvSpPr>
+          <p:cNvPr id="9" name="Text 7"/>
+          <p:cNvSpPr/>
+          <p:nvPr/>
+        </p:nvSpPr>
+        <p:spPr>
+          <a:xfrm>
+            <a:off x="3099816" y="2240280"/>
+            <a:ext cx="1993392" cy="457200"/>
+          </a:xfrm>
+          <a:prstGeom prst="rect">
+            <a:avLst/>
+          </a:prstGeom>
+          <a:noFill/>
+          <a:ln/>
+        </p:spPr>
+        <p:txBody>
+          <a:bodyPr wrap="square" lIns="0" tIns="0" rIns="0" bIns="0" rtlCol="0" anchor="ctr"/>
+          <a:lstStyle/>
+          <a:p>
+            <a:pPr algn="ctr" indent="0" marL="0">
+              <a:buNone/>
+            </a:pPr>
+            <a:r>
+              <a:rPr lang="en-US" sz="1050" b="1" dirty="0">
+                <a:solidFill>
+                  <a:srgbClr val="CADCFC"/>
+                </a:solidFill>
+                <a:latin typeface="Calibri" pitchFamily="34" charset="0"/>
+                <a:ea typeface="Calibri" pitchFamily="34" charset="-122"/>
+                <a:cs typeface="Calibri" pitchFamily="34" charset="-120"/>
+              </a:rPr>
+              <a:t>Interview gate</a:t>
+            </a:r>
+            <a:endParaRPr lang="en-US" sz="1050" dirty="0"/>
+          </a:p>
+        </p:txBody>
+      </p:sp>
+      <p:sp>
+        <p:nvSpPr>
+          <p:cNvPr id="10" name="Shape 8"/>
+          <p:cNvSpPr/>
+          <p:nvPr/>
+        </p:nvSpPr>
+        <p:spPr>
+          <a:xfrm>
+            <a:off x="5239512" y="2240280"/>
+            <a:ext cx="1993392" cy="457200"/>
+          </a:xfrm>
+          <a:prstGeom prst="roundRect">
+            <a:avLst>
+              <a:gd name="adj" fmla="val 12000"/>
+            </a:avLst>
+          </a:prstGeom>
+          <a:solidFill>
+            <a:srgbClr val="141A47"/>
+          </a:solidFill>
+          <a:ln/>
+        </p:spPr>
+      </p:sp>
+      <p:sp>
+        <p:nvSpPr>
+          <p:cNvPr id="11" name="Text 9"/>
+          <p:cNvSpPr/>
+          <p:nvPr/>
+        </p:nvSpPr>
+        <p:spPr>
+          <a:xfrm>
+            <a:off x="5239512" y="2240280"/>
+            <a:ext cx="1993392" cy="457200"/>
+          </a:xfrm>
+          <a:prstGeom prst="rect">
+            <a:avLst/>
+          </a:prstGeom>
+          <a:noFill/>
+          <a:ln/>
+        </p:spPr>
+        <p:txBody>
+          <a:bodyPr wrap="square" lIns="0" tIns="0" rIns="0" bIns="0" rtlCol="0" anchor="ctr"/>
+          <a:lstStyle/>
+          <a:p>
+            <a:pPr algn="ctr" indent="0" marL="0">
+              <a:buNone/>
+            </a:pPr>
+            <a:r>
+              <a:rPr lang="en-US" sz="1050" b="1" dirty="0">
+                <a:solidFill>
+                  <a:srgbClr val="CADCFC"/>
+                </a:solidFill>
+                <a:latin typeface="Calibri" pitchFamily="34" charset="0"/>
+                <a:ea typeface="Calibri" pitchFamily="34" charset="-122"/>
+                <a:cs typeface="Calibri" pitchFamily="34" charset="-120"/>
+              </a:rPr>
+              <a:t>Traceability</a:t>
+            </a:r>
+            <a:endParaRPr lang="en-US" sz="1050" dirty="0"/>
+          </a:p>
+        </p:txBody>
+      </p:sp>
+      <p:sp>
+        <p:nvSpPr>
+          <p:cNvPr id="12" name="Shape 10"/>
+          <p:cNvSpPr/>
+          <p:nvPr/>
+        </p:nvSpPr>
+        <p:spPr>
+          <a:xfrm>
+            <a:off x="7379208" y="2240280"/>
+            <a:ext cx="1993392" cy="457200"/>
+          </a:xfrm>
+          <a:prstGeom prst="roundRect">
+            <a:avLst>
+              <a:gd name="adj" fmla="val 12000"/>
+            </a:avLst>
+          </a:prstGeom>
+          <a:solidFill>
+            <a:srgbClr val="141A47"/>
+          </a:solidFill>
+          <a:ln/>
+        </p:spPr>
+      </p:sp>
+      <p:sp>
+        <p:nvSpPr>
+          <p:cNvPr id="13" name="Text 11"/>
+          <p:cNvSpPr/>
+          <p:nvPr/>
+        </p:nvSpPr>
+        <p:spPr>
+          <a:xfrm>
+            <a:off x="7379208" y="2240280"/>
+            <a:ext cx="1993392" cy="457200"/>
+          </a:xfrm>
+          <a:prstGeom prst="rect">
+            <a:avLst/>
+          </a:prstGeom>
+          <a:noFill/>
+          <a:ln/>
+        </p:spPr>
+        <p:txBody>
+          <a:bodyPr wrap="square" lIns="0" tIns="0" rIns="0" bIns="0" rtlCol="0" anchor="ctr"/>
+          <a:lstStyle/>
+          <a:p>
+            <a:pPr algn="ctr" indent="0" marL="0">
+              <a:buNone/>
+            </a:pPr>
+            <a:r>
+              <a:rPr lang="en-US" sz="1050" b="1" dirty="0">
+                <a:solidFill>
+                  <a:srgbClr val="CADCFC"/>
+                </a:solidFill>
+                <a:latin typeface="Calibri" pitchFamily="34" charset="0"/>
+                <a:ea typeface="Calibri" pitchFamily="34" charset="-122"/>
+                <a:cs typeface="Calibri" pitchFamily="34" charset="-120"/>
+              </a:rPr>
+              <a:t>Dual-emit (console + code)</a:t>
+            </a:r>
+            <a:endParaRPr lang="en-US" sz="1050" dirty="0"/>
+          </a:p>
+        </p:txBody>
+      </p:sp>
+      <p:sp>
+        <p:nvSpPr>
+          <p:cNvPr id="14" name="Shape 12"/>
+          <p:cNvSpPr/>
+          <p:nvPr/>
+        </p:nvSpPr>
+        <p:spPr>
+          <a:xfrm>
+            <a:off x="9518904" y="2240280"/>
+            <a:ext cx="1993392" cy="457200"/>
+          </a:xfrm>
+          <a:prstGeom prst="roundRect">
+            <a:avLst>
+              <a:gd name="adj" fmla="val 12000"/>
+            </a:avLst>
+          </a:prstGeom>
+          <a:solidFill>
+            <a:srgbClr val="141A47"/>
+          </a:solidFill>
+          <a:ln/>
+        </p:spPr>
+      </p:sp>
+      <p:sp>
+        <p:nvSpPr>
+          <p:cNvPr id="15" name="Text 13"/>
+          <p:cNvSpPr/>
+          <p:nvPr/>
+        </p:nvSpPr>
+        <p:spPr>
+          <a:xfrm>
+            <a:off x="9518904" y="2240280"/>
+            <a:ext cx="1993392" cy="457200"/>
+          </a:xfrm>
+          <a:prstGeom prst="rect">
+            <a:avLst/>
+          </a:prstGeom>
+          <a:noFill/>
+          <a:ln/>
+        </p:spPr>
+        <p:txBody>
+          <a:bodyPr wrap="square" lIns="0" tIns="0" rIns="0" bIns="0" rtlCol="0" anchor="ctr"/>
+          <a:lstStyle/>
+          <a:p>
+            <a:pPr algn="ctr" indent="0" marL="0">
+              <a:buNone/>
+            </a:pPr>
+            <a:r>
+              <a:rPr lang="en-US" sz="1050" b="1" dirty="0">
+                <a:solidFill>
+                  <a:srgbClr val="CADCFC"/>
+                </a:solidFill>
+                <a:latin typeface="Calibri" pitchFamily="34" charset="0"/>
+                <a:ea typeface="Calibri" pitchFamily="34" charset="-122"/>
+                <a:cs typeface="Calibri" pitchFamily="34" charset="-120"/>
+              </a:rPr>
+              <a:t>Prompt assessor</a:t>
+            </a:r>
+            <a:endParaRPr lang="en-US" sz="1050" dirty="0"/>
+          </a:p>
+        </p:txBody>
+      </p:sp>
+      <p:sp>
+        <p:nvSpPr>
+          <p:cNvPr id="16" name="Text 14"/>
+          <p:cNvSpPr/>
+          <p:nvPr/>
+        </p:nvSpPr>
+        <p:spPr>
+          <a:xfrm>
+            <a:off x="640080" y="2971800"/>
+            <a:ext cx="10908792" cy="365760"/>
+          </a:xfrm>
+          <a:prstGeom prst="rect">
+            <a:avLst/>
+          </a:prstGeom>
+          <a:noFill/>
+          <a:ln/>
+        </p:spPr>
+        <p:txBody>
+          <a:bodyPr wrap="square" lIns="0" tIns="0" rIns="0" bIns="0" rtlCol="0" anchor="ctr"/>
+          <a:lstStyle/>
+          <a:p>
+            <a:pPr algn="ctr" indent="0" marL="0">
+              <a:buNone/>
+            </a:pPr>
+            <a:r>
+              <a:rPr lang="en-US" sz="1300" b="1" i="1" dirty="0">
+                <a:solidFill>
+                  <a:srgbClr val="00A896"/>
+                </a:solidFill>
+                <a:latin typeface="Calibri" pitchFamily="34" charset="0"/>
+                <a:ea typeface="Calibri" pitchFamily="34" charset="-122"/>
+                <a:cs typeface="Calibri" pitchFamily="34" charset="-120"/>
+              </a:rPr>
+              <a:t>delegates on-platform execution to  ↓</a:t>
+            </a:r>
+            <a:endParaRPr lang="en-US" sz="1300" dirty="0"/>
+          </a:p>
+        </p:txBody>
+      </p:sp>
+      <p:sp>
+        <p:nvSpPr>
+          <p:cNvPr id="17" name="Shape 15"/>
+          <p:cNvSpPr/>
+          <p:nvPr/>
+        </p:nvSpPr>
+        <p:spPr>
+          <a:xfrm>
+            <a:off x="640080" y="3429000"/>
+            <a:ext cx="10908792" cy="1874520"/>
+          </a:xfrm>
+          <a:prstGeom prst="roundRect">
+            <a:avLst>
+              <a:gd name="adj" fmla="val 4390"/>
+            </a:avLst>
+          </a:prstGeom>
+          <a:solidFill>
+            <a:srgbClr val="EAF7F3"/>
           </a:solidFill>
           <a:ln/>
           <a:effectLst>
@@ -5362,30 +6608,30 @@
       </p:sp>
       <p:sp>
         <p:nvSpPr>
-          <p:cNvPr id="8" name="Text 6"/>
-          <p:cNvSpPr/>
-          <p:nvPr/>
-        </p:nvSpPr>
-        <p:spPr>
-          <a:xfrm>
-            <a:off x="3694176" y="2075688"/>
-            <a:ext cx="2212848" cy="457200"/>
-          </a:xfrm>
-          <a:prstGeom prst="rect">
-            <a:avLst/>
-          </a:prstGeom>
-          <a:noFill/>
-          <a:ln/>
-        </p:spPr>
-        <p:txBody>
-          <a:bodyPr wrap="square" lIns="0" tIns="0" rIns="0" bIns="0" rtlCol="0" anchor="ctr"/>
-          <a:lstStyle/>
-          <a:p>
-            <a:pPr indent="0" marL="0">
-              <a:buNone/>
-            </a:pPr>
-            <a:r>
-              <a:rPr lang="en-US" sz="1500" b="1" dirty="0">
+          <p:cNvPr id="18" name="Text 16"/>
+          <p:cNvSpPr/>
+          <p:nvPr/>
+        </p:nvSpPr>
+        <p:spPr>
+          <a:xfrm>
+            <a:off x="960120" y="3566160"/>
+            <a:ext cx="10515600" cy="411480"/>
+          </a:xfrm>
+          <a:prstGeom prst="rect">
+            <a:avLst/>
+          </a:prstGeom>
+          <a:noFill/>
+          <a:ln/>
+        </p:spPr>
+        <p:txBody>
+          <a:bodyPr wrap="square" lIns="0" tIns="0" rIns="0" bIns="0" rtlCol="0" anchor="ctr"/>
+          <a:lstStyle/>
+          <a:p>
+            <a:pPr indent="0" marL="0">
+              <a:buNone/>
+            </a:pPr>
+            <a:r>
+              <a:rPr lang="en-US" sz="1700" b="1" dirty="0">
                 <a:solidFill>
                   <a:srgbClr val="1E2761"/>
                 </a:solidFill>
@@ -5393,69 +6639,30 @@
                 <a:ea typeface="Cambria" pitchFamily="34" charset="-122"/>
                 <a:cs typeface="Cambria" pitchFamily="34" charset="-120"/>
               </a:rPr>
-              <a:t>2  Interview</a:t>
-            </a:r>
-            <a:endParaRPr lang="en-US" sz="1500" dirty="0"/>
-          </a:p>
-        </p:txBody>
-      </p:sp>
-      <p:sp>
-        <p:nvSpPr>
-          <p:cNvPr id="9" name="Text 7"/>
-          <p:cNvSpPr/>
-          <p:nvPr/>
-        </p:nvSpPr>
-        <p:spPr>
-          <a:xfrm>
-            <a:off x="3694176" y="2532888"/>
-            <a:ext cx="2212848" cy="960120"/>
-          </a:xfrm>
-          <a:prstGeom prst="rect">
-            <a:avLst/>
-          </a:prstGeom>
-          <a:noFill/>
-          <a:ln/>
-        </p:spPr>
-        <p:txBody>
-          <a:bodyPr wrap="square" lIns="0" tIns="0" rIns="0" bIns="0" rtlCol="0" anchor="ctr"/>
-          <a:lstStyle/>
-          <a:p>
-            <a:pPr indent="0" marL="0">
-              <a:buNone/>
-            </a:pPr>
-            <a:r>
-              <a:rPr lang="en-US" sz="1200" dirty="0">
-                <a:solidFill>
-                  <a:srgbClr val="22284B"/>
-                </a:solidFill>
-                <a:latin typeface="Calibri" pitchFamily="34" charset="0"/>
-                <a:ea typeface="Calibri" pitchFamily="34" charset="-122"/>
-                <a:cs typeface="Calibri" pitchFamily="34" charset="-120"/>
-              </a:rPr>
-              <a:t>Batched, prioritized questions with defaults. Won’t design until P0s are answered.</a:t>
-            </a:r>
-            <a:endParaRPr lang="en-US" sz="1200" dirty="0"/>
-          </a:p>
-        </p:txBody>
-      </p:sp>
-      <p:sp>
-        <p:nvSpPr>
-          <p:cNvPr id="10" name="Shape 8"/>
-          <p:cNvSpPr/>
-          <p:nvPr/>
-        </p:nvSpPr>
-        <p:spPr>
-          <a:xfrm>
-            <a:off x="6236208" y="1874520"/>
-            <a:ext cx="2670048" cy="1737360"/>
+              <a:t>Official cxas-scrapi Agent Skills  —  DO the building, evaluating, debugging</a:t>
+            </a:r>
+            <a:endParaRPr lang="en-US" sz="1700" dirty="0"/>
+          </a:p>
+        </p:txBody>
+      </p:sp>
+      <p:sp>
+        <p:nvSpPr>
+          <p:cNvPr id="19" name="Shape 17"/>
+          <p:cNvSpPr/>
+          <p:nvPr/>
+        </p:nvSpPr>
+        <p:spPr>
+          <a:xfrm>
+            <a:off x="960120" y="4069080"/>
+            <a:ext cx="1993392" cy="1051560"/>
           </a:xfrm>
           <a:prstGeom prst="roundRect">
             <a:avLst>
-              <a:gd name="adj" fmla="val 4737"/>
+              <a:gd name="adj" fmla="val 5217"/>
             </a:avLst>
           </a:prstGeom>
           <a:solidFill>
-            <a:srgbClr val="F2F6FF"/>
+            <a:srgbClr val="FFFFFF"/>
           </a:solidFill>
           <a:ln/>
           <a:effectLst>
@@ -5469,100 +6676,100 @@
       </p:sp>
       <p:sp>
         <p:nvSpPr>
-          <p:cNvPr id="11" name="Text 9"/>
-          <p:cNvSpPr/>
-          <p:nvPr/>
-        </p:nvSpPr>
-        <p:spPr>
-          <a:xfrm>
-            <a:off x="6492240" y="2075688"/>
-            <a:ext cx="2212848" cy="457200"/>
-          </a:xfrm>
-          <a:prstGeom prst="rect">
-            <a:avLst/>
-          </a:prstGeom>
-          <a:noFill/>
-          <a:ln/>
-        </p:spPr>
-        <p:txBody>
-          <a:bodyPr wrap="square" lIns="0" tIns="0" rIns="0" bIns="0" rtlCol="0" anchor="ctr"/>
-          <a:lstStyle/>
-          <a:p>
-            <a:pPr indent="0" marL="0">
-              <a:buNone/>
-            </a:pPr>
-            <a:r>
-              <a:rPr lang="en-US" sz="1500" b="1" dirty="0">
+          <p:cNvPr id="20" name="Text 18"/>
+          <p:cNvSpPr/>
+          <p:nvPr/>
+        </p:nvSpPr>
+        <p:spPr>
+          <a:xfrm>
+            <a:off x="1033272" y="4187952"/>
+            <a:ext cx="1847088" cy="548640"/>
+          </a:xfrm>
+          <a:prstGeom prst="rect">
+            <a:avLst/>
+          </a:prstGeom>
+          <a:noFill/>
+          <a:ln/>
+        </p:spPr>
+        <p:txBody>
+          <a:bodyPr wrap="square" lIns="0" tIns="0" rIns="0" bIns="0" rtlCol="0" anchor="ctr"/>
+          <a:lstStyle/>
+          <a:p>
+            <a:pPr algn="ctr" indent="0" marL="0">
+              <a:buNone/>
+            </a:pPr>
+            <a:r>
+              <a:rPr lang="en-US" sz="1050" b="1" dirty="0">
                 <a:solidFill>
                   <a:srgbClr val="1E2761"/>
                 </a:solidFill>
-                <a:latin typeface="Cambria" pitchFamily="34" charset="0"/>
-                <a:ea typeface="Cambria" pitchFamily="34" charset="-122"/>
-                <a:cs typeface="Cambria" pitchFamily="34" charset="-120"/>
-              </a:rPr>
-              <a:t>3  Design</a:t>
-            </a:r>
-            <a:endParaRPr lang="en-US" sz="1500" dirty="0"/>
-          </a:p>
-        </p:txBody>
-      </p:sp>
-      <p:sp>
-        <p:nvSpPr>
-          <p:cNvPr id="12" name="Text 10"/>
-          <p:cNvSpPr/>
-          <p:nvPr/>
-        </p:nvSpPr>
-        <p:spPr>
-          <a:xfrm>
-            <a:off x="6492240" y="2532888"/>
-            <a:ext cx="2212848" cy="960120"/>
-          </a:xfrm>
-          <a:prstGeom prst="rect">
-            <a:avLst/>
-          </a:prstGeom>
-          <a:noFill/>
-          <a:ln/>
-        </p:spPr>
-        <p:txBody>
-          <a:bodyPr wrap="square" lIns="0" tIns="0" rIns="0" bIns="0" rtlCol="0" anchor="ctr"/>
-          <a:lstStyle/>
-          <a:p>
-            <a:pPr indent="0" marL="0">
-              <a:buNone/>
-            </a:pPr>
-            <a:r>
-              <a:rPr lang="en-US" sz="1200" dirty="0">
-                <a:solidFill>
-                  <a:srgbClr val="22284B"/>
-                </a:solidFill>
-                <a:latin typeface="Calibri" pitchFamily="34" charset="0"/>
-                <a:ea typeface="Calibri" pitchFamily="34" charset="-122"/>
-                <a:cs typeface="Calibri" pitchFamily="34" charset="-120"/>
-              </a:rPr>
-              <a:t>App → agents → tools → guardrails; a traceability matrix (requirement → design → eval).</a:t>
-            </a:r>
-            <a:endParaRPr lang="en-US" sz="1200" dirty="0"/>
-          </a:p>
-        </p:txBody>
-      </p:sp>
-      <p:sp>
-        <p:nvSpPr>
-          <p:cNvPr id="13" name="Shape 11"/>
-          <p:cNvSpPr/>
-          <p:nvPr/>
-        </p:nvSpPr>
-        <p:spPr>
-          <a:xfrm>
-            <a:off x="9034272" y="1874520"/>
-            <a:ext cx="2670048" cy="1737360"/>
+                <a:latin typeface="Calibri" pitchFamily="34" charset="0"/>
+                <a:ea typeface="Calibri" pitchFamily="34" charset="-122"/>
+                <a:cs typeface="Calibri" pitchFamily="34" charset="-120"/>
+              </a:rPr>
+              <a:t>cxas-agent-foundry</a:t>
+            </a:r>
+            <a:endParaRPr lang="en-US" sz="1050" dirty="0"/>
+          </a:p>
+        </p:txBody>
+      </p:sp>
+      <p:sp>
+        <p:nvSpPr>
+          <p:cNvPr id="21" name="Text 19"/>
+          <p:cNvSpPr/>
+          <p:nvPr/>
+        </p:nvSpPr>
+        <p:spPr>
+          <a:xfrm>
+            <a:off x="1033272" y="4681728"/>
+            <a:ext cx="1847088" cy="365760"/>
+          </a:xfrm>
+          <a:prstGeom prst="rect">
+            <a:avLst/>
+          </a:prstGeom>
+          <a:noFill/>
+          <a:ln/>
+        </p:spPr>
+        <p:txBody>
+          <a:bodyPr wrap="square" lIns="0" tIns="0" rIns="0" bIns="0" rtlCol="0" anchor="ctr"/>
+          <a:lstStyle/>
+          <a:p>
+            <a:pPr algn="ctr" indent="0" marL="0">
+              <a:buNone/>
+            </a:pPr>
+            <a:r>
+              <a:rPr lang="en-US" sz="950" i="1" dirty="0">
+                <a:solidFill>
+                  <a:srgbClr val="5B6785"/>
+                </a:solidFill>
+                <a:latin typeface="Calibri" pitchFamily="34" charset="0"/>
+                <a:ea typeface="Calibri" pitchFamily="34" charset="-122"/>
+                <a:cs typeface="Calibri" pitchFamily="34" charset="-120"/>
+              </a:rPr>
+              <a:t>build · eval · debug</a:t>
+            </a:r>
+            <a:endParaRPr lang="en-US" sz="950" dirty="0"/>
+          </a:p>
+        </p:txBody>
+      </p:sp>
+      <p:sp>
+        <p:nvSpPr>
+          <p:cNvPr id="22" name="Shape 20"/>
+          <p:cNvSpPr/>
+          <p:nvPr/>
+        </p:nvSpPr>
+        <p:spPr>
+          <a:xfrm>
+            <a:off x="3099816" y="4069080"/>
+            <a:ext cx="1993392" cy="1051560"/>
           </a:xfrm>
           <a:prstGeom prst="roundRect">
             <a:avLst>
-              <a:gd name="adj" fmla="val 4737"/>
+              <a:gd name="adj" fmla="val 5217"/>
             </a:avLst>
           </a:prstGeom>
           <a:solidFill>
-            <a:srgbClr val="F2F6FF"/>
+            <a:srgbClr val="FFFFFF"/>
           </a:solidFill>
           <a:ln/>
           <a:effectLst>
@@ -5576,100 +6783,100 @@
       </p:sp>
       <p:sp>
         <p:nvSpPr>
-          <p:cNvPr id="14" name="Text 12"/>
-          <p:cNvSpPr/>
-          <p:nvPr/>
-        </p:nvSpPr>
-        <p:spPr>
-          <a:xfrm>
-            <a:off x="9290304" y="2075688"/>
-            <a:ext cx="2212848" cy="457200"/>
-          </a:xfrm>
-          <a:prstGeom prst="rect">
-            <a:avLst/>
-          </a:prstGeom>
-          <a:noFill/>
-          <a:ln/>
-        </p:spPr>
-        <p:txBody>
-          <a:bodyPr wrap="square" lIns="0" tIns="0" rIns="0" bIns="0" rtlCol="0" anchor="ctr"/>
-          <a:lstStyle/>
-          <a:p>
-            <a:pPr indent="0" marL="0">
-              <a:buNone/>
-            </a:pPr>
-            <a:r>
-              <a:rPr lang="en-US" sz="1500" b="1" dirty="0">
+          <p:cNvPr id="23" name="Text 21"/>
+          <p:cNvSpPr/>
+          <p:nvPr/>
+        </p:nvSpPr>
+        <p:spPr>
+          <a:xfrm>
+            <a:off x="3172968" y="4187952"/>
+            <a:ext cx="1847088" cy="548640"/>
+          </a:xfrm>
+          <a:prstGeom prst="rect">
+            <a:avLst/>
+          </a:prstGeom>
+          <a:noFill/>
+          <a:ln/>
+        </p:spPr>
+        <p:txBody>
+          <a:bodyPr wrap="square" lIns="0" tIns="0" rIns="0" bIns="0" rtlCol="0" anchor="ctr"/>
+          <a:lstStyle/>
+          <a:p>
+            <a:pPr algn="ctr" indent="0" marL="0">
+              <a:buNone/>
+            </a:pPr>
+            <a:r>
+              <a:rPr lang="en-US" sz="1050" b="1" dirty="0">
                 <a:solidFill>
                   <a:srgbClr val="1E2761"/>
                 </a:solidFill>
-                <a:latin typeface="Cambria" pitchFamily="34" charset="0"/>
-                <a:ea typeface="Cambria" pitchFamily="34" charset="-122"/>
-                <a:cs typeface="Cambria" pitchFamily="34" charset="-120"/>
-              </a:rPr>
-              <a:t>4  Build</a:t>
-            </a:r>
-            <a:endParaRPr lang="en-US" sz="1500" dirty="0"/>
-          </a:p>
-        </p:txBody>
-      </p:sp>
-      <p:sp>
-        <p:nvSpPr>
-          <p:cNvPr id="15" name="Text 13"/>
-          <p:cNvSpPr/>
-          <p:nvPr/>
-        </p:nvSpPr>
-        <p:spPr>
-          <a:xfrm>
-            <a:off x="9290304" y="2532888"/>
-            <a:ext cx="2212848" cy="960120"/>
-          </a:xfrm>
-          <a:prstGeom prst="rect">
-            <a:avLst/>
-          </a:prstGeom>
-          <a:noFill/>
-          <a:ln/>
-        </p:spPr>
-        <p:txBody>
-          <a:bodyPr wrap="square" lIns="0" tIns="0" rIns="0" bIns="0" rtlCol="0" anchor="ctr"/>
-          <a:lstStyle/>
-          <a:p>
-            <a:pPr indent="0" marL="0">
-              <a:buNone/>
-            </a:pPr>
-            <a:r>
-              <a:rPr lang="en-US" sz="1200" dirty="0">
-                <a:solidFill>
-                  <a:srgbClr val="22284B"/>
-                </a:solidFill>
-                <a:latin typeface="Calibri" pitchFamily="34" charset="0"/>
-                <a:ea typeface="Calibri" pitchFamily="34" charset="-122"/>
-                <a:cs typeface="Calibri" pitchFamily="34" charset="-120"/>
-              </a:rPr>
-              <a:t>Console runbook AND cxas-scrapi config + Python + cxas push/lint. One source, two paths.</a:t>
-            </a:r>
-            <a:endParaRPr lang="en-US" sz="1200" dirty="0"/>
-          </a:p>
-        </p:txBody>
-      </p:sp>
-      <p:sp>
-        <p:nvSpPr>
-          <p:cNvPr id="16" name="Shape 14"/>
-          <p:cNvSpPr/>
-          <p:nvPr/>
-        </p:nvSpPr>
-        <p:spPr>
-          <a:xfrm>
-            <a:off x="640080" y="3840480"/>
-            <a:ext cx="2670048" cy="1737360"/>
+                <a:latin typeface="Calibri" pitchFamily="34" charset="0"/>
+                <a:ea typeface="Calibri" pitchFamily="34" charset="-122"/>
+                <a:cs typeface="Calibri" pitchFamily="34" charset="-120"/>
+              </a:rPr>
+              <a:t>cxas-sim-eval</a:t>
+            </a:r>
+            <a:endParaRPr lang="en-US" sz="1050" dirty="0"/>
+          </a:p>
+        </p:txBody>
+      </p:sp>
+      <p:sp>
+        <p:nvSpPr>
+          <p:cNvPr id="24" name="Text 22"/>
+          <p:cNvSpPr/>
+          <p:nvPr/>
+        </p:nvSpPr>
+        <p:spPr>
+          <a:xfrm>
+            <a:off x="3172968" y="4681728"/>
+            <a:ext cx="1847088" cy="365760"/>
+          </a:xfrm>
+          <a:prstGeom prst="rect">
+            <a:avLst/>
+          </a:prstGeom>
+          <a:noFill/>
+          <a:ln/>
+        </p:spPr>
+        <p:txBody>
+          <a:bodyPr wrap="square" lIns="0" tIns="0" rIns="0" bIns="0" rtlCol="0" anchor="ctr"/>
+          <a:lstStyle/>
+          <a:p>
+            <a:pPr algn="ctr" indent="0" marL="0">
+              <a:buNone/>
+            </a:pPr>
+            <a:r>
+              <a:rPr lang="en-US" sz="950" i="1" dirty="0">
+                <a:solidFill>
+                  <a:srgbClr val="5B6785"/>
+                </a:solidFill>
+                <a:latin typeface="Calibri" pitchFamily="34" charset="0"/>
+                <a:ea typeface="Calibri" pitchFamily="34" charset="-122"/>
+                <a:cs typeface="Calibri" pitchFamily="34" charset="-120"/>
+              </a:rPr>
+              <a:t>goldens → SimulationEvals</a:t>
+            </a:r>
+            <a:endParaRPr lang="en-US" sz="950" dirty="0"/>
+          </a:p>
+        </p:txBody>
+      </p:sp>
+      <p:sp>
+        <p:nvSpPr>
+          <p:cNvPr id="25" name="Shape 23"/>
+          <p:cNvSpPr/>
+          <p:nvPr/>
+        </p:nvSpPr>
+        <p:spPr>
+          <a:xfrm>
+            <a:off x="5239512" y="4069080"/>
+            <a:ext cx="1993392" cy="1051560"/>
           </a:xfrm>
           <a:prstGeom prst="roundRect">
             <a:avLst>
-              <a:gd name="adj" fmla="val 4737"/>
+              <a:gd name="adj" fmla="val 5217"/>
             </a:avLst>
           </a:prstGeom>
           <a:solidFill>
-            <a:srgbClr val="EAF7F3"/>
+            <a:srgbClr val="FFFFFF"/>
           </a:solidFill>
           <a:ln/>
           <a:effectLst>
@@ -5683,100 +6890,100 @@
       </p:sp>
       <p:sp>
         <p:nvSpPr>
-          <p:cNvPr id="17" name="Text 15"/>
-          <p:cNvSpPr/>
-          <p:nvPr/>
-        </p:nvSpPr>
-        <p:spPr>
-          <a:xfrm>
-            <a:off x="896112" y="4041648"/>
-            <a:ext cx="2212848" cy="457200"/>
-          </a:xfrm>
-          <a:prstGeom prst="rect">
-            <a:avLst/>
-          </a:prstGeom>
-          <a:noFill/>
-          <a:ln/>
-        </p:spPr>
-        <p:txBody>
-          <a:bodyPr wrap="square" lIns="0" tIns="0" rIns="0" bIns="0" rtlCol="0" anchor="ctr"/>
-          <a:lstStyle/>
-          <a:p>
-            <a:pPr indent="0" marL="0">
-              <a:buNone/>
-            </a:pPr>
-            <a:r>
-              <a:rPr lang="en-US" sz="1500" b="1" dirty="0">
+          <p:cNvPr id="26" name="Text 24"/>
+          <p:cNvSpPr/>
+          <p:nvPr/>
+        </p:nvSpPr>
+        <p:spPr>
+          <a:xfrm>
+            <a:off x="5312664" y="4187952"/>
+            <a:ext cx="1847088" cy="548640"/>
+          </a:xfrm>
+          <a:prstGeom prst="rect">
+            <a:avLst/>
+          </a:prstGeom>
+          <a:noFill/>
+          <a:ln/>
+        </p:spPr>
+        <p:txBody>
+          <a:bodyPr wrap="square" lIns="0" tIns="0" rIns="0" bIns="0" rtlCol="0" anchor="ctr"/>
+          <a:lstStyle/>
+          <a:p>
+            <a:pPr algn="ctr" indent="0" marL="0">
+              <a:buNone/>
+            </a:pPr>
+            <a:r>
+              <a:rPr lang="en-US" sz="1050" b="1" dirty="0">
                 <a:solidFill>
                   <a:srgbClr val="1E2761"/>
                 </a:solidFill>
-                <a:latin typeface="Cambria" pitchFamily="34" charset="0"/>
-                <a:ea typeface="Cambria" pitchFamily="34" charset="-122"/>
-                <a:cs typeface="Cambria" pitchFamily="34" charset="-120"/>
-              </a:rPr>
-              <a:t>5  Evals</a:t>
-            </a:r>
-            <a:endParaRPr lang="en-US" sz="1500" dirty="0"/>
-          </a:p>
-        </p:txBody>
-      </p:sp>
-      <p:sp>
-        <p:nvSpPr>
-          <p:cNvPr id="18" name="Text 16"/>
-          <p:cNvSpPr/>
-          <p:nvPr/>
-        </p:nvSpPr>
-        <p:spPr>
-          <a:xfrm>
-            <a:off x="896112" y="4498848"/>
-            <a:ext cx="2212848" cy="960120"/>
-          </a:xfrm>
-          <a:prstGeom prst="rect">
-            <a:avLst/>
-          </a:prstGeom>
-          <a:noFill/>
-          <a:ln/>
-        </p:spPr>
-        <p:txBody>
-          <a:bodyPr wrap="square" lIns="0" tIns="0" rIns="0" bIns="0" rtlCol="0" anchor="ctr"/>
-          <a:lstStyle/>
-          <a:p>
-            <a:pPr indent="0" marL="0">
-              <a:buNone/>
-            </a:pPr>
-            <a:r>
-              <a:rPr lang="en-US" sz="1200" dirty="0">
-                <a:solidFill>
-                  <a:srgbClr val="22284B"/>
-                </a:solidFill>
-                <a:latin typeface="Calibri" pitchFamily="34" charset="0"/>
-                <a:ea typeface="Calibri" pitchFamily="34" charset="-122"/>
-                <a:cs typeface="Calibri" pitchFamily="34" charset="-120"/>
-              </a:rPr>
-              <a:t>All 5 cxas eval types with KPI-tied thresholds. 100% requirement coverage.</a:t>
-            </a:r>
-            <a:endParaRPr lang="en-US" sz="1200" dirty="0"/>
-          </a:p>
-        </p:txBody>
-      </p:sp>
-      <p:sp>
-        <p:nvSpPr>
-          <p:cNvPr id="19" name="Shape 17"/>
-          <p:cNvSpPr/>
-          <p:nvPr/>
-        </p:nvSpPr>
-        <p:spPr>
-          <a:xfrm>
-            <a:off x="3438144" y="3840480"/>
-            <a:ext cx="2670048" cy="1737360"/>
+                <a:latin typeface="Calibri" pitchFamily="34" charset="0"/>
+                <a:ea typeface="Calibri" pitchFamily="34" charset="-122"/>
+                <a:cs typeface="Calibri" pitchFamily="34" charset="-120"/>
+              </a:rPr>
+              <a:t>cxas-dfcx-migration</a:t>
+            </a:r>
+            <a:endParaRPr lang="en-US" sz="1050" dirty="0"/>
+          </a:p>
+        </p:txBody>
+      </p:sp>
+      <p:sp>
+        <p:nvSpPr>
+          <p:cNvPr id="27" name="Text 25"/>
+          <p:cNvSpPr/>
+          <p:nvPr/>
+        </p:nvSpPr>
+        <p:spPr>
+          <a:xfrm>
+            <a:off x="5312664" y="4681728"/>
+            <a:ext cx="1847088" cy="365760"/>
+          </a:xfrm>
+          <a:prstGeom prst="rect">
+            <a:avLst/>
+          </a:prstGeom>
+          <a:noFill/>
+          <a:ln/>
+        </p:spPr>
+        <p:txBody>
+          <a:bodyPr wrap="square" lIns="0" tIns="0" rIns="0" bIns="0" rtlCol="0" anchor="ctr"/>
+          <a:lstStyle/>
+          <a:p>
+            <a:pPr algn="ctr" indent="0" marL="0">
+              <a:buNone/>
+            </a:pPr>
+            <a:r>
+              <a:rPr lang="en-US" sz="950" i="1" dirty="0">
+                <a:solidFill>
+                  <a:srgbClr val="5B6785"/>
+                </a:solidFill>
+                <a:latin typeface="Calibri" pitchFamily="34" charset="0"/>
+                <a:ea typeface="Calibri" pitchFamily="34" charset="-122"/>
+                <a:cs typeface="Calibri" pitchFamily="34" charset="-120"/>
+              </a:rPr>
+              <a:t>DFCX → CXAS</a:t>
+            </a:r>
+            <a:endParaRPr lang="en-US" sz="950" dirty="0"/>
+          </a:p>
+        </p:txBody>
+      </p:sp>
+      <p:sp>
+        <p:nvSpPr>
+          <p:cNvPr id="28" name="Shape 26"/>
+          <p:cNvSpPr/>
+          <p:nvPr/>
+        </p:nvSpPr>
+        <p:spPr>
+          <a:xfrm>
+            <a:off x="7379208" y="4069080"/>
+            <a:ext cx="1993392" cy="1051560"/>
           </a:xfrm>
           <a:prstGeom prst="roundRect">
             <a:avLst>
-              <a:gd name="adj" fmla="val 4737"/>
+              <a:gd name="adj" fmla="val 5217"/>
             </a:avLst>
           </a:prstGeom>
           <a:solidFill>
-            <a:srgbClr val="EAF7F3"/>
+            <a:srgbClr val="FFFFFF"/>
           </a:solidFill>
           <a:ln/>
           <a:effectLst>
@@ -5790,100 +6997,100 @@
       </p:sp>
       <p:sp>
         <p:nvSpPr>
-          <p:cNvPr id="20" name="Text 18"/>
-          <p:cNvSpPr/>
-          <p:nvPr/>
-        </p:nvSpPr>
-        <p:spPr>
-          <a:xfrm>
-            <a:off x="3694176" y="4041648"/>
-            <a:ext cx="2212848" cy="457200"/>
-          </a:xfrm>
-          <a:prstGeom prst="rect">
-            <a:avLst/>
-          </a:prstGeom>
-          <a:noFill/>
-          <a:ln/>
-        </p:spPr>
-        <p:txBody>
-          <a:bodyPr wrap="square" lIns="0" tIns="0" rIns="0" bIns="0" rtlCol="0" anchor="ctr"/>
-          <a:lstStyle/>
-          <a:p>
-            <a:pPr indent="0" marL="0">
-              <a:buNone/>
-            </a:pPr>
-            <a:r>
-              <a:rPr lang="en-US" sz="1500" b="1" dirty="0">
+          <p:cNvPr id="29" name="Text 27"/>
+          <p:cNvSpPr/>
+          <p:nvPr/>
+        </p:nvSpPr>
+        <p:spPr>
+          <a:xfrm>
+            <a:off x="7452360" y="4187952"/>
+            <a:ext cx="1847088" cy="548640"/>
+          </a:xfrm>
+          <a:prstGeom prst="rect">
+            <a:avLst/>
+          </a:prstGeom>
+          <a:noFill/>
+          <a:ln/>
+        </p:spPr>
+        <p:txBody>
+          <a:bodyPr wrap="square" lIns="0" tIns="0" rIns="0" bIns="0" rtlCol="0" anchor="ctr"/>
+          <a:lstStyle/>
+          <a:p>
+            <a:pPr algn="ctr" indent="0" marL="0">
+              <a:buNone/>
+            </a:pPr>
+            <a:r>
+              <a:rPr lang="en-US" sz="1050" b="1" dirty="0">
                 <a:solidFill>
                   <a:srgbClr val="1E2761"/>
                 </a:solidFill>
-                <a:latin typeface="Cambria" pitchFamily="34" charset="0"/>
-                <a:ea typeface="Cambria" pitchFamily="34" charset="-122"/>
-                <a:cs typeface="Cambria" pitchFamily="34" charset="-120"/>
-              </a:rPr>
-              <a:t>6  Validate</a:t>
-            </a:r>
-            <a:endParaRPr lang="en-US" sz="1500" dirty="0"/>
-          </a:p>
-        </p:txBody>
-      </p:sp>
-      <p:sp>
-        <p:nvSpPr>
-          <p:cNvPr id="21" name="Text 19"/>
-          <p:cNvSpPr/>
-          <p:nvPr/>
-        </p:nvSpPr>
-        <p:spPr>
-          <a:xfrm>
-            <a:off x="3694176" y="4498848"/>
-            <a:ext cx="2212848" cy="960120"/>
-          </a:xfrm>
-          <a:prstGeom prst="rect">
-            <a:avLst/>
-          </a:prstGeom>
-          <a:noFill/>
-          <a:ln/>
-        </p:spPr>
-        <p:txBody>
-          <a:bodyPr wrap="square" lIns="0" tIns="0" rIns="0" bIns="0" rtlCol="0" anchor="ctr"/>
-          <a:lstStyle/>
-          <a:p>
-            <a:pPr indent="0" marL="0">
-              <a:buNone/>
-            </a:pPr>
-            <a:r>
-              <a:rPr lang="en-US" sz="1200" dirty="0">
-                <a:solidFill>
-                  <a:srgbClr val="22284B"/>
-                </a:solidFill>
-                <a:latin typeface="Calibri" pitchFamily="34" charset="0"/>
-                <a:ea typeface="Calibri" pitchFamily="34" charset="-122"/>
-                <a:cs typeface="Calibri" pitchFamily="34" charset="-120"/>
-              </a:rPr>
-              <a:t>cxas-lint self-audit (0 blockers) + deploy runbook + sign-off gate.</a:t>
-            </a:r>
-            <a:endParaRPr lang="en-US" sz="1200" dirty="0"/>
-          </a:p>
-        </p:txBody>
-      </p:sp>
-      <p:sp>
-        <p:nvSpPr>
-          <p:cNvPr id="22" name="Shape 20"/>
-          <p:cNvSpPr/>
-          <p:nvPr/>
-        </p:nvSpPr>
-        <p:spPr>
-          <a:xfrm>
-            <a:off x="6236208" y="3840480"/>
-            <a:ext cx="2670048" cy="1737360"/>
+                <a:latin typeface="Calibri" pitchFamily="34" charset="0"/>
+                <a:ea typeface="Calibri" pitchFamily="34" charset="-122"/>
+                <a:cs typeface="Calibri" pitchFamily="34" charset="-120"/>
+              </a:rPr>
+              <a:t>cxas-cuj-report-generator</a:t>
+            </a:r>
+            <a:endParaRPr lang="en-US" sz="1050" dirty="0"/>
+          </a:p>
+        </p:txBody>
+      </p:sp>
+      <p:sp>
+        <p:nvSpPr>
+          <p:cNvPr id="30" name="Text 28"/>
+          <p:cNvSpPr/>
+          <p:nvPr/>
+        </p:nvSpPr>
+        <p:spPr>
+          <a:xfrm>
+            <a:off x="7452360" y="4681728"/>
+            <a:ext cx="1847088" cy="365760"/>
+          </a:xfrm>
+          <a:prstGeom prst="rect">
+            <a:avLst/>
+          </a:prstGeom>
+          <a:noFill/>
+          <a:ln/>
+        </p:spPr>
+        <p:txBody>
+          <a:bodyPr wrap="square" lIns="0" tIns="0" rIns="0" bIns="0" rtlCol="0" anchor="ctr"/>
+          <a:lstStyle/>
+          <a:p>
+            <a:pPr algn="ctr" indent="0" marL="0">
+              <a:buNone/>
+            </a:pPr>
+            <a:r>
+              <a:rPr lang="en-US" sz="950" i="1" dirty="0">
+                <a:solidFill>
+                  <a:srgbClr val="5B6785"/>
+                </a:solidFill>
+                <a:latin typeface="Calibri" pitchFamily="34" charset="0"/>
+                <a:ea typeface="Calibri" pitchFamily="34" charset="-122"/>
+                <a:cs typeface="Calibri" pitchFamily="34" charset="-120"/>
+              </a:rPr>
+              <a:t>docs → CUJ reports</a:t>
+            </a:r>
+            <a:endParaRPr lang="en-US" sz="950" dirty="0"/>
+          </a:p>
+        </p:txBody>
+      </p:sp>
+      <p:sp>
+        <p:nvSpPr>
+          <p:cNvPr id="31" name="Shape 29"/>
+          <p:cNvSpPr/>
+          <p:nvPr/>
+        </p:nvSpPr>
+        <p:spPr>
+          <a:xfrm>
+            <a:off x="9518904" y="4069080"/>
+            <a:ext cx="1993392" cy="1051560"/>
           </a:xfrm>
           <a:prstGeom prst="roundRect">
             <a:avLst>
-              <a:gd name="adj" fmla="val 4737"/>
+              <a:gd name="adj" fmla="val 5217"/>
             </a:avLst>
           </a:prstGeom>
           <a:solidFill>
-            <a:srgbClr val="EAF7F3"/>
+            <a:srgbClr val="FFFFFF"/>
           </a:solidFill>
           <a:ln/>
           <a:effectLst>
@@ -5897,192 +7104,124 @@
       </p:sp>
       <p:sp>
         <p:nvSpPr>
-          <p:cNvPr id="23" name="Text 21"/>
-          <p:cNvSpPr/>
-          <p:nvPr/>
-        </p:nvSpPr>
-        <p:spPr>
-          <a:xfrm>
-            <a:off x="6492240" y="4041648"/>
-            <a:ext cx="2212848" cy="457200"/>
-          </a:xfrm>
-          <a:prstGeom prst="rect">
-            <a:avLst/>
-          </a:prstGeom>
-          <a:noFill/>
-          <a:ln/>
-        </p:spPr>
-        <p:txBody>
-          <a:bodyPr wrap="square" lIns="0" tIns="0" rIns="0" bIns="0" rtlCol="0" anchor="ctr"/>
-          <a:lstStyle/>
-          <a:p>
-            <a:pPr indent="0" marL="0">
-              <a:buNone/>
-            </a:pPr>
-            <a:r>
-              <a:rPr lang="en-US" sz="1500" b="1" dirty="0">
+          <p:cNvPr id="32" name="Text 30"/>
+          <p:cNvSpPr/>
+          <p:nvPr/>
+        </p:nvSpPr>
+        <p:spPr>
+          <a:xfrm>
+            <a:off x="9592056" y="4187952"/>
+            <a:ext cx="1847088" cy="548640"/>
+          </a:xfrm>
+          <a:prstGeom prst="rect">
+            <a:avLst/>
+          </a:prstGeom>
+          <a:noFill/>
+          <a:ln/>
+        </p:spPr>
+        <p:txBody>
+          <a:bodyPr wrap="square" lIns="0" tIns="0" rIns="0" bIns="0" rtlCol="0" anchor="ctr"/>
+          <a:lstStyle/>
+          <a:p>
+            <a:pPr algn="ctr" indent="0" marL="0">
+              <a:buNone/>
+            </a:pPr>
+            <a:r>
+              <a:rPr lang="en-US" sz="1050" b="1" dirty="0">
                 <a:solidFill>
                   <a:srgbClr val="1E2761"/>
                 </a:solidFill>
-                <a:latin typeface="Cambria" pitchFamily="34" charset="0"/>
-                <a:ea typeface="Cambria" pitchFamily="34" charset="-122"/>
-                <a:cs typeface="Cambria" pitchFamily="34" charset="-120"/>
-              </a:rPr>
-              <a:t>7  Debug &amp; Fix</a:t>
-            </a:r>
-            <a:endParaRPr lang="en-US" sz="1500" dirty="0"/>
-          </a:p>
-        </p:txBody>
-      </p:sp>
-      <p:sp>
-        <p:nvSpPr>
-          <p:cNvPr id="24" name="Text 22"/>
-          <p:cNvSpPr/>
-          <p:nvPr/>
-        </p:nvSpPr>
-        <p:spPr>
-          <a:xfrm>
-            <a:off x="6492240" y="4498848"/>
-            <a:ext cx="2212848" cy="960120"/>
-          </a:xfrm>
-          <a:prstGeom prst="rect">
-            <a:avLst/>
-          </a:prstGeom>
-          <a:noFill/>
-          <a:ln/>
-        </p:spPr>
-        <p:txBody>
-          <a:bodyPr wrap="square" lIns="0" tIns="0" rIns="0" bIns="0" rtlCol="0" anchor="ctr"/>
-          <a:lstStyle/>
-          <a:p>
-            <a:pPr indent="0" marL="0">
-              <a:buNone/>
-            </a:pPr>
-            <a:r>
-              <a:rPr lang="en-US" sz="1200" dirty="0">
-                <a:solidFill>
-                  <a:srgbClr val="22284B"/>
-                </a:solidFill>
-                <a:latin typeface="Calibri" pitchFamily="34" charset="0"/>
-                <a:ea typeface="Calibri" pitchFamily="34" charset="-122"/>
-                <a:cs typeface="Calibri" pitchFamily="34" charset="-120"/>
-              </a:rPr>
-              <a:t>Bug → documented root cause + minimal fix + a new regression eval.</a:t>
-            </a:r>
-            <a:endParaRPr lang="en-US" sz="1200" dirty="0"/>
-          </a:p>
-        </p:txBody>
-      </p:sp>
-      <p:sp>
-        <p:nvSpPr>
-          <p:cNvPr id="25" name="Shape 23"/>
-          <p:cNvSpPr/>
-          <p:nvPr/>
-        </p:nvSpPr>
-        <p:spPr>
-          <a:xfrm>
-            <a:off x="9034272" y="3840480"/>
-            <a:ext cx="2670048" cy="1737360"/>
-          </a:xfrm>
-          <a:prstGeom prst="roundRect">
-            <a:avLst>
-              <a:gd name="adj" fmla="val 4737"/>
-            </a:avLst>
-          </a:prstGeom>
-          <a:solidFill>
-            <a:srgbClr val="EAF7F3"/>
-          </a:solidFill>
-          <a:ln/>
-          <a:effectLst>
-            <a:outerShdw sx="100000" sy="100000" kx="0" ky="0" algn="bl" rotWithShape="0" blurRad="88900" dist="38100" dir="5400000">
-              <a:srgbClr val="000000">
-                <a:alpha val="13000"/>
-              </a:srgbClr>
-            </a:outerShdw>
-          </a:effectLst>
-        </p:spPr>
-      </p:sp>
-      <p:sp>
-        <p:nvSpPr>
-          <p:cNvPr id="26" name="Text 24"/>
-          <p:cNvSpPr/>
-          <p:nvPr/>
-        </p:nvSpPr>
-        <p:spPr>
-          <a:xfrm>
-            <a:off x="9290304" y="4041648"/>
-            <a:ext cx="2212848" cy="457200"/>
-          </a:xfrm>
-          <a:prstGeom prst="rect">
-            <a:avLst/>
-          </a:prstGeom>
-          <a:noFill/>
-          <a:ln/>
-        </p:spPr>
-        <p:txBody>
-          <a:bodyPr wrap="square" lIns="0" tIns="0" rIns="0" bIns="0" rtlCol="0" anchor="ctr"/>
-          <a:lstStyle/>
-          <a:p>
-            <a:pPr indent="0" marL="0">
-              <a:buNone/>
-            </a:pPr>
-            <a:r>
-              <a:rPr lang="en-US" sz="1500" b="1" dirty="0">
-                <a:solidFill>
-                  <a:srgbClr val="1E2761"/>
-                </a:solidFill>
-                <a:latin typeface="Cambria" pitchFamily="34" charset="0"/>
-                <a:ea typeface="Cambria" pitchFamily="34" charset="-122"/>
-                <a:cs typeface="Cambria" pitchFamily="34" charset="-120"/>
-              </a:rPr>
-              <a:t>+  Assessor</a:t>
-            </a:r>
-            <a:endParaRPr lang="en-US" sz="1500" dirty="0"/>
-          </a:p>
-        </p:txBody>
-      </p:sp>
-      <p:sp>
-        <p:nvSpPr>
-          <p:cNvPr id="27" name="Text 25"/>
-          <p:cNvSpPr/>
-          <p:nvPr/>
-        </p:nvSpPr>
-        <p:spPr>
-          <a:xfrm>
-            <a:off x="9290304" y="4498848"/>
-            <a:ext cx="2212848" cy="960120"/>
-          </a:xfrm>
-          <a:prstGeom prst="rect">
-            <a:avLst/>
-          </a:prstGeom>
-          <a:noFill/>
-          <a:ln/>
-        </p:spPr>
-        <p:txBody>
-          <a:bodyPr wrap="square" lIns="0" tIns="0" rIns="0" bIns="0" rtlCol="0" anchor="ctr"/>
-          <a:lstStyle/>
-          <a:p>
-            <a:pPr indent="0" marL="0">
-              <a:buNone/>
-            </a:pPr>
-            <a:r>
-              <a:rPr lang="en-US" sz="1200" dirty="0">
-                <a:solidFill>
-                  <a:srgbClr val="22284B"/>
-                </a:solidFill>
-                <a:latin typeface="Calibri" pitchFamily="34" charset="0"/>
-                <a:ea typeface="Calibri" pitchFamily="34" charset="-122"/>
-                <a:cs typeface="Calibri" pitchFamily="34" charset="-120"/>
-              </a:rPr>
-              <a:t>A skill that scores ANY prompt vs. Anthropic best practices and rewrites it.</a:t>
-            </a:r>
-            <a:endParaRPr lang="en-US" sz="1200" dirty="0"/>
-          </a:p>
-        </p:txBody>
-      </p:sp>
-      <p:sp>
-        <p:nvSpPr>
-          <p:cNvPr id="28" name="Text 26"/>
+                <a:latin typeface="Calibri" pitchFamily="34" charset="0"/>
+                <a:ea typeface="Calibri" pitchFamily="34" charset="-122"/>
+                <a:cs typeface="Calibri" pitchFamily="34" charset="-120"/>
+              </a:rPr>
+              <a:t>cxas-loss-analysis</a:t>
+            </a:r>
+            <a:endParaRPr lang="en-US" sz="1050" dirty="0"/>
+          </a:p>
+        </p:txBody>
+      </p:sp>
+      <p:sp>
+        <p:nvSpPr>
+          <p:cNvPr id="33" name="Text 31"/>
+          <p:cNvSpPr/>
+          <p:nvPr/>
+        </p:nvSpPr>
+        <p:spPr>
+          <a:xfrm>
+            <a:off x="9592056" y="4681728"/>
+            <a:ext cx="1847088" cy="365760"/>
+          </a:xfrm>
+          <a:prstGeom prst="rect">
+            <a:avLst/>
+          </a:prstGeom>
+          <a:noFill/>
+          <a:ln/>
+        </p:spPr>
+        <p:txBody>
+          <a:bodyPr wrap="square" lIns="0" tIns="0" rIns="0" bIns="0" rtlCol="0" anchor="ctr"/>
+          <a:lstStyle/>
+          <a:p>
+            <a:pPr algn="ctr" indent="0" marL="0">
+              <a:buNone/>
+            </a:pPr>
+            <a:r>
+              <a:rPr lang="en-US" sz="950" i="1" dirty="0">
+                <a:solidFill>
+                  <a:srgbClr val="5B6785"/>
+                </a:solidFill>
+                <a:latin typeface="Calibri" pitchFamily="34" charset="0"/>
+                <a:ea typeface="Calibri" pitchFamily="34" charset="-122"/>
+                <a:cs typeface="Calibri" pitchFamily="34" charset="-120"/>
+              </a:rPr>
+              <a:t>losses → regressions</a:t>
+            </a:r>
+            <a:endParaRPr lang="en-US" sz="950" dirty="0"/>
+          </a:p>
+        </p:txBody>
+      </p:sp>
+      <p:sp>
+        <p:nvSpPr>
+          <p:cNvPr id="34" name="Text 32"/>
+          <p:cNvSpPr/>
+          <p:nvPr/>
+        </p:nvSpPr>
+        <p:spPr>
+          <a:xfrm>
+            <a:off x="640080" y="5486400"/>
+            <a:ext cx="10908792" cy="365760"/>
+          </a:xfrm>
+          <a:prstGeom prst="rect">
+            <a:avLst/>
+          </a:prstGeom>
+          <a:noFill/>
+          <a:ln/>
+        </p:spPr>
+        <p:txBody>
+          <a:bodyPr wrap="square" lIns="0" tIns="0" rIns="0" bIns="0" rtlCol="0" anchor="ctr"/>
+          <a:lstStyle/>
+          <a:p>
+            <a:pPr algn="ctr" indent="0" marL="0">
+              <a:buNone/>
+            </a:pPr>
+            <a:r>
+              <a:rPr lang="en-US" sz="1300" b="1" dirty="0">
+                <a:solidFill>
+                  <a:srgbClr val="00A896"/>
+                </a:solidFill>
+                <a:latin typeface="Calibri" pitchFamily="34" charset="0"/>
+                <a:ea typeface="Calibri" pitchFamily="34" charset="-122"/>
+                <a:cs typeface="Calibri" pitchFamily="34" charset="-120"/>
+              </a:rPr>
+              <a:t>Install:  npx skills add googlecloudplatform/cxas-scrapi</a:t>
+            </a:r>
+            <a:endParaRPr lang="en-US" sz="1300" dirty="0"/>
+          </a:p>
+        </p:txBody>
+      </p:sp>
+      <p:sp>
+        <p:nvSpPr>
+          <p:cNvPr id="35" name="Text 33"/>
           <p:cNvSpPr/>
           <p:nvPr/>
         </p:nvSpPr>
@@ -6121,7 +7260,7 @@
       </p:sp>
       <p:sp>
         <p:nvSpPr>
-          <p:cNvPr id="29" name="Text 27"/>
+          <p:cNvPr id="36" name="Text 34"/>
           <p:cNvSpPr/>
           <p:nvPr/>
         </p:nvSpPr>
@@ -6223,7 +7362,7 @@
                 <a:ea typeface="Calibri" pitchFamily="34" charset="-122"/>
                 <a:cs typeface="Calibri" pitchFamily="34" charset="-120"/>
               </a:rPr>
-              <a:t>LIVE DEMO</a:t>
+              <a:t>WHAT YOU GET</a:t>
             </a:r>
             <a:endParaRPr lang="en-US" sz="1200" dirty="0"/>
           </a:p>
@@ -6262,7 +7401,7 @@
                 <a:ea typeface="Cambria" pitchFamily="34" charset="-122"/>
                 <a:cs typeface="Cambria" pitchFamily="34" charset="-120"/>
               </a:rPr>
-              <a:t>Run against CX Agent Studio’s own default sample (Cymbal)</a:t>
+              <a:t>Each stage emits a typed artifact — chained end to end</a:t>
             </a:r>
             <a:endParaRPr lang="en-US" sz="3000" dirty="0"/>
           </a:p>
@@ -6270,57 +7409,18 @@
       </p:sp>
       <p:sp>
         <p:nvSpPr>
-          <p:cNvPr id="4" name="Text 2"/>
-          <p:cNvSpPr/>
-          <p:nvPr/>
-        </p:nvSpPr>
-        <p:spPr>
-          <a:xfrm>
-            <a:off x="640080" y="1508760"/>
-            <a:ext cx="10908792" cy="457200"/>
-          </a:xfrm>
-          <a:prstGeom prst="rect">
-            <a:avLst/>
-          </a:prstGeom>
-          <a:noFill/>
-          <a:ln/>
-        </p:spPr>
-        <p:txBody>
-          <a:bodyPr wrap="square" lIns="0" tIns="0" rIns="0" bIns="0" rtlCol="0" anchor="ctr"/>
-          <a:lstStyle/>
-          <a:p>
-            <a:pPr indent="0" marL="0">
-              <a:buNone/>
-            </a:pPr>
-            <a:r>
-              <a:rPr lang="en-US" sz="1400" i="1" dirty="0">
-                <a:solidFill>
-                  <a:srgbClr val="5B6785"/>
-                </a:solidFill>
-                <a:latin typeface="Calibri" pitchFamily="34" charset="0"/>
-                <a:ea typeface="Calibri" pitchFamily="34" charset="-122"/>
-                <a:cs typeface="Calibri" pitchFamily="34" charset="-120"/>
-              </a:rPr>
-              <a:t>Why this sample: you can diff the generated architecture against the shipped app in the console — a built-in ground-truth check.</a:t>
-            </a:r>
-            <a:endParaRPr lang="en-US" sz="1400" dirty="0"/>
-          </a:p>
-        </p:txBody>
-      </p:sp>
-      <p:sp>
-        <p:nvSpPr>
-          <p:cNvPr id="5" name="Shape 3"/>
-          <p:cNvSpPr/>
-          <p:nvPr/>
-        </p:nvSpPr>
-        <p:spPr>
-          <a:xfrm>
-            <a:off x="640080" y="2194560"/>
-            <a:ext cx="2560320" cy="2011680"/>
+          <p:cNvPr id="4" name="Shape 2"/>
+          <p:cNvSpPr/>
+          <p:nvPr/>
+        </p:nvSpPr>
+        <p:spPr>
+          <a:xfrm>
+            <a:off x="640080" y="1874520"/>
+            <a:ext cx="2670048" cy="1737360"/>
           </a:xfrm>
           <a:prstGeom prst="roundRect">
             <a:avLst>
-              <a:gd name="adj" fmla="val 4091"/>
+              <a:gd name="adj" fmla="val 4737"/>
             </a:avLst>
           </a:prstGeom>
           <a:solidFill>
@@ -6338,30 +7438,30 @@
       </p:sp>
       <p:sp>
         <p:nvSpPr>
-          <p:cNvPr id="6" name="Text 4"/>
-          <p:cNvSpPr/>
-          <p:nvPr/>
-        </p:nvSpPr>
-        <p:spPr>
-          <a:xfrm>
-            <a:off x="868680" y="2395728"/>
-            <a:ext cx="2103120" cy="457200"/>
-          </a:xfrm>
-          <a:prstGeom prst="rect">
-            <a:avLst/>
-          </a:prstGeom>
-          <a:noFill/>
-          <a:ln/>
-        </p:spPr>
-        <p:txBody>
-          <a:bodyPr wrap="square" lIns="0" tIns="0" rIns="0" bIns="0" rtlCol="0" anchor="ctr"/>
-          <a:lstStyle/>
-          <a:p>
-            <a:pPr indent="0" marL="0">
-              <a:buNone/>
-            </a:pPr>
-            <a:r>
-              <a:rPr lang="en-US" sz="1600" b="1" dirty="0">
+          <p:cNvPr id="5" name="Text 3"/>
+          <p:cNvSpPr/>
+          <p:nvPr/>
+        </p:nvSpPr>
+        <p:spPr>
+          <a:xfrm>
+            <a:off x="896112" y="2075688"/>
+            <a:ext cx="2212848" cy="457200"/>
+          </a:xfrm>
+          <a:prstGeom prst="rect">
+            <a:avLst/>
+          </a:prstGeom>
+          <a:noFill/>
+          <a:ln/>
+        </p:spPr>
+        <p:txBody>
+          <a:bodyPr wrap="square" lIns="0" tIns="0" rIns="0" bIns="0" rtlCol="0" anchor="ctr"/>
+          <a:lstStyle/>
+          <a:p>
+            <a:pPr indent="0" marL="0">
+              <a:buNone/>
+            </a:pPr>
+            <a:r>
+              <a:rPr lang="en-US" sz="1500" b="1" dirty="0">
                 <a:solidFill>
                   <a:srgbClr val="1E2761"/>
                 </a:solidFill>
@@ -6369,38 +7469,38 @@
                 <a:ea typeface="Cambria" pitchFamily="34" charset="-122"/>
                 <a:cs typeface="Cambria" pitchFamily="34" charset="-120"/>
               </a:rPr>
-              <a:t>00-prd.md</a:t>
-            </a:r>
-            <a:endParaRPr lang="en-US" sz="1600" dirty="0"/>
-          </a:p>
-        </p:txBody>
-      </p:sp>
-      <p:sp>
-        <p:nvSpPr>
-          <p:cNvPr id="7" name="Text 5"/>
-          <p:cNvSpPr/>
-          <p:nvPr/>
-        </p:nvSpPr>
-        <p:spPr>
-          <a:xfrm>
-            <a:off x="868680" y="2880360"/>
-            <a:ext cx="2103120" cy="1188720"/>
-          </a:xfrm>
-          <a:prstGeom prst="rect">
-            <a:avLst/>
-          </a:prstGeom>
-          <a:noFill/>
-          <a:ln/>
-        </p:spPr>
-        <p:txBody>
-          <a:bodyPr wrap="square" lIns="0" tIns="0" rIns="0" bIns="0" rtlCol="0" anchor="ctr"/>
-          <a:lstStyle/>
-          <a:p>
-            <a:pPr indent="0" marL="0">
-              <a:buNone/>
-            </a:pPr>
-            <a:r>
-              <a:rPr lang="en-US" sz="1250" dirty="0">
+              <a:t>1  Ingest</a:t>
+            </a:r>
+            <a:endParaRPr lang="en-US" sz="1500" dirty="0"/>
+          </a:p>
+        </p:txBody>
+      </p:sp>
+      <p:sp>
+        <p:nvSpPr>
+          <p:cNvPr id="6" name="Text 4"/>
+          <p:cNvSpPr/>
+          <p:nvPr/>
+        </p:nvSpPr>
+        <p:spPr>
+          <a:xfrm>
+            <a:off x="896112" y="2532888"/>
+            <a:ext cx="2212848" cy="960120"/>
+          </a:xfrm>
+          <a:prstGeom prst="rect">
+            <a:avLst/>
+          </a:prstGeom>
+          <a:noFill/>
+          <a:ln/>
+        </p:spPr>
+        <p:txBody>
+          <a:bodyPr wrap="square" lIns="0" tIns="0" rIns="0" bIns="0" rtlCol="0" anchor="ctr"/>
+          <a:lstStyle/>
+          <a:p>
+            <a:pPr indent="0" marL="0">
+              <a:buNone/>
+            </a:pPr>
+            <a:r>
+              <a:rPr lang="en-US" sz="1200" dirty="0">
                 <a:solidFill>
                   <a:srgbClr val="22284B"/>
                 </a:solidFill>
@@ -6408,69 +7508,30 @@
                 <a:ea typeface="Calibri" pitchFamily="34" charset="-122"/>
                 <a:cs typeface="Calibri" pitchFamily="34" charset="-120"/>
               </a:rPr>
-              <a:t>A realistic, imperfect PRD</a:t>
-            </a:r>
-            <a:endParaRPr lang="en-US" sz="1250" dirty="0"/>
-          </a:p>
-        </p:txBody>
-      </p:sp>
-      <p:sp>
-        <p:nvSpPr>
-          <p:cNvPr id="8" name="Text 6"/>
-          <p:cNvSpPr/>
-          <p:nvPr/>
-        </p:nvSpPr>
-        <p:spPr>
-          <a:xfrm>
-            <a:off x="3182112" y="2743200"/>
-            <a:ext cx="292608" cy="457200"/>
-          </a:xfrm>
-          <a:prstGeom prst="rect">
-            <a:avLst/>
-          </a:prstGeom>
-          <a:noFill/>
-          <a:ln/>
-        </p:spPr>
-        <p:txBody>
-          <a:bodyPr wrap="square" lIns="0" tIns="0" rIns="0" bIns="0" rtlCol="0" anchor="ctr"/>
-          <a:lstStyle/>
-          <a:p>
-            <a:pPr algn="ctr" indent="0" marL="0">
-              <a:buNone/>
-            </a:pPr>
-            <a:r>
-              <a:rPr lang="en-US" sz="1800" dirty="0">
-                <a:solidFill>
-                  <a:srgbClr val="5B6785"/>
-                </a:solidFill>
-                <a:latin typeface="Calibri" pitchFamily="34" charset="0"/>
-                <a:ea typeface="Calibri" pitchFamily="34" charset="-122"/>
-                <a:cs typeface="Calibri" pitchFamily="34" charset="-120"/>
-              </a:rPr>
-              <a:t>→</a:t>
-            </a:r>
-            <a:endParaRPr lang="en-US" sz="1800" dirty="0"/>
-          </a:p>
-        </p:txBody>
-      </p:sp>
-      <p:sp>
-        <p:nvSpPr>
-          <p:cNvPr id="9" name="Shape 7"/>
-          <p:cNvSpPr/>
-          <p:nvPr/>
-        </p:nvSpPr>
-        <p:spPr>
-          <a:xfrm>
-            <a:off x="3429000" y="2194560"/>
-            <a:ext cx="2560320" cy="2011680"/>
+              <a:t>Normalized brief; every requirement gets an ID + priority. Flags UNKNOWNs, never invents.</a:t>
+            </a:r>
+            <a:endParaRPr lang="en-US" sz="1200" dirty="0"/>
+          </a:p>
+        </p:txBody>
+      </p:sp>
+      <p:sp>
+        <p:nvSpPr>
+          <p:cNvPr id="7" name="Shape 5"/>
+          <p:cNvSpPr/>
+          <p:nvPr/>
+        </p:nvSpPr>
+        <p:spPr>
+          <a:xfrm>
+            <a:off x="3438144" y="1874520"/>
+            <a:ext cx="2670048" cy="1737360"/>
           </a:xfrm>
           <a:prstGeom prst="roundRect">
             <a:avLst>
-              <a:gd name="adj" fmla="val 4091"/>
+              <a:gd name="adj" fmla="val 4737"/>
             </a:avLst>
           </a:prstGeom>
           <a:solidFill>
-            <a:srgbClr val="1E2761"/>
+            <a:srgbClr val="F2F6FF"/>
           </a:solidFill>
           <a:ln/>
           <a:effectLst>
@@ -6484,135 +7545,96 @@
       </p:sp>
       <p:sp>
         <p:nvSpPr>
-          <p:cNvPr id="10" name="Text 8"/>
-          <p:cNvSpPr/>
-          <p:nvPr/>
-        </p:nvSpPr>
-        <p:spPr>
-          <a:xfrm>
-            <a:off x="3657600" y="2395728"/>
-            <a:ext cx="2103120" cy="457200"/>
-          </a:xfrm>
-          <a:prstGeom prst="rect">
-            <a:avLst/>
-          </a:prstGeom>
-          <a:noFill/>
-          <a:ln/>
-        </p:spPr>
-        <p:txBody>
-          <a:bodyPr wrap="square" lIns="0" tIns="0" rIns="0" bIns="0" rtlCol="0" anchor="ctr"/>
-          <a:lstStyle/>
-          <a:p>
-            <a:pPr indent="0" marL="0">
-              <a:buNone/>
-            </a:pPr>
-            <a:r>
-              <a:rPr lang="en-US" sz="1600" b="1" dirty="0">
-                <a:solidFill>
-                  <a:srgbClr val="FFFFFF"/>
+          <p:cNvPr id="8" name="Text 6"/>
+          <p:cNvSpPr/>
+          <p:nvPr/>
+        </p:nvSpPr>
+        <p:spPr>
+          <a:xfrm>
+            <a:off x="3694176" y="2075688"/>
+            <a:ext cx="2212848" cy="457200"/>
+          </a:xfrm>
+          <a:prstGeom prst="rect">
+            <a:avLst/>
+          </a:prstGeom>
+          <a:noFill/>
+          <a:ln/>
+        </p:spPr>
+        <p:txBody>
+          <a:bodyPr wrap="square" lIns="0" tIns="0" rIns="0" bIns="0" rtlCol="0" anchor="ctr"/>
+          <a:lstStyle/>
+          <a:p>
+            <a:pPr indent="0" marL="0">
+              <a:buNone/>
+            </a:pPr>
+            <a:r>
+              <a:rPr lang="en-US" sz="1500" b="1" dirty="0">
+                <a:solidFill>
+                  <a:srgbClr val="1E2761"/>
                 </a:solidFill>
                 <a:latin typeface="Cambria" pitchFamily="34" charset="0"/>
                 <a:ea typeface="Cambria" pitchFamily="34" charset="-122"/>
                 <a:cs typeface="Cambria" pitchFamily="34" charset="-120"/>
               </a:rPr>
-              <a:t>01 brief</a:t>
-            </a:r>
-            <a:endParaRPr lang="en-US" sz="1600" dirty="0"/>
-          </a:p>
-        </p:txBody>
-      </p:sp>
-      <p:sp>
-        <p:nvSpPr>
-          <p:cNvPr id="11" name="Text 9"/>
-          <p:cNvSpPr/>
-          <p:nvPr/>
-        </p:nvSpPr>
-        <p:spPr>
-          <a:xfrm>
-            <a:off x="3657600" y="2880360"/>
-            <a:ext cx="2103120" cy="1188720"/>
-          </a:xfrm>
-          <a:prstGeom prst="rect">
-            <a:avLst/>
-          </a:prstGeom>
-          <a:noFill/>
-          <a:ln/>
-        </p:spPr>
-        <p:txBody>
-          <a:bodyPr wrap="square" lIns="0" tIns="0" rIns="0" bIns="0" rtlCol="0" anchor="ctr"/>
-          <a:lstStyle/>
-          <a:p>
-            <a:pPr indent="0" marL="0">
-              <a:buNone/>
-            </a:pPr>
-            <a:r>
-              <a:rPr lang="en-US" sz="1250" dirty="0">
-                <a:solidFill>
-                  <a:srgbClr val="CADCFC"/>
-                </a:solidFill>
-                <a:latin typeface="Calibri" pitchFamily="34" charset="0"/>
-                <a:ea typeface="Calibri" pitchFamily="34" charset="-122"/>
-                <a:cs typeface="Calibri" pitchFamily="34" charset="-120"/>
-              </a:rPr>
-              <a:t>10 requirements; UNKNOWNs flagged (no KPI stated)</a:t>
-            </a:r>
-            <a:endParaRPr lang="en-US" sz="1250" dirty="0"/>
-          </a:p>
-        </p:txBody>
-      </p:sp>
-      <p:sp>
-        <p:nvSpPr>
-          <p:cNvPr id="12" name="Text 10"/>
-          <p:cNvSpPr/>
-          <p:nvPr/>
-        </p:nvSpPr>
-        <p:spPr>
-          <a:xfrm>
-            <a:off x="5971032" y="2743200"/>
-            <a:ext cx="292608" cy="457200"/>
-          </a:xfrm>
-          <a:prstGeom prst="rect">
-            <a:avLst/>
-          </a:prstGeom>
-          <a:noFill/>
-          <a:ln/>
-        </p:spPr>
-        <p:txBody>
-          <a:bodyPr wrap="square" lIns="0" tIns="0" rIns="0" bIns="0" rtlCol="0" anchor="ctr"/>
-          <a:lstStyle/>
-          <a:p>
-            <a:pPr algn="ctr" indent="0" marL="0">
-              <a:buNone/>
-            </a:pPr>
-            <a:r>
-              <a:rPr lang="en-US" sz="1800" dirty="0">
-                <a:solidFill>
-                  <a:srgbClr val="5B6785"/>
-                </a:solidFill>
-                <a:latin typeface="Calibri" pitchFamily="34" charset="0"/>
-                <a:ea typeface="Calibri" pitchFamily="34" charset="-122"/>
-                <a:cs typeface="Calibri" pitchFamily="34" charset="-120"/>
-              </a:rPr>
-              <a:t>→</a:t>
-            </a:r>
-            <a:endParaRPr lang="en-US" sz="1800" dirty="0"/>
-          </a:p>
-        </p:txBody>
-      </p:sp>
-      <p:sp>
-        <p:nvSpPr>
-          <p:cNvPr id="13" name="Shape 11"/>
-          <p:cNvSpPr/>
-          <p:nvPr/>
-        </p:nvSpPr>
-        <p:spPr>
-          <a:xfrm>
-            <a:off x="6217920" y="2194560"/>
-            <a:ext cx="2560320" cy="2011680"/>
+              <a:t>2  Interview</a:t>
+            </a:r>
+            <a:endParaRPr lang="en-US" sz="1500" dirty="0"/>
+          </a:p>
+        </p:txBody>
+      </p:sp>
+      <p:sp>
+        <p:nvSpPr>
+          <p:cNvPr id="9" name="Text 7"/>
+          <p:cNvSpPr/>
+          <p:nvPr/>
+        </p:nvSpPr>
+        <p:spPr>
+          <a:xfrm>
+            <a:off x="3694176" y="2532888"/>
+            <a:ext cx="2212848" cy="960120"/>
+          </a:xfrm>
+          <a:prstGeom prst="rect">
+            <a:avLst/>
+          </a:prstGeom>
+          <a:noFill/>
+          <a:ln/>
+        </p:spPr>
+        <p:txBody>
+          <a:bodyPr wrap="square" lIns="0" tIns="0" rIns="0" bIns="0" rtlCol="0" anchor="ctr"/>
+          <a:lstStyle/>
+          <a:p>
+            <a:pPr indent="0" marL="0">
+              <a:buNone/>
+            </a:pPr>
+            <a:r>
+              <a:rPr lang="en-US" sz="1200" dirty="0">
+                <a:solidFill>
+                  <a:srgbClr val="22284B"/>
+                </a:solidFill>
+                <a:latin typeface="Calibri" pitchFamily="34" charset="0"/>
+                <a:ea typeface="Calibri" pitchFamily="34" charset="-122"/>
+                <a:cs typeface="Calibri" pitchFamily="34" charset="-120"/>
+              </a:rPr>
+              <a:t>Batched, prioritized questions with defaults. Won’t design until P0s are answered.</a:t>
+            </a:r>
+            <a:endParaRPr lang="en-US" sz="1200" dirty="0"/>
+          </a:p>
+        </p:txBody>
+      </p:sp>
+      <p:sp>
+        <p:nvSpPr>
+          <p:cNvPr id="10" name="Shape 8"/>
+          <p:cNvSpPr/>
+          <p:nvPr/>
+        </p:nvSpPr>
+        <p:spPr>
+          <a:xfrm>
+            <a:off x="6236208" y="1874520"/>
+            <a:ext cx="2670048" cy="1737360"/>
           </a:xfrm>
           <a:prstGeom prst="roundRect">
             <a:avLst>
-              <a:gd name="adj" fmla="val 4091"/>
+              <a:gd name="adj" fmla="val 4737"/>
             </a:avLst>
           </a:prstGeom>
           <a:solidFill>
@@ -6630,30 +7652,30 @@
       </p:sp>
       <p:sp>
         <p:nvSpPr>
-          <p:cNvPr id="14" name="Text 12"/>
-          <p:cNvSpPr/>
-          <p:nvPr/>
-        </p:nvSpPr>
-        <p:spPr>
-          <a:xfrm>
-            <a:off x="6446520" y="2395728"/>
-            <a:ext cx="2103120" cy="457200"/>
-          </a:xfrm>
-          <a:prstGeom prst="rect">
-            <a:avLst/>
-          </a:prstGeom>
-          <a:noFill/>
-          <a:ln/>
-        </p:spPr>
-        <p:txBody>
-          <a:bodyPr wrap="square" lIns="0" tIns="0" rIns="0" bIns="0" rtlCol="0" anchor="ctr"/>
-          <a:lstStyle/>
-          <a:p>
-            <a:pPr indent="0" marL="0">
-              <a:buNone/>
-            </a:pPr>
-            <a:r>
-              <a:rPr lang="en-US" sz="1600" b="1" dirty="0">
+          <p:cNvPr id="11" name="Text 9"/>
+          <p:cNvSpPr/>
+          <p:nvPr/>
+        </p:nvSpPr>
+        <p:spPr>
+          <a:xfrm>
+            <a:off x="6492240" y="2075688"/>
+            <a:ext cx="2212848" cy="457200"/>
+          </a:xfrm>
+          <a:prstGeom prst="rect">
+            <a:avLst/>
+          </a:prstGeom>
+          <a:noFill/>
+          <a:ln/>
+        </p:spPr>
+        <p:txBody>
+          <a:bodyPr wrap="square" lIns="0" tIns="0" rIns="0" bIns="0" rtlCol="0" anchor="ctr"/>
+          <a:lstStyle/>
+          <a:p>
+            <a:pPr indent="0" marL="0">
+              <a:buNone/>
+            </a:pPr>
+            <a:r>
+              <a:rPr lang="en-US" sz="1500" b="1" dirty="0">
                 <a:solidFill>
                   <a:srgbClr val="1E2761"/>
                 </a:solidFill>
@@ -6661,38 +7683,38 @@
                 <a:ea typeface="Cambria" pitchFamily="34" charset="-122"/>
                 <a:cs typeface="Cambria" pitchFamily="34" charset="-120"/>
               </a:rPr>
-              <a:t>02 interview</a:t>
-            </a:r>
-            <a:endParaRPr lang="en-US" sz="1600" dirty="0"/>
-          </a:p>
-        </p:txBody>
-      </p:sp>
-      <p:sp>
-        <p:nvSpPr>
-          <p:cNvPr id="15" name="Text 13"/>
-          <p:cNvSpPr/>
-          <p:nvPr/>
-        </p:nvSpPr>
-        <p:spPr>
-          <a:xfrm>
-            <a:off x="6446520" y="2880360"/>
-            <a:ext cx="2103120" cy="1188720"/>
-          </a:xfrm>
-          <a:prstGeom prst="rect">
-            <a:avLst/>
-          </a:prstGeom>
-          <a:noFill/>
-          <a:ln/>
-        </p:spPr>
-        <p:txBody>
-          <a:bodyPr wrap="square" lIns="0" tIns="0" rIns="0" bIns="0" rtlCol="0" anchor="ctr"/>
-          <a:lstStyle/>
-          <a:p>
-            <a:pPr indent="0" marL="0">
-              <a:buNone/>
-            </a:pPr>
-            <a:r>
-              <a:rPr lang="en-US" sz="1250" dirty="0">
+              <a:t>3  Design</a:t>
+            </a:r>
+            <a:endParaRPr lang="en-US" sz="1500" dirty="0"/>
+          </a:p>
+        </p:txBody>
+      </p:sp>
+      <p:sp>
+        <p:nvSpPr>
+          <p:cNvPr id="12" name="Text 10"/>
+          <p:cNvSpPr/>
+          <p:nvPr/>
+        </p:nvSpPr>
+        <p:spPr>
+          <a:xfrm>
+            <a:off x="6492240" y="2532888"/>
+            <a:ext cx="2212848" cy="960120"/>
+          </a:xfrm>
+          <a:prstGeom prst="rect">
+            <a:avLst/>
+          </a:prstGeom>
+          <a:noFill/>
+          <a:ln/>
+        </p:spPr>
+        <p:txBody>
+          <a:bodyPr wrap="square" lIns="0" tIns="0" rIns="0" bIns="0" rtlCol="0" anchor="ctr"/>
+          <a:lstStyle/>
+          <a:p>
+            <a:pPr indent="0" marL="0">
+              <a:buNone/>
+            </a:pPr>
+            <a:r>
+              <a:rPr lang="en-US" sz="1200" dirty="0">
                 <a:solidFill>
                   <a:srgbClr val="22284B"/>
                 </a:solidFill>
@@ -6700,65 +7722,26 @@
                 <a:ea typeface="Calibri" pitchFamily="34" charset="-122"/>
                 <a:cs typeface="Calibri" pitchFamily="34" charset="-120"/>
               </a:rPr>
-              <a:t>Pins upsell policy + discount approval</a:t>
-            </a:r>
-            <a:endParaRPr lang="en-US" sz="1250" dirty="0"/>
-          </a:p>
-        </p:txBody>
-      </p:sp>
-      <p:sp>
-        <p:nvSpPr>
-          <p:cNvPr id="16" name="Text 14"/>
-          <p:cNvSpPr/>
-          <p:nvPr/>
-        </p:nvSpPr>
-        <p:spPr>
-          <a:xfrm>
-            <a:off x="8759952" y="2743200"/>
-            <a:ext cx="292608" cy="457200"/>
-          </a:xfrm>
-          <a:prstGeom prst="rect">
-            <a:avLst/>
-          </a:prstGeom>
-          <a:noFill/>
-          <a:ln/>
-        </p:spPr>
-        <p:txBody>
-          <a:bodyPr wrap="square" lIns="0" tIns="0" rIns="0" bIns="0" rtlCol="0" anchor="ctr"/>
-          <a:lstStyle/>
-          <a:p>
-            <a:pPr algn="ctr" indent="0" marL="0">
-              <a:buNone/>
-            </a:pPr>
-            <a:r>
-              <a:rPr lang="en-US" sz="1800" dirty="0">
-                <a:solidFill>
-                  <a:srgbClr val="5B6785"/>
-                </a:solidFill>
-                <a:latin typeface="Calibri" pitchFamily="34" charset="0"/>
-                <a:ea typeface="Calibri" pitchFamily="34" charset="-122"/>
-                <a:cs typeface="Calibri" pitchFamily="34" charset="-120"/>
-              </a:rPr>
-              <a:t>→</a:t>
-            </a:r>
-            <a:endParaRPr lang="en-US" sz="1800" dirty="0"/>
-          </a:p>
-        </p:txBody>
-      </p:sp>
-      <p:sp>
-        <p:nvSpPr>
-          <p:cNvPr id="17" name="Shape 15"/>
-          <p:cNvSpPr/>
-          <p:nvPr/>
-        </p:nvSpPr>
-        <p:spPr>
-          <a:xfrm>
-            <a:off x="9006840" y="2194560"/>
-            <a:ext cx="2560320" cy="2011680"/>
+              <a:t>App → agents → tools → guardrails; a traceability matrix (requirement → design → eval).</a:t>
+            </a:r>
+            <a:endParaRPr lang="en-US" sz="1200" dirty="0"/>
+          </a:p>
+        </p:txBody>
+      </p:sp>
+      <p:sp>
+        <p:nvSpPr>
+          <p:cNvPr id="13" name="Shape 11"/>
+          <p:cNvSpPr/>
+          <p:nvPr/>
+        </p:nvSpPr>
+        <p:spPr>
+          <a:xfrm>
+            <a:off x="9034272" y="1874520"/>
+            <a:ext cx="2670048" cy="1737360"/>
           </a:xfrm>
           <a:prstGeom prst="roundRect">
             <a:avLst>
-              <a:gd name="adj" fmla="val 4091"/>
+              <a:gd name="adj" fmla="val 4737"/>
             </a:avLst>
           </a:prstGeom>
           <a:solidFill>
@@ -6776,30 +7759,30 @@
       </p:sp>
       <p:sp>
         <p:nvSpPr>
-          <p:cNvPr id="18" name="Text 16"/>
-          <p:cNvSpPr/>
-          <p:nvPr/>
-        </p:nvSpPr>
-        <p:spPr>
-          <a:xfrm>
-            <a:off x="9235440" y="2395728"/>
-            <a:ext cx="2103120" cy="457200"/>
-          </a:xfrm>
-          <a:prstGeom prst="rect">
-            <a:avLst/>
-          </a:prstGeom>
-          <a:noFill/>
-          <a:ln/>
-        </p:spPr>
-        <p:txBody>
-          <a:bodyPr wrap="square" lIns="0" tIns="0" rIns="0" bIns="0" rtlCol="0" anchor="ctr"/>
-          <a:lstStyle/>
-          <a:p>
-            <a:pPr indent="0" marL="0">
-              <a:buNone/>
-            </a:pPr>
-            <a:r>
-              <a:rPr lang="en-US" sz="1600" b="1" dirty="0">
+          <p:cNvPr id="14" name="Text 12"/>
+          <p:cNvSpPr/>
+          <p:nvPr/>
+        </p:nvSpPr>
+        <p:spPr>
+          <a:xfrm>
+            <a:off x="9290304" y="2075688"/>
+            <a:ext cx="2212848" cy="457200"/>
+          </a:xfrm>
+          <a:prstGeom prst="rect">
+            <a:avLst/>
+          </a:prstGeom>
+          <a:noFill/>
+          <a:ln/>
+        </p:spPr>
+        <p:txBody>
+          <a:bodyPr wrap="square" lIns="0" tIns="0" rIns="0" bIns="0" rtlCol="0" anchor="ctr"/>
+          <a:lstStyle/>
+          <a:p>
+            <a:pPr indent="0" marL="0">
+              <a:buNone/>
+            </a:pPr>
+            <a:r>
+              <a:rPr lang="en-US" sz="1500" b="1" dirty="0">
                 <a:solidFill>
                   <a:srgbClr val="1E2761"/>
                 </a:solidFill>
@@ -6807,38 +7790,38 @@
                 <a:ea typeface="Cambria" pitchFamily="34" charset="-122"/>
                 <a:cs typeface="Cambria" pitchFamily="34" charset="-120"/>
               </a:rPr>
-              <a:t>03 design</a:t>
-            </a:r>
-            <a:endParaRPr lang="en-US" sz="1600" dirty="0"/>
-          </a:p>
-        </p:txBody>
-      </p:sp>
-      <p:sp>
-        <p:nvSpPr>
-          <p:cNvPr id="19" name="Text 17"/>
-          <p:cNvSpPr/>
-          <p:nvPr/>
-        </p:nvSpPr>
-        <p:spPr>
-          <a:xfrm>
-            <a:off x="9235440" y="2880360"/>
-            <a:ext cx="2103120" cy="1188720"/>
-          </a:xfrm>
-          <a:prstGeom prst="rect">
-            <a:avLst/>
-          </a:prstGeom>
-          <a:noFill/>
-          <a:ln/>
-        </p:spPr>
-        <p:txBody>
-          <a:bodyPr wrap="square" lIns="0" tIns="0" rIns="0" bIns="0" rtlCol="0" anchor="ctr"/>
-          <a:lstStyle/>
-          <a:p>
-            <a:pPr indent="0" marL="0">
-              <a:buNone/>
-            </a:pPr>
-            <a:r>
-              <a:rPr lang="en-US" sz="1250" dirty="0">
+              <a:t>4  Build</a:t>
+            </a:r>
+            <a:endParaRPr lang="en-US" sz="1500" dirty="0"/>
+          </a:p>
+        </p:txBody>
+      </p:sp>
+      <p:sp>
+        <p:nvSpPr>
+          <p:cNvPr id="15" name="Text 13"/>
+          <p:cNvSpPr/>
+          <p:nvPr/>
+        </p:nvSpPr>
+        <p:spPr>
+          <a:xfrm>
+            <a:off x="9290304" y="2532888"/>
+            <a:ext cx="2212848" cy="960120"/>
+          </a:xfrm>
+          <a:prstGeom prst="rect">
+            <a:avLst/>
+          </a:prstGeom>
+          <a:noFill/>
+          <a:ln/>
+        </p:spPr>
+        <p:txBody>
+          <a:bodyPr wrap="square" lIns="0" tIns="0" rIns="0" bIns="0" rtlCol="0" anchor="ctr"/>
+          <a:lstStyle/>
+          <a:p>
+            <a:pPr indent="0" marL="0">
+              <a:buNone/>
+            </a:pPr>
+            <a:r>
+              <a:rPr lang="en-US" sz="1200" dirty="0">
                 <a:solidFill>
                   <a:srgbClr val="22284B"/>
                 </a:solidFill>
@@ -6846,26 +7829,26 @@
                 <a:ea typeface="Calibri" pitchFamily="34" charset="-122"/>
                 <a:cs typeface="Calibri" pitchFamily="34" charset="-120"/>
               </a:rPr>
-              <a:t>Root + upsell + out-of-scope agents</a:t>
-            </a:r>
-            <a:endParaRPr lang="en-US" sz="1250" dirty="0"/>
-          </a:p>
-        </p:txBody>
-      </p:sp>
-      <p:sp>
-        <p:nvSpPr>
-          <p:cNvPr id="20" name="Shape 18"/>
-          <p:cNvSpPr/>
-          <p:nvPr/>
-        </p:nvSpPr>
-        <p:spPr>
-          <a:xfrm>
-            <a:off x="640080" y="4526280"/>
-            <a:ext cx="10908792" cy="914400"/>
+              <a:t>Console runbook AND cxas-scrapi config + Python + cxas push/lint. One source, two paths.</a:t>
+            </a:r>
+            <a:endParaRPr lang="en-US" sz="1200" dirty="0"/>
+          </a:p>
+        </p:txBody>
+      </p:sp>
+      <p:sp>
+        <p:nvSpPr>
+          <p:cNvPr id="16" name="Shape 14"/>
+          <p:cNvSpPr/>
+          <p:nvPr/>
+        </p:nvSpPr>
+        <p:spPr>
+          <a:xfrm>
+            <a:off x="640080" y="3840480"/>
+            <a:ext cx="2670048" cy="1737360"/>
           </a:xfrm>
           <a:prstGeom prst="roundRect">
             <a:avLst>
-              <a:gd name="adj" fmla="val 9000"/>
+              <a:gd name="adj" fmla="val 4737"/>
             </a:avLst>
           </a:prstGeom>
           <a:solidFill>
@@ -6883,14 +7866,228 @@
       </p:sp>
       <p:sp>
         <p:nvSpPr>
+          <p:cNvPr id="17" name="Text 15"/>
+          <p:cNvSpPr/>
+          <p:nvPr/>
+        </p:nvSpPr>
+        <p:spPr>
+          <a:xfrm>
+            <a:off x="896112" y="4041648"/>
+            <a:ext cx="2212848" cy="457200"/>
+          </a:xfrm>
+          <a:prstGeom prst="rect">
+            <a:avLst/>
+          </a:prstGeom>
+          <a:noFill/>
+          <a:ln/>
+        </p:spPr>
+        <p:txBody>
+          <a:bodyPr wrap="square" lIns="0" tIns="0" rIns="0" bIns="0" rtlCol="0" anchor="ctr"/>
+          <a:lstStyle/>
+          <a:p>
+            <a:pPr indent="0" marL="0">
+              <a:buNone/>
+            </a:pPr>
+            <a:r>
+              <a:rPr lang="en-US" sz="1500" b="1" dirty="0">
+                <a:solidFill>
+                  <a:srgbClr val="1E2761"/>
+                </a:solidFill>
+                <a:latin typeface="Cambria" pitchFamily="34" charset="0"/>
+                <a:ea typeface="Cambria" pitchFamily="34" charset="-122"/>
+                <a:cs typeface="Cambria" pitchFamily="34" charset="-120"/>
+              </a:rPr>
+              <a:t>5  Evals</a:t>
+            </a:r>
+            <a:endParaRPr lang="en-US" sz="1500" dirty="0"/>
+          </a:p>
+        </p:txBody>
+      </p:sp>
+      <p:sp>
+        <p:nvSpPr>
+          <p:cNvPr id="18" name="Text 16"/>
+          <p:cNvSpPr/>
+          <p:nvPr/>
+        </p:nvSpPr>
+        <p:spPr>
+          <a:xfrm>
+            <a:off x="896112" y="4498848"/>
+            <a:ext cx="2212848" cy="960120"/>
+          </a:xfrm>
+          <a:prstGeom prst="rect">
+            <a:avLst/>
+          </a:prstGeom>
+          <a:noFill/>
+          <a:ln/>
+        </p:spPr>
+        <p:txBody>
+          <a:bodyPr wrap="square" lIns="0" tIns="0" rIns="0" bIns="0" rtlCol="0" anchor="ctr"/>
+          <a:lstStyle/>
+          <a:p>
+            <a:pPr indent="0" marL="0">
+              <a:buNone/>
+            </a:pPr>
+            <a:r>
+              <a:rPr lang="en-US" sz="1200" dirty="0">
+                <a:solidFill>
+                  <a:srgbClr val="22284B"/>
+                </a:solidFill>
+                <a:latin typeface="Calibri" pitchFamily="34" charset="0"/>
+                <a:ea typeface="Calibri" pitchFamily="34" charset="-122"/>
+                <a:cs typeface="Calibri" pitchFamily="34" charset="-120"/>
+              </a:rPr>
+              <a:t>All 5 cxas eval types with KPI-tied thresholds. 100% requirement coverage.</a:t>
+            </a:r>
+            <a:endParaRPr lang="en-US" sz="1200" dirty="0"/>
+          </a:p>
+        </p:txBody>
+      </p:sp>
+      <p:sp>
+        <p:nvSpPr>
+          <p:cNvPr id="19" name="Shape 17"/>
+          <p:cNvSpPr/>
+          <p:nvPr/>
+        </p:nvSpPr>
+        <p:spPr>
+          <a:xfrm>
+            <a:off x="3438144" y="3840480"/>
+            <a:ext cx="2670048" cy="1737360"/>
+          </a:xfrm>
+          <a:prstGeom prst="roundRect">
+            <a:avLst>
+              <a:gd name="adj" fmla="val 4737"/>
+            </a:avLst>
+          </a:prstGeom>
+          <a:solidFill>
+            <a:srgbClr val="EAF7F3"/>
+          </a:solidFill>
+          <a:ln/>
+          <a:effectLst>
+            <a:outerShdw sx="100000" sy="100000" kx="0" ky="0" algn="bl" rotWithShape="0" blurRad="88900" dist="38100" dir="5400000">
+              <a:srgbClr val="000000">
+                <a:alpha val="13000"/>
+              </a:srgbClr>
+            </a:outerShdw>
+          </a:effectLst>
+        </p:spPr>
+      </p:sp>
+      <p:sp>
+        <p:nvSpPr>
+          <p:cNvPr id="20" name="Text 18"/>
+          <p:cNvSpPr/>
+          <p:nvPr/>
+        </p:nvSpPr>
+        <p:spPr>
+          <a:xfrm>
+            <a:off x="3694176" y="4041648"/>
+            <a:ext cx="2212848" cy="457200"/>
+          </a:xfrm>
+          <a:prstGeom prst="rect">
+            <a:avLst/>
+          </a:prstGeom>
+          <a:noFill/>
+          <a:ln/>
+        </p:spPr>
+        <p:txBody>
+          <a:bodyPr wrap="square" lIns="0" tIns="0" rIns="0" bIns="0" rtlCol="0" anchor="ctr"/>
+          <a:lstStyle/>
+          <a:p>
+            <a:pPr indent="0" marL="0">
+              <a:buNone/>
+            </a:pPr>
+            <a:r>
+              <a:rPr lang="en-US" sz="1500" b="1" dirty="0">
+                <a:solidFill>
+                  <a:srgbClr val="1E2761"/>
+                </a:solidFill>
+                <a:latin typeface="Cambria" pitchFamily="34" charset="0"/>
+                <a:ea typeface="Cambria" pitchFamily="34" charset="-122"/>
+                <a:cs typeface="Cambria" pitchFamily="34" charset="-120"/>
+              </a:rPr>
+              <a:t>6  Validate</a:t>
+            </a:r>
+            <a:endParaRPr lang="en-US" sz="1500" dirty="0"/>
+          </a:p>
+        </p:txBody>
+      </p:sp>
+      <p:sp>
+        <p:nvSpPr>
           <p:cNvPr id="21" name="Text 19"/>
           <p:cNvSpPr/>
           <p:nvPr/>
         </p:nvSpPr>
         <p:spPr>
           <a:xfrm>
-            <a:off x="914400" y="4526280"/>
-            <a:ext cx="10972800" cy="914400"/>
+            <a:off x="3694176" y="4498848"/>
+            <a:ext cx="2212848" cy="960120"/>
+          </a:xfrm>
+          <a:prstGeom prst="rect">
+            <a:avLst/>
+          </a:prstGeom>
+          <a:noFill/>
+          <a:ln/>
+        </p:spPr>
+        <p:txBody>
+          <a:bodyPr wrap="square" lIns="0" tIns="0" rIns="0" bIns="0" rtlCol="0" anchor="ctr"/>
+          <a:lstStyle/>
+          <a:p>
+            <a:pPr indent="0" marL="0">
+              <a:buNone/>
+            </a:pPr>
+            <a:r>
+              <a:rPr lang="en-US" sz="1200" dirty="0">
+                <a:solidFill>
+                  <a:srgbClr val="22284B"/>
+                </a:solidFill>
+                <a:latin typeface="Calibri" pitchFamily="34" charset="0"/>
+                <a:ea typeface="Calibri" pitchFamily="34" charset="-122"/>
+                <a:cs typeface="Calibri" pitchFamily="34" charset="-120"/>
+              </a:rPr>
+              <a:t>cxas-lint self-audit (0 blockers) + deploy runbook + sign-off gate.</a:t>
+            </a:r>
+            <a:endParaRPr lang="en-US" sz="1200" dirty="0"/>
+          </a:p>
+        </p:txBody>
+      </p:sp>
+      <p:sp>
+        <p:nvSpPr>
+          <p:cNvPr id="22" name="Shape 20"/>
+          <p:cNvSpPr/>
+          <p:nvPr/>
+        </p:nvSpPr>
+        <p:spPr>
+          <a:xfrm>
+            <a:off x="6236208" y="3840480"/>
+            <a:ext cx="2670048" cy="1737360"/>
+          </a:xfrm>
+          <a:prstGeom prst="roundRect">
+            <a:avLst>
+              <a:gd name="adj" fmla="val 4737"/>
+            </a:avLst>
+          </a:prstGeom>
+          <a:solidFill>
+            <a:srgbClr val="EAF7F3"/>
+          </a:solidFill>
+          <a:ln/>
+          <a:effectLst>
+            <a:outerShdw sx="100000" sy="100000" kx="0" ky="0" algn="bl" rotWithShape="0" blurRad="88900" dist="38100" dir="5400000">
+              <a:srgbClr val="000000">
+                <a:alpha val="13000"/>
+              </a:srgbClr>
+            </a:outerShdw>
+          </a:effectLst>
+        </p:spPr>
+      </p:sp>
+      <p:sp>
+        <p:nvSpPr>
+          <p:cNvPr id="23" name="Text 21"/>
+          <p:cNvSpPr/>
+          <p:nvPr/>
+        </p:nvSpPr>
+        <p:spPr>
+          <a:xfrm>
+            <a:off x="6492240" y="4041648"/>
+            <a:ext cx="2212848" cy="457200"/>
           </a:xfrm>
           <a:prstGeom prst="rect">
             <a:avLst/>
@@ -6908,19 +8105,44 @@
             <a:r>
               <a:rPr lang="en-US" sz="1500" b="1" dirty="0">
                 <a:solidFill>
-                  <a:srgbClr val="00A896"/>
-                </a:solidFill>
-                <a:latin typeface="Calibri" pitchFamily="34" charset="0"/>
-                <a:ea typeface="Calibri" pitchFamily="34" charset="-122"/>
-                <a:cs typeface="Calibri" pitchFamily="34" charset="-120"/>
-              </a:rPr>
-              <a:t>The wow moment:  </a:t>
-            </a:r>
-            <a:pPr indent="0" marL="0">
-              <a:buNone/>
-            </a:pPr>
-            <a:r>
-              <a:rPr lang="en-US" sz="1400" dirty="0">
+                  <a:srgbClr val="1E2761"/>
+                </a:solidFill>
+                <a:latin typeface="Cambria" pitchFamily="34" charset="0"/>
+                <a:ea typeface="Cambria" pitchFamily="34" charset="-122"/>
+                <a:cs typeface="Cambria" pitchFamily="34" charset="-120"/>
+              </a:rPr>
+              <a:t>7  Debug &amp; Fix</a:t>
+            </a:r>
+            <a:endParaRPr lang="en-US" sz="1500" dirty="0"/>
+          </a:p>
+        </p:txBody>
+      </p:sp>
+      <p:sp>
+        <p:nvSpPr>
+          <p:cNvPr id="24" name="Text 22"/>
+          <p:cNvSpPr/>
+          <p:nvPr/>
+        </p:nvSpPr>
+        <p:spPr>
+          <a:xfrm>
+            <a:off x="6492240" y="4498848"/>
+            <a:ext cx="2212848" cy="960120"/>
+          </a:xfrm>
+          <a:prstGeom prst="rect">
+            <a:avLst/>
+          </a:prstGeom>
+          <a:noFill/>
+          <a:ln/>
+        </p:spPr>
+        <p:txBody>
+          <a:bodyPr wrap="square" lIns="0" tIns="0" rIns="0" bIns="0" rtlCol="0" anchor="ctr"/>
+          <a:lstStyle/>
+          <a:p>
+            <a:pPr indent="0" marL="0">
+              <a:buNone/>
+            </a:pPr>
+            <a:r>
+              <a:rPr lang="en-US" sz="1200" dirty="0">
                 <a:solidFill>
                   <a:srgbClr val="22284B"/>
                 </a:solidFill>
@@ -6928,7 +8150,75 @@
                 <a:ea typeface="Calibri" pitchFamily="34" charset="-122"/>
                 <a:cs typeface="Calibri" pitchFamily="34" charset="-120"/>
               </a:rPr>
-              <a:t>at stage 2 it stops and asks — it interviews before it builds. Stop the live run right here.</a:t>
+              <a:t>Bug → documented root cause + minimal fix + a new regression eval.</a:t>
+            </a:r>
+            <a:endParaRPr lang="en-US" sz="1200" dirty="0"/>
+          </a:p>
+        </p:txBody>
+      </p:sp>
+      <p:sp>
+        <p:nvSpPr>
+          <p:cNvPr id="25" name="Shape 23"/>
+          <p:cNvSpPr/>
+          <p:nvPr/>
+        </p:nvSpPr>
+        <p:spPr>
+          <a:xfrm>
+            <a:off x="9034272" y="3840480"/>
+            <a:ext cx="2670048" cy="1737360"/>
+          </a:xfrm>
+          <a:prstGeom prst="roundRect">
+            <a:avLst>
+              <a:gd name="adj" fmla="val 4737"/>
+            </a:avLst>
+          </a:prstGeom>
+          <a:solidFill>
+            <a:srgbClr val="EAF7F3"/>
+          </a:solidFill>
+          <a:ln/>
+          <a:effectLst>
+            <a:outerShdw sx="100000" sy="100000" kx="0" ky="0" algn="bl" rotWithShape="0" blurRad="88900" dist="38100" dir="5400000">
+              <a:srgbClr val="000000">
+                <a:alpha val="13000"/>
+              </a:srgbClr>
+            </a:outerShdw>
+          </a:effectLst>
+        </p:spPr>
+      </p:sp>
+      <p:sp>
+        <p:nvSpPr>
+          <p:cNvPr id="26" name="Text 24"/>
+          <p:cNvSpPr/>
+          <p:nvPr/>
+        </p:nvSpPr>
+        <p:spPr>
+          <a:xfrm>
+            <a:off x="9290304" y="4041648"/>
+            <a:ext cx="2212848" cy="457200"/>
+          </a:xfrm>
+          <a:prstGeom prst="rect">
+            <a:avLst/>
+          </a:prstGeom>
+          <a:noFill/>
+          <a:ln/>
+        </p:spPr>
+        <p:txBody>
+          <a:bodyPr wrap="square" lIns="0" tIns="0" rIns="0" bIns="0" rtlCol="0" anchor="ctr"/>
+          <a:lstStyle/>
+          <a:p>
+            <a:pPr indent="0" marL="0">
+              <a:buNone/>
+            </a:pPr>
+            <a:r>
+              <a:rPr lang="en-US" sz="1500" b="1" dirty="0">
+                <a:solidFill>
+                  <a:srgbClr val="1E2761"/>
+                </a:solidFill>
+                <a:latin typeface="Cambria" pitchFamily="34" charset="0"/>
+                <a:ea typeface="Cambria" pitchFamily="34" charset="-122"/>
+                <a:cs typeface="Cambria" pitchFamily="34" charset="-120"/>
+              </a:rPr>
+              <a:t>+  Assessor</a:t>
             </a:r>
             <a:endParaRPr lang="en-US" sz="1500" dirty="0"/>
           </a:p>
@@ -6936,7 +8226,46 @@
       </p:sp>
       <p:sp>
         <p:nvSpPr>
-          <p:cNvPr id="22" name="Text 20"/>
+          <p:cNvPr id="27" name="Text 25"/>
+          <p:cNvSpPr/>
+          <p:nvPr/>
+        </p:nvSpPr>
+        <p:spPr>
+          <a:xfrm>
+            <a:off x="9290304" y="4498848"/>
+            <a:ext cx="2212848" cy="960120"/>
+          </a:xfrm>
+          <a:prstGeom prst="rect">
+            <a:avLst/>
+          </a:prstGeom>
+          <a:noFill/>
+          <a:ln/>
+        </p:spPr>
+        <p:txBody>
+          <a:bodyPr wrap="square" lIns="0" tIns="0" rIns="0" bIns="0" rtlCol="0" anchor="ctr"/>
+          <a:lstStyle/>
+          <a:p>
+            <a:pPr indent="0" marL="0">
+              <a:buNone/>
+            </a:pPr>
+            <a:r>
+              <a:rPr lang="en-US" sz="1200" dirty="0">
+                <a:solidFill>
+                  <a:srgbClr val="22284B"/>
+                </a:solidFill>
+                <a:latin typeface="Calibri" pitchFamily="34" charset="0"/>
+                <a:ea typeface="Calibri" pitchFamily="34" charset="-122"/>
+                <a:cs typeface="Calibri" pitchFamily="34" charset="-120"/>
+              </a:rPr>
+              <a:t>A skill that scores ANY prompt vs. Anthropic best practices and rewrites it.</a:t>
+            </a:r>
+            <a:endParaRPr lang="en-US" sz="1200" dirty="0"/>
+          </a:p>
+        </p:txBody>
+      </p:sp>
+      <p:sp>
+        <p:nvSpPr>
+          <p:cNvPr id="28" name="Text 26"/>
           <p:cNvSpPr/>
           <p:nvPr/>
         </p:nvSpPr>
@@ -6975,7 +8304,7 @@
       </p:sp>
       <p:sp>
         <p:nvSpPr>
-          <p:cNvPr id="23" name="Text 21"/>
+          <p:cNvPr id="29" name="Text 27"/>
           <p:cNvSpPr/>
           <p:nvPr/>
         </p:nvSpPr>
@@ -7077,7 +8406,7 @@
                 <a:ea typeface="Calibri" pitchFamily="34" charset="-122"/>
                 <a:cs typeface="Calibri" pitchFamily="34" charset="-120"/>
               </a:rPr>
-              <a:t>THE MONEY SLIDE</a:t>
+              <a:t>LIVE DEMO</a:t>
             </a:r>
             <a:endParaRPr lang="en-US" sz="1200" dirty="0"/>
           </a:p>
@@ -7116,7 +8445,7 @@
                 <a:ea typeface="Cambria" pitchFamily="34" charset="-122"/>
                 <a:cs typeface="Cambria" pitchFamily="34" charset="-120"/>
               </a:rPr>
-              <a:t>Same resources, emitted twice — one source of truth</a:t>
+              <a:t>Run against CX Agent Studio’s own default sample (Cymbal)</a:t>
             </a:r>
             <a:endParaRPr lang="en-US" sz="3000" dirty="0"/>
           </a:p>
@@ -7124,18 +8453,57 @@
       </p:sp>
       <p:sp>
         <p:nvSpPr>
-          <p:cNvPr id="4" name="Shape 2"/>
-          <p:cNvSpPr/>
-          <p:nvPr/>
-        </p:nvSpPr>
-        <p:spPr>
-          <a:xfrm>
-            <a:off x="640080" y="1874520"/>
-            <a:ext cx="5349240" cy="3566160"/>
+          <p:cNvPr id="4" name="Text 2"/>
+          <p:cNvSpPr/>
+          <p:nvPr/>
+        </p:nvSpPr>
+        <p:spPr>
+          <a:xfrm>
+            <a:off x="640080" y="1508760"/>
+            <a:ext cx="10908792" cy="457200"/>
+          </a:xfrm>
+          <a:prstGeom prst="rect">
+            <a:avLst/>
+          </a:prstGeom>
+          <a:noFill/>
+          <a:ln/>
+        </p:spPr>
+        <p:txBody>
+          <a:bodyPr wrap="square" lIns="0" tIns="0" rIns="0" bIns="0" rtlCol="0" anchor="ctr"/>
+          <a:lstStyle/>
+          <a:p>
+            <a:pPr indent="0" marL="0">
+              <a:buNone/>
+            </a:pPr>
+            <a:r>
+              <a:rPr lang="en-US" sz="1400" i="1" dirty="0">
+                <a:solidFill>
+                  <a:srgbClr val="5B6785"/>
+                </a:solidFill>
+                <a:latin typeface="Calibri" pitchFamily="34" charset="0"/>
+                <a:ea typeface="Calibri" pitchFamily="34" charset="-122"/>
+                <a:cs typeface="Calibri" pitchFamily="34" charset="-120"/>
+              </a:rPr>
+              <a:t>Why this sample: you can diff the generated architecture against the shipped app in the console — a built-in ground-truth check.</a:t>
+            </a:r>
+            <a:endParaRPr lang="en-US" sz="1400" dirty="0"/>
+          </a:p>
+        </p:txBody>
+      </p:sp>
+      <p:sp>
+        <p:nvSpPr>
+          <p:cNvPr id="5" name="Shape 3"/>
+          <p:cNvSpPr/>
+          <p:nvPr/>
+        </p:nvSpPr>
+        <p:spPr>
+          <a:xfrm>
+            <a:off x="640080" y="2194560"/>
+            <a:ext cx="2560320" cy="2011680"/>
           </a:xfrm>
           <a:prstGeom prst="roundRect">
             <a:avLst>
-              <a:gd name="adj" fmla="val 2308"/>
+              <a:gd name="adj" fmla="val 4091"/>
             </a:avLst>
           </a:prstGeom>
           <a:solidFill>
@@ -7153,30 +8521,30 @@
       </p:sp>
       <p:sp>
         <p:nvSpPr>
-          <p:cNvPr id="5" name="Text 3"/>
-          <p:cNvSpPr/>
-          <p:nvPr/>
-        </p:nvSpPr>
-        <p:spPr>
-          <a:xfrm>
-            <a:off x="960120" y="2103120"/>
-            <a:ext cx="4754880" cy="457200"/>
-          </a:xfrm>
-          <a:prstGeom prst="rect">
-            <a:avLst/>
-          </a:prstGeom>
-          <a:noFill/>
-          <a:ln/>
-        </p:spPr>
-        <p:txBody>
-          <a:bodyPr wrap="square" lIns="0" tIns="0" rIns="0" bIns="0" rtlCol="0" anchor="ctr"/>
-          <a:lstStyle/>
-          <a:p>
-            <a:pPr indent="0" marL="0">
-              <a:buNone/>
-            </a:pPr>
-            <a:r>
-              <a:rPr lang="en-US" sz="1900" b="1" dirty="0">
+          <p:cNvPr id="6" name="Text 4"/>
+          <p:cNvSpPr/>
+          <p:nvPr/>
+        </p:nvSpPr>
+        <p:spPr>
+          <a:xfrm>
+            <a:off x="868680" y="2395728"/>
+            <a:ext cx="2103120" cy="457200"/>
+          </a:xfrm>
+          <a:prstGeom prst="rect">
+            <a:avLst/>
+          </a:prstGeom>
+          <a:noFill/>
+          <a:ln/>
+        </p:spPr>
+        <p:txBody>
+          <a:bodyPr wrap="square" lIns="0" tIns="0" rIns="0" bIns="0" rtlCol="0" anchor="ctr"/>
+          <a:lstStyle/>
+          <a:p>
+            <a:pPr indent="0" marL="0">
+              <a:buNone/>
+            </a:pPr>
+            <a:r>
+              <a:rPr lang="en-US" sz="1600" b="1" dirty="0">
                 <a:solidFill>
                   <a:srgbClr val="1E2761"/>
                 </a:solidFill>
@@ -7184,38 +8552,77 @@
                 <a:ea typeface="Cambria" pitchFamily="34" charset="-122"/>
                 <a:cs typeface="Cambria" pitchFamily="34" charset="-120"/>
               </a:rPr>
-              <a:t>Console runbook</a:t>
-            </a:r>
-            <a:endParaRPr lang="en-US" sz="1900" dirty="0"/>
-          </a:p>
-        </p:txBody>
-      </p:sp>
-      <p:sp>
-        <p:nvSpPr>
-          <p:cNvPr id="6" name="Text 4"/>
-          <p:cNvSpPr/>
-          <p:nvPr/>
-        </p:nvSpPr>
-        <p:spPr>
-          <a:xfrm>
-            <a:off x="960120" y="2542032"/>
-            <a:ext cx="4754880" cy="320040"/>
-          </a:xfrm>
-          <a:prstGeom prst="rect">
-            <a:avLst/>
-          </a:prstGeom>
-          <a:noFill/>
-          <a:ln/>
-        </p:spPr>
-        <p:txBody>
-          <a:bodyPr wrap="square" lIns="0" tIns="0" rIns="0" bIns="0" rtlCol="0" anchor="ctr"/>
-          <a:lstStyle/>
-          <a:p>
-            <a:pPr indent="0" marL="0">
-              <a:buNone/>
-            </a:pPr>
-            <a:r>
-              <a:rPr lang="en-US" sz="1200" i="1" dirty="0">
+              <a:t>00-prd.md</a:t>
+            </a:r>
+            <a:endParaRPr lang="en-US" sz="1600" dirty="0"/>
+          </a:p>
+        </p:txBody>
+      </p:sp>
+      <p:sp>
+        <p:nvSpPr>
+          <p:cNvPr id="7" name="Text 5"/>
+          <p:cNvSpPr/>
+          <p:nvPr/>
+        </p:nvSpPr>
+        <p:spPr>
+          <a:xfrm>
+            <a:off x="868680" y="2880360"/>
+            <a:ext cx="2103120" cy="1188720"/>
+          </a:xfrm>
+          <a:prstGeom prst="rect">
+            <a:avLst/>
+          </a:prstGeom>
+          <a:noFill/>
+          <a:ln/>
+        </p:spPr>
+        <p:txBody>
+          <a:bodyPr wrap="square" lIns="0" tIns="0" rIns="0" bIns="0" rtlCol="0" anchor="ctr"/>
+          <a:lstStyle/>
+          <a:p>
+            <a:pPr indent="0" marL="0">
+              <a:buNone/>
+            </a:pPr>
+            <a:r>
+              <a:rPr lang="en-US" sz="1250" dirty="0">
+                <a:solidFill>
+                  <a:srgbClr val="22284B"/>
+                </a:solidFill>
+                <a:latin typeface="Calibri" pitchFamily="34" charset="0"/>
+                <a:ea typeface="Calibri" pitchFamily="34" charset="-122"/>
+                <a:cs typeface="Calibri" pitchFamily="34" charset="-120"/>
+              </a:rPr>
+              <a:t>A realistic, imperfect PRD</a:t>
+            </a:r>
+            <a:endParaRPr lang="en-US" sz="1250" dirty="0"/>
+          </a:p>
+        </p:txBody>
+      </p:sp>
+      <p:sp>
+        <p:nvSpPr>
+          <p:cNvPr id="8" name="Text 6"/>
+          <p:cNvSpPr/>
+          <p:nvPr/>
+        </p:nvSpPr>
+        <p:spPr>
+          <a:xfrm>
+            <a:off x="3182112" y="2743200"/>
+            <a:ext cx="292608" cy="457200"/>
+          </a:xfrm>
+          <a:prstGeom prst="rect">
+            <a:avLst/>
+          </a:prstGeom>
+          <a:noFill/>
+          <a:ln/>
+        </p:spPr>
+        <p:txBody>
+          <a:bodyPr wrap="square" lIns="0" tIns="0" rIns="0" bIns="0" rtlCol="0" anchor="ctr"/>
+          <a:lstStyle/>
+          <a:p>
+            <a:pPr algn="ctr" indent="0" marL="0">
+              <a:buNone/>
+            </a:pPr>
+            <a:r>
+              <a:rPr lang="en-US" sz="1800" dirty="0">
                 <a:solidFill>
                   <a:srgbClr val="5B6785"/>
                 </a:solidFill>
@@ -7223,132 +8630,26 @@
                 <a:ea typeface="Calibri" pitchFamily="34" charset="-122"/>
                 <a:cs typeface="Calibri" pitchFamily="34" charset="-120"/>
               </a:rPr>
-              <a:t>For teams building in the UI</a:t>
-            </a:r>
-            <a:endParaRPr lang="en-US" sz="1200" dirty="0"/>
-          </a:p>
-        </p:txBody>
-      </p:sp>
-      <p:sp>
-        <p:nvSpPr>
-          <p:cNvPr id="7" name="Text 5"/>
-          <p:cNvSpPr/>
-          <p:nvPr/>
-        </p:nvSpPr>
-        <p:spPr>
-          <a:xfrm>
-            <a:off x="960120" y="2971800"/>
-            <a:ext cx="4754880" cy="2286000"/>
-          </a:xfrm>
-          <a:prstGeom prst="rect">
-            <a:avLst/>
-          </a:prstGeom>
-          <a:noFill/>
-          <a:ln/>
-        </p:spPr>
-        <p:txBody>
-          <a:bodyPr wrap="square" lIns="0" tIns="0" rIns="0" bIns="0" rtlCol="0" anchor="ctr"/>
-          <a:lstStyle/>
-          <a:p>
-            <a:pPr marL="342900" indent="-342900">
-              <a:spcAft>
-                <a:spcPts val="600"/>
-              </a:spcAft>
-              <a:buSzPct val="100000"/>
-              <a:buChar char="•"/>
-            </a:pPr>
-            <a:r>
-              <a:rPr lang="en-US" sz="1400" dirty="0">
-                <a:solidFill>
-                  <a:srgbClr val="22284B"/>
-                </a:solidFill>
-                <a:latin typeface="Calibri" pitchFamily="34" charset="0"/>
-                <a:ea typeface="Calibri" pitchFamily="34" charset="-122"/>
-                <a:cs typeface="Calibri" pitchFamily="34" charset="-120"/>
-              </a:rPr>
-              <a:t>Numbered CX Agent Studio steps</a:t>
-            </a:r>
-            <a:endParaRPr lang="en-US" sz="1400" dirty="0"/>
-          </a:p>
-          <a:p>
-            <a:pPr marL="342900" indent="-342900">
-              <a:spcAft>
-                <a:spcPts val="600"/>
-              </a:spcAft>
-              <a:buSzPct val="100000"/>
-              <a:buChar char="•"/>
-            </a:pPr>
-            <a:r>
-              <a:rPr lang="en-US" sz="1400" dirty="0">
-                <a:solidFill>
-                  <a:srgbClr val="22284B"/>
-                </a:solidFill>
-                <a:latin typeface="Calibri" pitchFamily="34" charset="0"/>
-                <a:ea typeface="Calibri" pitchFamily="34" charset="-122"/>
-                <a:cs typeface="Calibri" pitchFamily="34" charset="-120"/>
-              </a:rPr>
-              <a:t>Create App → agents → tools → guardrails</a:t>
-            </a:r>
-            <a:endParaRPr lang="en-US" sz="1400" dirty="0"/>
-          </a:p>
-          <a:p>
-            <a:pPr marL="342900" indent="-342900">
-              <a:spcAft>
-                <a:spcPts val="600"/>
-              </a:spcAft>
-              <a:buSzPct val="100000"/>
-              <a:buChar char="•"/>
-            </a:pPr>
-            <a:r>
-              <a:rPr lang="en-US" sz="1400" dirty="0">
-                <a:solidFill>
-                  <a:srgbClr val="22284B"/>
-                </a:solidFill>
-                <a:latin typeface="Calibri" pitchFamily="34" charset="0"/>
-                <a:ea typeface="Calibri" pitchFamily="34" charset="-122"/>
-                <a:cs typeface="Calibri" pitchFamily="34" charset="-120"/>
-              </a:rPr>
-              <a:t>Attach fallbacks + human handoff</a:t>
-            </a:r>
-            <a:endParaRPr lang="en-US" sz="1400" dirty="0"/>
-          </a:p>
-          <a:p>
-            <a:pPr marL="342900" indent="-342900">
-              <a:spcAft>
-                <a:spcPts val="600"/>
-              </a:spcAft>
-              <a:buSzPct val="100000"/>
-              <a:buChar char="•"/>
-            </a:pPr>
-            <a:r>
-              <a:rPr lang="en-US" sz="1400" dirty="0">
-                <a:solidFill>
-                  <a:srgbClr val="22284B"/>
-                </a:solidFill>
-                <a:latin typeface="Calibri" pitchFamily="34" charset="0"/>
-                <a:ea typeface="Calibri" pitchFamily="34" charset="-122"/>
-                <a:cs typeface="Calibri" pitchFamily="34" charset="-120"/>
-              </a:rPr>
-              <a:t>Marks where a human supplies secrets</a:t>
-            </a:r>
-            <a:endParaRPr lang="en-US" sz="1400" dirty="0"/>
-          </a:p>
-        </p:txBody>
-      </p:sp>
-      <p:sp>
-        <p:nvSpPr>
-          <p:cNvPr id="8" name="Shape 6"/>
-          <p:cNvSpPr/>
-          <p:nvPr/>
-        </p:nvSpPr>
-        <p:spPr>
-          <a:xfrm>
-            <a:off x="6355080" y="1874520"/>
-            <a:ext cx="5349240" cy="3566160"/>
+              <a:t>→</a:t>
+            </a:r>
+            <a:endParaRPr lang="en-US" sz="1800" dirty="0"/>
+          </a:p>
+        </p:txBody>
+      </p:sp>
+      <p:sp>
+        <p:nvSpPr>
+          <p:cNvPr id="9" name="Shape 7"/>
+          <p:cNvSpPr/>
+          <p:nvPr/>
+        </p:nvSpPr>
+        <p:spPr>
+          <a:xfrm>
+            <a:off x="3429000" y="2194560"/>
+            <a:ext cx="2560320" cy="2011680"/>
           </a:xfrm>
           <a:prstGeom prst="roundRect">
             <a:avLst>
-              <a:gd name="adj" fmla="val 2308"/>
+              <a:gd name="adj" fmla="val 4091"/>
             </a:avLst>
           </a:prstGeom>
           <a:solidFill>
@@ -7366,30 +8667,30 @@
       </p:sp>
       <p:sp>
         <p:nvSpPr>
-          <p:cNvPr id="9" name="Text 7"/>
-          <p:cNvSpPr/>
-          <p:nvPr/>
-        </p:nvSpPr>
-        <p:spPr>
-          <a:xfrm>
-            <a:off x="6675120" y="2103120"/>
-            <a:ext cx="4754880" cy="457200"/>
-          </a:xfrm>
-          <a:prstGeom prst="rect">
-            <a:avLst/>
-          </a:prstGeom>
-          <a:noFill/>
-          <a:ln/>
-        </p:spPr>
-        <p:txBody>
-          <a:bodyPr wrap="square" lIns="0" tIns="0" rIns="0" bIns="0" rtlCol="0" anchor="ctr"/>
-          <a:lstStyle/>
-          <a:p>
-            <a:pPr indent="0" marL="0">
-              <a:buNone/>
-            </a:pPr>
-            <a:r>
-              <a:rPr lang="en-US" sz="1900" b="1" dirty="0">
+          <p:cNvPr id="10" name="Text 8"/>
+          <p:cNvSpPr/>
+          <p:nvPr/>
+        </p:nvSpPr>
+        <p:spPr>
+          <a:xfrm>
+            <a:off x="3657600" y="2395728"/>
+            <a:ext cx="2103120" cy="457200"/>
+          </a:xfrm>
+          <a:prstGeom prst="rect">
+            <a:avLst/>
+          </a:prstGeom>
+          <a:noFill/>
+          <a:ln/>
+        </p:spPr>
+        <p:txBody>
+          <a:bodyPr wrap="square" lIns="0" tIns="0" rIns="0" bIns="0" rtlCol="0" anchor="ctr"/>
+          <a:lstStyle/>
+          <a:p>
+            <a:pPr indent="0" marL="0">
+              <a:buNone/>
+            </a:pPr>
+            <a:r>
+              <a:rPr lang="en-US" sz="1600" b="1" dirty="0">
                 <a:solidFill>
                   <a:srgbClr val="FFFFFF"/>
                 </a:solidFill>
@@ -7397,38 +8698,38 @@
                 <a:ea typeface="Cambria" pitchFamily="34" charset="-122"/>
                 <a:cs typeface="Cambria" pitchFamily="34" charset="-120"/>
               </a:rPr>
-              <a:t>cxas-scrapi config-as-code</a:t>
-            </a:r>
-            <a:endParaRPr lang="en-US" sz="1900" dirty="0"/>
-          </a:p>
-        </p:txBody>
-      </p:sp>
-      <p:sp>
-        <p:nvSpPr>
-          <p:cNvPr id="10" name="Text 8"/>
-          <p:cNvSpPr/>
-          <p:nvPr/>
-        </p:nvSpPr>
-        <p:spPr>
-          <a:xfrm>
-            <a:off x="6675120" y="2542032"/>
-            <a:ext cx="4754880" cy="320040"/>
-          </a:xfrm>
-          <a:prstGeom prst="rect">
-            <a:avLst/>
-          </a:prstGeom>
-          <a:noFill/>
-          <a:ln/>
-        </p:spPr>
-        <p:txBody>
-          <a:bodyPr wrap="square" lIns="0" tIns="0" rIns="0" bIns="0" rtlCol="0" anchor="ctr"/>
-          <a:lstStyle/>
-          <a:p>
-            <a:pPr indent="0" marL="0">
-              <a:buNone/>
-            </a:pPr>
-            <a:r>
-              <a:rPr lang="en-US" sz="1200" i="1" dirty="0">
+              <a:t>01 brief</a:t>
+            </a:r>
+            <a:endParaRPr lang="en-US" sz="1600" dirty="0"/>
+          </a:p>
+        </p:txBody>
+      </p:sp>
+      <p:sp>
+        <p:nvSpPr>
+          <p:cNvPr id="11" name="Text 9"/>
+          <p:cNvSpPr/>
+          <p:nvPr/>
+        </p:nvSpPr>
+        <p:spPr>
+          <a:xfrm>
+            <a:off x="3657600" y="2880360"/>
+            <a:ext cx="2103120" cy="1188720"/>
+          </a:xfrm>
+          <a:prstGeom prst="rect">
+            <a:avLst/>
+          </a:prstGeom>
+          <a:noFill/>
+          <a:ln/>
+        </p:spPr>
+        <p:txBody>
+          <a:bodyPr wrap="square" lIns="0" tIns="0" rIns="0" bIns="0" rtlCol="0" anchor="ctr"/>
+          <a:lstStyle/>
+          <a:p>
+            <a:pPr indent="0" marL="0">
+              <a:buNone/>
+            </a:pPr>
+            <a:r>
+              <a:rPr lang="en-US" sz="1250" dirty="0">
                 <a:solidFill>
                   <a:srgbClr val="CADCFC"/>
                 </a:solidFill>
@@ -7436,160 +8737,389 @@
                 <a:ea typeface="Calibri" pitchFamily="34" charset="-122"/>
                 <a:cs typeface="Calibri" pitchFamily="34" charset="-120"/>
               </a:rPr>
-              <a:t>For CI/CD and version control</a:t>
-            </a:r>
-            <a:endParaRPr lang="en-US" sz="1200" dirty="0"/>
-          </a:p>
-        </p:txBody>
-      </p:sp>
-      <p:sp>
-        <p:nvSpPr>
-          <p:cNvPr id="11" name="Text 9"/>
-          <p:cNvSpPr/>
-          <p:nvPr/>
-        </p:nvSpPr>
-        <p:spPr>
-          <a:xfrm>
-            <a:off x="6675120" y="2971800"/>
-            <a:ext cx="4754880" cy="2286000"/>
-          </a:xfrm>
-          <a:prstGeom prst="rect">
-            <a:avLst/>
-          </a:prstGeom>
-          <a:noFill/>
-          <a:ln/>
-        </p:spPr>
-        <p:txBody>
-          <a:bodyPr wrap="square" lIns="0" tIns="0" rIns="0" bIns="0" rtlCol="0" anchor="ctr"/>
-          <a:lstStyle/>
-          <a:p>
-            <a:pPr marL="342900" indent="-342900">
-              <a:spcAft>
-                <a:spcPts val="600"/>
-              </a:spcAft>
-              <a:buSzPct val="100000"/>
-              <a:buChar char="•"/>
+              <a:t>10 requirements; UNKNOWNs flagged (no KPI stated)</a:t>
+            </a:r>
+            <a:endParaRPr lang="en-US" sz="1250" dirty="0"/>
+          </a:p>
+        </p:txBody>
+      </p:sp>
+      <p:sp>
+        <p:nvSpPr>
+          <p:cNvPr id="12" name="Text 10"/>
+          <p:cNvSpPr/>
+          <p:nvPr/>
+        </p:nvSpPr>
+        <p:spPr>
+          <a:xfrm>
+            <a:off x="5971032" y="2743200"/>
+            <a:ext cx="292608" cy="457200"/>
+          </a:xfrm>
+          <a:prstGeom prst="rect">
+            <a:avLst/>
+          </a:prstGeom>
+          <a:noFill/>
+          <a:ln/>
+        </p:spPr>
+        <p:txBody>
+          <a:bodyPr wrap="square" lIns="0" tIns="0" rIns="0" bIns="0" rtlCol="0" anchor="ctr"/>
+          <a:lstStyle/>
+          <a:p>
+            <a:pPr algn="ctr" indent="0" marL="0">
+              <a:buNone/>
+            </a:pPr>
+            <a:r>
+              <a:rPr lang="en-US" sz="1800" dirty="0">
+                <a:solidFill>
+                  <a:srgbClr val="5B6785"/>
+                </a:solidFill>
+                <a:latin typeface="Calibri" pitchFamily="34" charset="0"/>
+                <a:ea typeface="Calibri" pitchFamily="34" charset="-122"/>
+                <a:cs typeface="Calibri" pitchFamily="34" charset="-120"/>
+              </a:rPr>
+              <a:t>→</a:t>
+            </a:r>
+            <a:endParaRPr lang="en-US" sz="1800" dirty="0"/>
+          </a:p>
+        </p:txBody>
+      </p:sp>
+      <p:sp>
+        <p:nvSpPr>
+          <p:cNvPr id="13" name="Shape 11"/>
+          <p:cNvSpPr/>
+          <p:nvPr/>
+        </p:nvSpPr>
+        <p:spPr>
+          <a:xfrm>
+            <a:off x="6217920" y="2194560"/>
+            <a:ext cx="2560320" cy="2011680"/>
+          </a:xfrm>
+          <a:prstGeom prst="roundRect">
+            <a:avLst>
+              <a:gd name="adj" fmla="val 4091"/>
+            </a:avLst>
+          </a:prstGeom>
+          <a:solidFill>
+            <a:srgbClr val="F2F6FF"/>
+          </a:solidFill>
+          <a:ln/>
+          <a:effectLst>
+            <a:outerShdw sx="100000" sy="100000" kx="0" ky="0" algn="bl" rotWithShape="0" blurRad="88900" dist="38100" dir="5400000">
+              <a:srgbClr val="000000">
+                <a:alpha val="13000"/>
+              </a:srgbClr>
+            </a:outerShdw>
+          </a:effectLst>
+        </p:spPr>
+      </p:sp>
+      <p:sp>
+        <p:nvSpPr>
+          <p:cNvPr id="14" name="Text 12"/>
+          <p:cNvSpPr/>
+          <p:nvPr/>
+        </p:nvSpPr>
+        <p:spPr>
+          <a:xfrm>
+            <a:off x="6446520" y="2395728"/>
+            <a:ext cx="2103120" cy="457200"/>
+          </a:xfrm>
+          <a:prstGeom prst="rect">
+            <a:avLst/>
+          </a:prstGeom>
+          <a:noFill/>
+          <a:ln/>
+        </p:spPr>
+        <p:txBody>
+          <a:bodyPr wrap="square" lIns="0" tIns="0" rIns="0" bIns="0" rtlCol="0" anchor="ctr"/>
+          <a:lstStyle/>
+          <a:p>
+            <a:pPr indent="0" marL="0">
+              <a:buNone/>
+            </a:pPr>
+            <a:r>
+              <a:rPr lang="en-US" sz="1600" b="1" dirty="0">
+                <a:solidFill>
+                  <a:srgbClr val="1E2761"/>
+                </a:solidFill>
+                <a:latin typeface="Cambria" pitchFamily="34" charset="0"/>
+                <a:ea typeface="Cambria" pitchFamily="34" charset="-122"/>
+                <a:cs typeface="Cambria" pitchFamily="34" charset="-120"/>
+              </a:rPr>
+              <a:t>02 interview</a:t>
+            </a:r>
+            <a:endParaRPr lang="en-US" sz="1600" dirty="0"/>
+          </a:p>
+        </p:txBody>
+      </p:sp>
+      <p:sp>
+        <p:nvSpPr>
+          <p:cNvPr id="15" name="Text 13"/>
+          <p:cNvSpPr/>
+          <p:nvPr/>
+        </p:nvSpPr>
+        <p:spPr>
+          <a:xfrm>
+            <a:off x="6446520" y="2880360"/>
+            <a:ext cx="2103120" cy="1188720"/>
+          </a:xfrm>
+          <a:prstGeom prst="rect">
+            <a:avLst/>
+          </a:prstGeom>
+          <a:noFill/>
+          <a:ln/>
+        </p:spPr>
+        <p:txBody>
+          <a:bodyPr wrap="square" lIns="0" tIns="0" rIns="0" bIns="0" rtlCol="0" anchor="ctr"/>
+          <a:lstStyle/>
+          <a:p>
+            <a:pPr indent="0" marL="0">
+              <a:buNone/>
+            </a:pPr>
+            <a:r>
+              <a:rPr lang="en-US" sz="1250" dirty="0">
+                <a:solidFill>
+                  <a:srgbClr val="22284B"/>
+                </a:solidFill>
+                <a:latin typeface="Calibri" pitchFamily="34" charset="0"/>
+                <a:ea typeface="Calibri" pitchFamily="34" charset="-122"/>
+                <a:cs typeface="Calibri" pitchFamily="34" charset="-120"/>
+              </a:rPr>
+              <a:t>Pins upsell policy + discount approval</a:t>
+            </a:r>
+            <a:endParaRPr lang="en-US" sz="1250" dirty="0"/>
+          </a:p>
+        </p:txBody>
+      </p:sp>
+      <p:sp>
+        <p:nvSpPr>
+          <p:cNvPr id="16" name="Text 14"/>
+          <p:cNvSpPr/>
+          <p:nvPr/>
+        </p:nvSpPr>
+        <p:spPr>
+          <a:xfrm>
+            <a:off x="8759952" y="2743200"/>
+            <a:ext cx="292608" cy="457200"/>
+          </a:xfrm>
+          <a:prstGeom prst="rect">
+            <a:avLst/>
+          </a:prstGeom>
+          <a:noFill/>
+          <a:ln/>
+        </p:spPr>
+        <p:txBody>
+          <a:bodyPr wrap="square" lIns="0" tIns="0" rIns="0" bIns="0" rtlCol="0" anchor="ctr"/>
+          <a:lstStyle/>
+          <a:p>
+            <a:pPr algn="ctr" indent="0" marL="0">
+              <a:buNone/>
+            </a:pPr>
+            <a:r>
+              <a:rPr lang="en-US" sz="1800" dirty="0">
+                <a:solidFill>
+                  <a:srgbClr val="5B6785"/>
+                </a:solidFill>
+                <a:latin typeface="Calibri" pitchFamily="34" charset="0"/>
+                <a:ea typeface="Calibri" pitchFamily="34" charset="-122"/>
+                <a:cs typeface="Calibri" pitchFamily="34" charset="-120"/>
+              </a:rPr>
+              <a:t>→</a:t>
+            </a:r>
+            <a:endParaRPr lang="en-US" sz="1800" dirty="0"/>
+          </a:p>
+        </p:txBody>
+      </p:sp>
+      <p:sp>
+        <p:nvSpPr>
+          <p:cNvPr id="17" name="Shape 15"/>
+          <p:cNvSpPr/>
+          <p:nvPr/>
+        </p:nvSpPr>
+        <p:spPr>
+          <a:xfrm>
+            <a:off x="9006840" y="2194560"/>
+            <a:ext cx="2560320" cy="2011680"/>
+          </a:xfrm>
+          <a:prstGeom prst="roundRect">
+            <a:avLst>
+              <a:gd name="adj" fmla="val 4091"/>
+            </a:avLst>
+          </a:prstGeom>
+          <a:solidFill>
+            <a:srgbClr val="F2F6FF"/>
+          </a:solidFill>
+          <a:ln/>
+          <a:effectLst>
+            <a:outerShdw sx="100000" sy="100000" kx="0" ky="0" algn="bl" rotWithShape="0" blurRad="88900" dist="38100" dir="5400000">
+              <a:srgbClr val="000000">
+                <a:alpha val="13000"/>
+              </a:srgbClr>
+            </a:outerShdw>
+          </a:effectLst>
+        </p:spPr>
+      </p:sp>
+      <p:sp>
+        <p:nvSpPr>
+          <p:cNvPr id="18" name="Text 16"/>
+          <p:cNvSpPr/>
+          <p:nvPr/>
+        </p:nvSpPr>
+        <p:spPr>
+          <a:xfrm>
+            <a:off x="9235440" y="2395728"/>
+            <a:ext cx="2103120" cy="457200"/>
+          </a:xfrm>
+          <a:prstGeom prst="rect">
+            <a:avLst/>
+          </a:prstGeom>
+          <a:noFill/>
+          <a:ln/>
+        </p:spPr>
+        <p:txBody>
+          <a:bodyPr wrap="square" lIns="0" tIns="0" rIns="0" bIns="0" rtlCol="0" anchor="ctr"/>
+          <a:lstStyle/>
+          <a:p>
+            <a:pPr indent="0" marL="0">
+              <a:buNone/>
+            </a:pPr>
+            <a:r>
+              <a:rPr lang="en-US" sz="1600" b="1" dirty="0">
+                <a:solidFill>
+                  <a:srgbClr val="1E2761"/>
+                </a:solidFill>
+                <a:latin typeface="Cambria" pitchFamily="34" charset="0"/>
+                <a:ea typeface="Cambria" pitchFamily="34" charset="-122"/>
+                <a:cs typeface="Cambria" pitchFamily="34" charset="-120"/>
+              </a:rPr>
+              <a:t>03 design</a:t>
+            </a:r>
+            <a:endParaRPr lang="en-US" sz="1600" dirty="0"/>
+          </a:p>
+        </p:txBody>
+      </p:sp>
+      <p:sp>
+        <p:nvSpPr>
+          <p:cNvPr id="19" name="Text 17"/>
+          <p:cNvSpPr/>
+          <p:nvPr/>
+        </p:nvSpPr>
+        <p:spPr>
+          <a:xfrm>
+            <a:off x="9235440" y="2880360"/>
+            <a:ext cx="2103120" cy="1188720"/>
+          </a:xfrm>
+          <a:prstGeom prst="rect">
+            <a:avLst/>
+          </a:prstGeom>
+          <a:noFill/>
+          <a:ln/>
+        </p:spPr>
+        <p:txBody>
+          <a:bodyPr wrap="square" lIns="0" tIns="0" rIns="0" bIns="0" rtlCol="0" anchor="ctr"/>
+          <a:lstStyle/>
+          <a:p>
+            <a:pPr indent="0" marL="0">
+              <a:buNone/>
+            </a:pPr>
+            <a:r>
+              <a:rPr lang="en-US" sz="1250" dirty="0">
+                <a:solidFill>
+                  <a:srgbClr val="22284B"/>
+                </a:solidFill>
+                <a:latin typeface="Calibri" pitchFamily="34" charset="0"/>
+                <a:ea typeface="Calibri" pitchFamily="34" charset="-122"/>
+                <a:cs typeface="Calibri" pitchFamily="34" charset="-120"/>
+              </a:rPr>
+              <a:t>Root + upsell + out-of-scope agents</a:t>
+            </a:r>
+            <a:endParaRPr lang="en-US" sz="1250" dirty="0"/>
+          </a:p>
+        </p:txBody>
+      </p:sp>
+      <p:sp>
+        <p:nvSpPr>
+          <p:cNvPr id="20" name="Shape 18"/>
+          <p:cNvSpPr/>
+          <p:nvPr/>
+        </p:nvSpPr>
+        <p:spPr>
+          <a:xfrm>
+            <a:off x="640080" y="4526280"/>
+            <a:ext cx="10908792" cy="914400"/>
+          </a:xfrm>
+          <a:prstGeom prst="roundRect">
+            <a:avLst>
+              <a:gd name="adj" fmla="val 9000"/>
+            </a:avLst>
+          </a:prstGeom>
+          <a:solidFill>
+            <a:srgbClr val="EAF7F3"/>
+          </a:solidFill>
+          <a:ln/>
+          <a:effectLst>
+            <a:outerShdw sx="100000" sy="100000" kx="0" ky="0" algn="bl" rotWithShape="0" blurRad="88900" dist="38100" dir="5400000">
+              <a:srgbClr val="000000">
+                <a:alpha val="13000"/>
+              </a:srgbClr>
+            </a:outerShdw>
+          </a:effectLst>
+        </p:spPr>
+      </p:sp>
+      <p:sp>
+        <p:nvSpPr>
+          <p:cNvPr id="21" name="Text 19"/>
+          <p:cNvSpPr/>
+          <p:nvPr/>
+        </p:nvSpPr>
+        <p:spPr>
+          <a:xfrm>
+            <a:off x="914400" y="4526280"/>
+            <a:ext cx="10972800" cy="914400"/>
+          </a:xfrm>
+          <a:prstGeom prst="rect">
+            <a:avLst/>
+          </a:prstGeom>
+          <a:noFill/>
+          <a:ln/>
+        </p:spPr>
+        <p:txBody>
+          <a:bodyPr wrap="square" lIns="0" tIns="0" rIns="0" bIns="0" rtlCol="0" anchor="ctr"/>
+          <a:lstStyle/>
+          <a:p>
+            <a:pPr indent="0" marL="0">
+              <a:buNone/>
+            </a:pPr>
+            <a:r>
+              <a:rPr lang="en-US" sz="1500" b="1" dirty="0">
+                <a:solidFill>
+                  <a:srgbClr val="00A896"/>
+                </a:solidFill>
+                <a:latin typeface="Calibri" pitchFamily="34" charset="0"/>
+                <a:ea typeface="Calibri" pitchFamily="34" charset="-122"/>
+                <a:cs typeface="Calibri" pitchFamily="34" charset="-120"/>
+              </a:rPr>
+              <a:t>The wow moment:  </a:t>
+            </a:r>
+            <a:pPr indent="0" marL="0">
+              <a:buNone/>
             </a:pPr>
             <a:r>
               <a:rPr lang="en-US" sz="1400" dirty="0">
                 <a:solidFill>
-                  <a:srgbClr val="CADCFC"/>
-                </a:solidFill>
-                <a:latin typeface="Calibri" pitchFamily="34" charset="0"/>
-                <a:ea typeface="Calibri" pitchFamily="34" charset="-122"/>
-                <a:cs typeface="Calibri" pitchFamily="34" charset="-120"/>
-              </a:rPr>
-              <a:t>pull/push directory tree (YAML)</a:t>
-            </a:r>
-            <a:endParaRPr lang="en-US" sz="1400" dirty="0"/>
-          </a:p>
-          <a:p>
-            <a:pPr marL="342900" indent="-342900">
-              <a:spcAft>
-                <a:spcPts val="600"/>
-              </a:spcAft>
-              <a:buSzPct val="100000"/>
-              <a:buChar char="•"/>
-            </a:pPr>
-            <a:r>
-              <a:rPr lang="en-US" sz="1400" dirty="0">
-                <a:solidFill>
-                  <a:srgbClr val="CADCFC"/>
-                </a:solidFill>
-                <a:latin typeface="Calibri" pitchFamily="34" charset="0"/>
-                <a:ea typeface="Calibri" pitchFamily="34" charset="-122"/>
-                <a:cs typeface="Calibri" pitchFamily="34" charset="-120"/>
-              </a:rPr>
-              <a:t>Python: Apps / Agents / Tools / Guardrails</a:t>
-            </a:r>
-            <a:endParaRPr lang="en-US" sz="1400" dirty="0"/>
-          </a:p>
-          <a:p>
-            <a:pPr marL="342900" indent="-342900">
-              <a:spcAft>
-                <a:spcPts val="600"/>
-              </a:spcAft>
-              <a:buSzPct val="100000"/>
-              <a:buChar char="•"/>
-            </a:pPr>
-            <a:r>
-              <a:rPr lang="en-US" sz="1400" dirty="0">
-                <a:solidFill>
-                  <a:srgbClr val="CADCFC"/>
-                </a:solidFill>
-                <a:latin typeface="Calibri" pitchFamily="34" charset="0"/>
-                <a:ea typeface="Calibri" pitchFamily="34" charset="-122"/>
-                <a:cs typeface="Calibri" pitchFamily="34" charset="-120"/>
-              </a:rPr>
-              <a:t>cxas push  ·  cxas lint  (60+ rules)</a:t>
-            </a:r>
-            <a:endParaRPr lang="en-US" sz="1400" dirty="0"/>
-          </a:p>
-          <a:p>
-            <a:pPr marL="342900" indent="-342900">
-              <a:spcAft>
-                <a:spcPts val="600"/>
-              </a:spcAft>
-              <a:buSzPct val="100000"/>
-              <a:buChar char="•"/>
-            </a:pPr>
-            <a:r>
-              <a:rPr lang="en-US" sz="1400" dirty="0">
-                <a:solidFill>
-                  <a:srgbClr val="CADCFC"/>
-                </a:solidFill>
-                <a:latin typeface="Calibri" pitchFamily="34" charset="0"/>
-                <a:ea typeface="Calibri" pitchFamily="34" charset="-122"/>
-                <a:cs typeface="Calibri" pitchFamily="34" charset="-120"/>
-              </a:rPr>
-              <a:t>Every resource cites its requirement</a:t>
-            </a:r>
-            <a:endParaRPr lang="en-US" sz="1400" dirty="0"/>
-          </a:p>
-        </p:txBody>
-      </p:sp>
-      <p:sp>
-        <p:nvSpPr>
-          <p:cNvPr id="12" name="Text 10"/>
-          <p:cNvSpPr/>
-          <p:nvPr/>
-        </p:nvSpPr>
-        <p:spPr>
-          <a:xfrm>
-            <a:off x="640080" y="5532120"/>
-            <a:ext cx="10908792" cy="365760"/>
-          </a:xfrm>
-          <a:prstGeom prst="rect">
-            <a:avLst/>
-          </a:prstGeom>
-          <a:noFill/>
-          <a:ln/>
-        </p:spPr>
-        <p:txBody>
-          <a:bodyPr wrap="square" lIns="0" tIns="0" rIns="0" bIns="0" rtlCol="0" anchor="ctr"/>
-          <a:lstStyle/>
-          <a:p>
-            <a:pPr algn="ctr" indent="0" marL="0">
-              <a:buNone/>
-            </a:pPr>
-            <a:r>
-              <a:rPr lang="en-US" sz="1400" i="1" dirty="0">
-                <a:solidFill>
-                  <a:srgbClr val="5B6785"/>
-                </a:solidFill>
-                <a:latin typeface="Calibri" pitchFamily="34" charset="0"/>
-                <a:ea typeface="Calibri" pitchFamily="34" charset="-122"/>
-                <a:cs typeface="Calibri" pitchFamily="34" charset="-120"/>
-              </a:rPr>
-              <a:t>UI-built and CI/CD-built teams stay in sync from the same design.</a:t>
-            </a:r>
-            <a:endParaRPr lang="en-US" sz="1400" dirty="0"/>
-          </a:p>
-        </p:txBody>
-      </p:sp>
-      <p:sp>
-        <p:nvSpPr>
-          <p:cNvPr id="13" name="Text 11"/>
+                  <a:srgbClr val="22284B"/>
+                </a:solidFill>
+                <a:latin typeface="Calibri" pitchFamily="34" charset="0"/>
+                <a:ea typeface="Calibri" pitchFamily="34" charset="-122"/>
+                <a:cs typeface="Calibri" pitchFamily="34" charset="-120"/>
+              </a:rPr>
+              <a:t>at stage 2 it stops and asks — it interviews before it builds. Stop the live run right here.</a:t>
+            </a:r>
+            <a:endParaRPr lang="en-US" sz="1500" dirty="0"/>
+          </a:p>
+        </p:txBody>
+      </p:sp>
+      <p:sp>
+        <p:nvSpPr>
+          <p:cNvPr id="22" name="Text 20"/>
           <p:cNvSpPr/>
           <p:nvPr/>
         </p:nvSpPr>
@@ -7628,7 +9158,7 @@
       </p:sp>
       <p:sp>
         <p:nvSpPr>
-          <p:cNvPr id="14" name="Text 12"/>
+          <p:cNvPr id="23" name="Text 21"/>
           <p:cNvSpPr/>
           <p:nvPr/>
         </p:nvSpPr>
@@ -7730,7 +9260,7 @@
                 <a:ea typeface="Calibri" pitchFamily="34" charset="-122"/>
                 <a:cs typeface="Calibri" pitchFamily="34" charset="-120"/>
               </a:rPr>
-              <a:t>TEST DISCIPLINE</a:t>
+              <a:t>THE MONEY SLIDE</a:t>
             </a:r>
             <a:endParaRPr lang="en-US" sz="1200" dirty="0"/>
           </a:p>
@@ -7769,7 +9299,7 @@
                 <a:ea typeface="Cambria" pitchFamily="34" charset="-122"/>
                 <a:cs typeface="Cambria" pitchFamily="34" charset="-120"/>
               </a:rPr>
-              <a:t>All 5 cxas eval types — 100% requirement coverage</a:t>
+              <a:t>Same resources, emitted twice — one source of truth</a:t>
             </a:r>
             <a:endParaRPr lang="en-US" sz="3000" dirty="0"/>
           </a:p>
@@ -7784,11 +9314,11 @@
         <p:spPr>
           <a:xfrm>
             <a:off x="640080" y="1874520"/>
-            <a:ext cx="6766560" cy="603504"/>
+            <a:ext cx="5349240" cy="3566160"/>
           </a:xfrm>
           <a:prstGeom prst="roundRect">
             <a:avLst>
-              <a:gd name="adj" fmla="val 13636"/>
+              <a:gd name="adj" fmla="val 2308"/>
             </a:avLst>
           </a:prstGeom>
           <a:solidFill>
@@ -7812,24 +9342,24 @@
         </p:nvSpPr>
         <p:spPr>
           <a:xfrm>
-            <a:off x="914400" y="1874520"/>
-            <a:ext cx="2651760" cy="603504"/>
-          </a:xfrm>
-          <a:prstGeom prst="rect">
-            <a:avLst/>
-          </a:prstGeom>
-          <a:noFill/>
-          <a:ln/>
-        </p:spPr>
-        <p:txBody>
-          <a:bodyPr wrap="square" lIns="0" tIns="0" rIns="0" bIns="0" rtlCol="0" anchor="ctr"/>
-          <a:lstStyle/>
-          <a:p>
-            <a:pPr indent="0" marL="0">
-              <a:buNone/>
-            </a:pPr>
-            <a:r>
-              <a:rPr lang="en-US" sz="1400" b="1" dirty="0">
+            <a:off x="960120" y="2103120"/>
+            <a:ext cx="4754880" cy="457200"/>
+          </a:xfrm>
+          <a:prstGeom prst="rect">
+            <a:avLst/>
+          </a:prstGeom>
+          <a:noFill/>
+          <a:ln/>
+        </p:spPr>
+        <p:txBody>
+          <a:bodyPr wrap="square" lIns="0" tIns="0" rIns="0" bIns="0" rtlCol="0" anchor="ctr"/>
+          <a:lstStyle/>
+          <a:p>
+            <a:pPr indent="0" marL="0">
+              <a:buNone/>
+            </a:pPr>
+            <a:r>
+              <a:rPr lang="en-US" sz="1900" b="1" dirty="0">
                 <a:solidFill>
                   <a:srgbClr val="1E2761"/>
                 </a:solidFill>
@@ -7837,38 +9367,102 @@
                 <a:ea typeface="Cambria" pitchFamily="34" charset="-122"/>
                 <a:cs typeface="Cambria" pitchFamily="34" charset="-120"/>
               </a:rPr>
-              <a:t>Platform Goldens</a:t>
+              <a:t>Console runbook</a:t>
+            </a:r>
+            <a:endParaRPr lang="en-US" sz="1900" dirty="0"/>
+          </a:p>
+        </p:txBody>
+      </p:sp>
+      <p:sp>
+        <p:nvSpPr>
+          <p:cNvPr id="6" name="Text 4"/>
+          <p:cNvSpPr/>
+          <p:nvPr/>
+        </p:nvSpPr>
+        <p:spPr>
+          <a:xfrm>
+            <a:off x="960120" y="2542032"/>
+            <a:ext cx="4754880" cy="320040"/>
+          </a:xfrm>
+          <a:prstGeom prst="rect">
+            <a:avLst/>
+          </a:prstGeom>
+          <a:noFill/>
+          <a:ln/>
+        </p:spPr>
+        <p:txBody>
+          <a:bodyPr wrap="square" lIns="0" tIns="0" rIns="0" bIns="0" rtlCol="0" anchor="ctr"/>
+          <a:lstStyle/>
+          <a:p>
+            <a:pPr indent="0" marL="0">
+              <a:buNone/>
+            </a:pPr>
+            <a:r>
+              <a:rPr lang="en-US" sz="1200" i="1" dirty="0">
+                <a:solidFill>
+                  <a:srgbClr val="5B6785"/>
+                </a:solidFill>
+                <a:latin typeface="Calibri" pitchFamily="34" charset="0"/>
+                <a:ea typeface="Calibri" pitchFamily="34" charset="-122"/>
+                <a:cs typeface="Calibri" pitchFamily="34" charset="-120"/>
+              </a:rPr>
+              <a:t>For teams building in the UI</a:t>
+            </a:r>
+            <a:endParaRPr lang="en-US" sz="1200" dirty="0"/>
+          </a:p>
+        </p:txBody>
+      </p:sp>
+      <p:sp>
+        <p:nvSpPr>
+          <p:cNvPr id="7" name="Text 5"/>
+          <p:cNvSpPr/>
+          <p:nvPr/>
+        </p:nvSpPr>
+        <p:spPr>
+          <a:xfrm>
+            <a:off x="960120" y="2971800"/>
+            <a:ext cx="4754880" cy="2286000"/>
+          </a:xfrm>
+          <a:prstGeom prst="rect">
+            <a:avLst/>
+          </a:prstGeom>
+          <a:noFill/>
+          <a:ln/>
+        </p:spPr>
+        <p:txBody>
+          <a:bodyPr wrap="square" lIns="0" tIns="0" rIns="0" bIns="0" rtlCol="0" anchor="ctr"/>
+          <a:lstStyle/>
+          <a:p>
+            <a:pPr marL="342900" indent="-342900">
+              <a:spcAft>
+                <a:spcPts val="600"/>
+              </a:spcAft>
+              <a:buSzPct val="100000"/>
+              <a:buChar char="•"/>
+            </a:pPr>
+            <a:r>
+              <a:rPr lang="en-US" sz="1400" dirty="0">
+                <a:solidFill>
+                  <a:srgbClr val="22284B"/>
+                </a:solidFill>
+                <a:latin typeface="Calibri" pitchFamily="34" charset="0"/>
+                <a:ea typeface="Calibri" pitchFamily="34" charset="-122"/>
+                <a:cs typeface="Calibri" pitchFamily="34" charset="-120"/>
+              </a:rPr>
+              <a:t>Numbered CX Agent Studio steps</a:t>
             </a:r>
             <a:endParaRPr lang="en-US" sz="1400" dirty="0"/>
           </a:p>
-        </p:txBody>
-      </p:sp>
-      <p:sp>
-        <p:nvSpPr>
-          <p:cNvPr id="6" name="Text 4"/>
-          <p:cNvSpPr/>
-          <p:nvPr/>
-        </p:nvSpPr>
-        <p:spPr>
-          <a:xfrm>
-            <a:off x="3611880" y="1874520"/>
-            <a:ext cx="3657600" cy="603504"/>
-          </a:xfrm>
-          <a:prstGeom prst="rect">
-            <a:avLst/>
-          </a:prstGeom>
-          <a:noFill/>
-          <a:ln/>
-        </p:spPr>
-        <p:txBody>
-          <a:bodyPr wrap="square" lIns="0" tIns="0" rIns="0" bIns="0" rtlCol="0" anchor="ctr"/>
-          <a:lstStyle/>
-          <a:p>
-            <a:pPr indent="0" marL="0">
-              <a:buNone/>
-            </a:pPr>
-            <a:r>
-              <a:rPr lang="en-US" sz="1250" dirty="0">
+          <a:p>
+            <a:pPr marL="342900" indent="-342900">
+              <a:spcAft>
+                <a:spcPts val="600"/>
+              </a:spcAft>
+              <a:buSzPct val="100000"/>
+              <a:buChar char="•"/>
+            </a:pPr>
+            <a:r>
+              <a:rPr lang="en-US" sz="1400" dirty="0">
                 <a:solidFill>
                   <a:srgbClr val="22284B"/>
                 </a:solidFill>
@@ -7876,30 +9470,72 @@
                 <a:ea typeface="Calibri" pitchFamily="34" charset="-122"/>
                 <a:cs typeface="Calibri" pitchFamily="34" charset="-120"/>
               </a:rPr>
-              <a:t>Golden conversations, expected outcomes</a:t>
-            </a:r>
-            <a:endParaRPr lang="en-US" sz="1250" dirty="0"/>
-          </a:p>
-        </p:txBody>
-      </p:sp>
-      <p:sp>
-        <p:nvSpPr>
-          <p:cNvPr id="7" name="Shape 5"/>
-          <p:cNvSpPr/>
-          <p:nvPr/>
-        </p:nvSpPr>
-        <p:spPr>
-          <a:xfrm>
-            <a:off x="640080" y="2587752"/>
-            <a:ext cx="6766560" cy="603504"/>
+              <a:t>Create App → agents → tools → guardrails</a:t>
+            </a:r>
+            <a:endParaRPr lang="en-US" sz="1400" dirty="0"/>
+          </a:p>
+          <a:p>
+            <a:pPr marL="342900" indent="-342900">
+              <a:spcAft>
+                <a:spcPts val="600"/>
+              </a:spcAft>
+              <a:buSzPct val="100000"/>
+              <a:buChar char="•"/>
+            </a:pPr>
+            <a:r>
+              <a:rPr lang="en-US" sz="1400" dirty="0">
+                <a:solidFill>
+                  <a:srgbClr val="22284B"/>
+                </a:solidFill>
+                <a:latin typeface="Calibri" pitchFamily="34" charset="0"/>
+                <a:ea typeface="Calibri" pitchFamily="34" charset="-122"/>
+                <a:cs typeface="Calibri" pitchFamily="34" charset="-120"/>
+              </a:rPr>
+              <a:t>Attach fallbacks + human handoff</a:t>
+            </a:r>
+            <a:endParaRPr lang="en-US" sz="1400" dirty="0"/>
+          </a:p>
+          <a:p>
+            <a:pPr marL="342900" indent="-342900">
+              <a:spcAft>
+                <a:spcPts val="600"/>
+              </a:spcAft>
+              <a:buSzPct val="100000"/>
+              <a:buChar char="•"/>
+            </a:pPr>
+            <a:r>
+              <a:rPr lang="en-US" sz="1400" dirty="0">
+                <a:solidFill>
+                  <a:srgbClr val="22284B"/>
+                </a:solidFill>
+                <a:latin typeface="Calibri" pitchFamily="34" charset="0"/>
+                <a:ea typeface="Calibri" pitchFamily="34" charset="-122"/>
+                <a:cs typeface="Calibri" pitchFamily="34" charset="-120"/>
+              </a:rPr>
+              <a:t>Marks where a human supplies secrets</a:t>
+            </a:r>
+            <a:endParaRPr lang="en-US" sz="1400" dirty="0"/>
+          </a:p>
+        </p:txBody>
+      </p:sp>
+      <p:sp>
+        <p:nvSpPr>
+          <p:cNvPr id="8" name="Shape 6"/>
+          <p:cNvSpPr/>
+          <p:nvPr/>
+        </p:nvSpPr>
+        <p:spPr>
+          <a:xfrm>
+            <a:off x="6355080" y="1874520"/>
+            <a:ext cx="5349240" cy="3566160"/>
           </a:xfrm>
           <a:prstGeom prst="roundRect">
             <a:avLst>
-              <a:gd name="adj" fmla="val 13636"/>
+              <a:gd name="adj" fmla="val 2308"/>
             </a:avLst>
           </a:prstGeom>
           <a:solidFill>
-            <a:srgbClr val="EAF7F3"/>
+            <a:srgbClr val="1E2761"/>
           </a:solidFill>
           <a:ln/>
           <a:effectLst>
@@ -7913,148 +9549,186 @@
       </p:sp>
       <p:sp>
         <p:nvSpPr>
-          <p:cNvPr id="8" name="Text 6"/>
-          <p:cNvSpPr/>
-          <p:nvPr/>
-        </p:nvSpPr>
-        <p:spPr>
-          <a:xfrm>
-            <a:off x="914400" y="2587752"/>
-            <a:ext cx="2651760" cy="603504"/>
-          </a:xfrm>
-          <a:prstGeom prst="rect">
-            <a:avLst/>
-          </a:prstGeom>
-          <a:noFill/>
-          <a:ln/>
-        </p:spPr>
-        <p:txBody>
-          <a:bodyPr wrap="square" lIns="0" tIns="0" rIns="0" bIns="0" rtlCol="0" anchor="ctr"/>
-          <a:lstStyle/>
-          <a:p>
-            <a:pPr indent="0" marL="0">
-              <a:buNone/>
-            </a:pPr>
-            <a:r>
-              <a:rPr lang="en-US" sz="1400" b="1" dirty="0">
-                <a:solidFill>
-                  <a:srgbClr val="1E2761"/>
+          <p:cNvPr id="9" name="Text 7"/>
+          <p:cNvSpPr/>
+          <p:nvPr/>
+        </p:nvSpPr>
+        <p:spPr>
+          <a:xfrm>
+            <a:off x="6675120" y="2103120"/>
+            <a:ext cx="4754880" cy="457200"/>
+          </a:xfrm>
+          <a:prstGeom prst="rect">
+            <a:avLst/>
+          </a:prstGeom>
+          <a:noFill/>
+          <a:ln/>
+        </p:spPr>
+        <p:txBody>
+          <a:bodyPr wrap="square" lIns="0" tIns="0" rIns="0" bIns="0" rtlCol="0" anchor="ctr"/>
+          <a:lstStyle/>
+          <a:p>
+            <a:pPr indent="0" marL="0">
+              <a:buNone/>
+            </a:pPr>
+            <a:r>
+              <a:rPr lang="en-US" sz="1900" b="1" dirty="0">
+                <a:solidFill>
+                  <a:srgbClr val="FFFFFF"/>
                 </a:solidFill>
                 <a:latin typeface="Cambria" pitchFamily="34" charset="0"/>
                 <a:ea typeface="Cambria" pitchFamily="34" charset="-122"/>
                 <a:cs typeface="Cambria" pitchFamily="34" charset="-120"/>
               </a:rPr>
-              <a:t>Local Simulations</a:t>
+              <a:t>cxas-scrapi config-as-code</a:t>
+            </a:r>
+            <a:endParaRPr lang="en-US" sz="1900" dirty="0"/>
+          </a:p>
+        </p:txBody>
+      </p:sp>
+      <p:sp>
+        <p:nvSpPr>
+          <p:cNvPr id="10" name="Text 8"/>
+          <p:cNvSpPr/>
+          <p:nvPr/>
+        </p:nvSpPr>
+        <p:spPr>
+          <a:xfrm>
+            <a:off x="6675120" y="2542032"/>
+            <a:ext cx="4754880" cy="320040"/>
+          </a:xfrm>
+          <a:prstGeom prst="rect">
+            <a:avLst/>
+          </a:prstGeom>
+          <a:noFill/>
+          <a:ln/>
+        </p:spPr>
+        <p:txBody>
+          <a:bodyPr wrap="square" lIns="0" tIns="0" rIns="0" bIns="0" rtlCol="0" anchor="ctr"/>
+          <a:lstStyle/>
+          <a:p>
+            <a:pPr indent="0" marL="0">
+              <a:buNone/>
+            </a:pPr>
+            <a:r>
+              <a:rPr lang="en-US" sz="1200" i="1" dirty="0">
+                <a:solidFill>
+                  <a:srgbClr val="CADCFC"/>
+                </a:solidFill>
+                <a:latin typeface="Calibri" pitchFamily="34" charset="0"/>
+                <a:ea typeface="Calibri" pitchFamily="34" charset="-122"/>
+                <a:cs typeface="Calibri" pitchFamily="34" charset="-120"/>
+              </a:rPr>
+              <a:t>For CI/CD and version control</a:t>
+            </a:r>
+            <a:endParaRPr lang="en-US" sz="1200" dirty="0"/>
+          </a:p>
+        </p:txBody>
+      </p:sp>
+      <p:sp>
+        <p:nvSpPr>
+          <p:cNvPr id="11" name="Text 9"/>
+          <p:cNvSpPr/>
+          <p:nvPr/>
+        </p:nvSpPr>
+        <p:spPr>
+          <a:xfrm>
+            <a:off x="6675120" y="2971800"/>
+            <a:ext cx="4754880" cy="2286000"/>
+          </a:xfrm>
+          <a:prstGeom prst="rect">
+            <a:avLst/>
+          </a:prstGeom>
+          <a:noFill/>
+          <a:ln/>
+        </p:spPr>
+        <p:txBody>
+          <a:bodyPr wrap="square" lIns="0" tIns="0" rIns="0" bIns="0" rtlCol="0" anchor="ctr"/>
+          <a:lstStyle/>
+          <a:p>
+            <a:pPr marL="342900" indent="-342900">
+              <a:spcAft>
+                <a:spcPts val="600"/>
+              </a:spcAft>
+              <a:buSzPct val="100000"/>
+              <a:buChar char="•"/>
+            </a:pPr>
+            <a:r>
+              <a:rPr lang="en-US" sz="1400" dirty="0">
+                <a:solidFill>
+                  <a:srgbClr val="CADCFC"/>
+                </a:solidFill>
+                <a:latin typeface="Calibri" pitchFamily="34" charset="0"/>
+                <a:ea typeface="Calibri" pitchFamily="34" charset="-122"/>
+                <a:cs typeface="Calibri" pitchFamily="34" charset="-120"/>
+              </a:rPr>
+              <a:t>pull/push directory tree (YAML)</a:t>
             </a:r>
             <a:endParaRPr lang="en-US" sz="1400" dirty="0"/>
           </a:p>
-        </p:txBody>
-      </p:sp>
-      <p:sp>
-        <p:nvSpPr>
-          <p:cNvPr id="9" name="Text 7"/>
-          <p:cNvSpPr/>
-          <p:nvPr/>
-        </p:nvSpPr>
-        <p:spPr>
-          <a:xfrm>
-            <a:off x="3611880" y="2587752"/>
-            <a:ext cx="3657600" cy="603504"/>
-          </a:xfrm>
-          <a:prstGeom prst="rect">
-            <a:avLst/>
-          </a:prstGeom>
-          <a:noFill/>
-          <a:ln/>
-        </p:spPr>
-        <p:txBody>
-          <a:bodyPr wrap="square" lIns="0" tIns="0" rIns="0" bIns="0" rtlCol="0" anchor="ctr"/>
-          <a:lstStyle/>
-          <a:p>
-            <a:pPr indent="0" marL="0">
-              <a:buNone/>
-            </a:pPr>
-            <a:r>
-              <a:rPr lang="en-US" sz="1250" dirty="0">
-                <a:solidFill>
-                  <a:srgbClr val="22284B"/>
-                </a:solidFill>
-                <a:latin typeface="Calibri" pitchFamily="34" charset="0"/>
-                <a:ea typeface="Calibri" pitchFamily="34" charset="-122"/>
-                <a:cs typeface="Calibri" pitchFamily="34" charset="-120"/>
-              </a:rPr>
-              <a:t>Multi-turn personas incl. adversarial</a:t>
-            </a:r>
-            <a:endParaRPr lang="en-US" sz="1250" dirty="0"/>
-          </a:p>
-        </p:txBody>
-      </p:sp>
-      <p:sp>
-        <p:nvSpPr>
-          <p:cNvPr id="10" name="Shape 8"/>
-          <p:cNvSpPr/>
-          <p:nvPr/>
-        </p:nvSpPr>
-        <p:spPr>
-          <a:xfrm>
-            <a:off x="640080" y="3300984"/>
-            <a:ext cx="6766560" cy="603504"/>
-          </a:xfrm>
-          <a:prstGeom prst="roundRect">
-            <a:avLst>
-              <a:gd name="adj" fmla="val 13636"/>
-            </a:avLst>
-          </a:prstGeom>
-          <a:solidFill>
-            <a:srgbClr val="F2F6FF"/>
-          </a:solidFill>
-          <a:ln/>
-          <a:effectLst>
-            <a:outerShdw sx="100000" sy="100000" kx="0" ky="0" algn="bl" rotWithShape="0" blurRad="88900" dist="38100" dir="5400000">
-              <a:srgbClr val="000000">
-                <a:alpha val="13000"/>
-              </a:srgbClr>
-            </a:outerShdw>
-          </a:effectLst>
-        </p:spPr>
-      </p:sp>
-      <p:sp>
-        <p:nvSpPr>
-          <p:cNvPr id="11" name="Text 9"/>
-          <p:cNvSpPr/>
-          <p:nvPr/>
-        </p:nvSpPr>
-        <p:spPr>
-          <a:xfrm>
-            <a:off x="914400" y="3300984"/>
-            <a:ext cx="2651760" cy="603504"/>
-          </a:xfrm>
-          <a:prstGeom prst="rect">
-            <a:avLst/>
-          </a:prstGeom>
-          <a:noFill/>
-          <a:ln/>
-        </p:spPr>
-        <p:txBody>
-          <a:bodyPr wrap="square" lIns="0" tIns="0" rIns="0" bIns="0" rtlCol="0" anchor="ctr"/>
-          <a:lstStyle/>
-          <a:p>
-            <a:pPr indent="0" marL="0">
-              <a:buNone/>
-            </a:pPr>
-            <a:r>
-              <a:rPr lang="en-US" sz="1400" b="1" dirty="0">
-                <a:solidFill>
-                  <a:srgbClr val="1E2761"/>
-                </a:solidFill>
-                <a:latin typeface="Cambria" pitchFamily="34" charset="0"/>
-                <a:ea typeface="Cambria" pitchFamily="34" charset="-122"/>
-                <a:cs typeface="Cambria" pitchFamily="34" charset="-120"/>
-              </a:rPr>
-              <a:t>Tool Tests</a:t>
+          <a:p>
+            <a:pPr marL="342900" indent="-342900">
+              <a:spcAft>
+                <a:spcPts val="600"/>
+              </a:spcAft>
+              <a:buSzPct val="100000"/>
+              <a:buChar char="•"/>
+            </a:pPr>
+            <a:r>
+              <a:rPr lang="en-US" sz="1400" dirty="0">
+                <a:solidFill>
+                  <a:srgbClr val="CADCFC"/>
+                </a:solidFill>
+                <a:latin typeface="Calibri" pitchFamily="34" charset="0"/>
+                <a:ea typeface="Calibri" pitchFamily="34" charset="-122"/>
+                <a:cs typeface="Calibri" pitchFamily="34" charset="-120"/>
+              </a:rPr>
+              <a:t>Python: Apps / Agents / Tools / Guardrails</a:t>
             </a:r>
             <a:endParaRPr lang="en-US" sz="1400" dirty="0"/>
           </a:p>
+          <a:p>
+            <a:pPr marL="342900" indent="-342900">
+              <a:spcAft>
+                <a:spcPts val="600"/>
+              </a:spcAft>
+              <a:buSzPct val="100000"/>
+              <a:buChar char="•"/>
+            </a:pPr>
+            <a:r>
+              <a:rPr lang="en-US" sz="1400" dirty="0">
+                <a:solidFill>
+                  <a:srgbClr val="CADCFC"/>
+                </a:solidFill>
+                <a:latin typeface="Calibri" pitchFamily="34" charset="0"/>
+                <a:ea typeface="Calibri" pitchFamily="34" charset="-122"/>
+                <a:cs typeface="Calibri" pitchFamily="34" charset="-120"/>
+              </a:rPr>
+              <a:t>cxas push  ·  cxas lint  (60+ rules)</a:t>
+            </a:r>
+            <a:endParaRPr lang="en-US" sz="1400" dirty="0"/>
+          </a:p>
+          <a:p>
+            <a:pPr marL="342900" indent="-342900">
+              <a:spcAft>
+                <a:spcPts val="600"/>
+              </a:spcAft>
+              <a:buSzPct val="100000"/>
+              <a:buChar char="•"/>
+            </a:pPr>
+            <a:r>
+              <a:rPr lang="en-US" sz="1400" dirty="0">
+                <a:solidFill>
+                  <a:srgbClr val="CADCFC"/>
+                </a:solidFill>
+                <a:latin typeface="Calibri" pitchFamily="34" charset="0"/>
+                <a:ea typeface="Calibri" pitchFamily="34" charset="-122"/>
+                <a:cs typeface="Calibri" pitchFamily="34" charset="-120"/>
+              </a:rPr>
+              <a:t>Every resource cites its requirement</a:t>
+            </a:r>
+            <a:endParaRPr lang="en-US" sz="1400" dirty="0"/>
+          </a:p>
         </p:txBody>
       </p:sp>
       <p:sp>
@@ -8065,100 +9739,32 @@
         </p:nvSpPr>
         <p:spPr>
           <a:xfrm>
-            <a:off x="3611880" y="3300984"/>
-            <a:ext cx="3657600" cy="603504"/>
-          </a:xfrm>
-          <a:prstGeom prst="rect">
-            <a:avLst/>
-          </a:prstGeom>
-          <a:noFill/>
-          <a:ln/>
-        </p:spPr>
-        <p:txBody>
-          <a:bodyPr wrap="square" lIns="0" tIns="0" rIns="0" bIns="0" rtlCol="0" anchor="ctr"/>
-          <a:lstStyle/>
-          <a:p>
-            <a:pPr indent="0" marL="0">
-              <a:buNone/>
-            </a:pPr>
-            <a:r>
-              <a:rPr lang="en-US" sz="1250" dirty="0">
-                <a:solidFill>
-                  <a:srgbClr val="22284B"/>
-                </a:solidFill>
-                <a:latin typeface="Calibri" pitchFamily="34" charset="0"/>
-                <a:ea typeface="Calibri" pitchFamily="34" charset="-122"/>
-                <a:cs typeface="Calibri" pitchFamily="34" charset="-120"/>
-              </a:rPr>
-              <a:t>Per-tool I/O, including failure paths</a:t>
-            </a:r>
-            <a:endParaRPr lang="en-US" sz="1250" dirty="0"/>
-          </a:p>
-        </p:txBody>
-      </p:sp>
-      <p:sp>
-        <p:nvSpPr>
-          <p:cNvPr id="13" name="Shape 11"/>
-          <p:cNvSpPr/>
-          <p:nvPr/>
-        </p:nvSpPr>
-        <p:spPr>
-          <a:xfrm>
-            <a:off x="640080" y="4014216"/>
-            <a:ext cx="6766560" cy="603504"/>
-          </a:xfrm>
-          <a:prstGeom prst="roundRect">
-            <a:avLst>
-              <a:gd name="adj" fmla="val 13636"/>
-            </a:avLst>
-          </a:prstGeom>
-          <a:solidFill>
-            <a:srgbClr val="EAF7F3"/>
-          </a:solidFill>
-          <a:ln/>
-          <a:effectLst>
-            <a:outerShdw sx="100000" sy="100000" kx="0" ky="0" algn="bl" rotWithShape="0" blurRad="88900" dist="38100" dir="5400000">
-              <a:srgbClr val="000000">
-                <a:alpha val="13000"/>
-              </a:srgbClr>
-            </a:outerShdw>
-          </a:effectLst>
-        </p:spPr>
-      </p:sp>
-      <p:sp>
-        <p:nvSpPr>
-          <p:cNvPr id="14" name="Text 12"/>
-          <p:cNvSpPr/>
-          <p:nvPr/>
-        </p:nvSpPr>
-        <p:spPr>
-          <a:xfrm>
-            <a:off x="914400" y="4014216"/>
-            <a:ext cx="2651760" cy="603504"/>
-          </a:xfrm>
-          <a:prstGeom prst="rect">
-            <a:avLst/>
-          </a:prstGeom>
-          <a:noFill/>
-          <a:ln/>
-        </p:spPr>
-        <p:txBody>
-          <a:bodyPr wrap="square" lIns="0" tIns="0" rIns="0" bIns="0" rtlCol="0" anchor="ctr"/>
-          <a:lstStyle/>
-          <a:p>
-            <a:pPr indent="0" marL="0">
-              <a:buNone/>
-            </a:pPr>
-            <a:r>
-              <a:rPr lang="en-US" sz="1400" b="1" dirty="0">
-                <a:solidFill>
-                  <a:srgbClr val="1E2761"/>
-                </a:solidFill>
-                <a:latin typeface="Cambria" pitchFamily="34" charset="0"/>
-                <a:ea typeface="Cambria" pitchFamily="34" charset="-122"/>
-                <a:cs typeface="Cambria" pitchFamily="34" charset="-120"/>
-              </a:rPr>
-              <a:t>Callback Tests</a:t>
+            <a:off x="640080" y="5532120"/>
+            <a:ext cx="10908792" cy="365760"/>
+          </a:xfrm>
+          <a:prstGeom prst="rect">
+            <a:avLst/>
+          </a:prstGeom>
+          <a:noFill/>
+          <a:ln/>
+        </p:spPr>
+        <p:txBody>
+          <a:bodyPr wrap="square" lIns="0" tIns="0" rIns="0" bIns="0" rtlCol="0" anchor="ctr"/>
+          <a:lstStyle/>
+          <a:p>
+            <a:pPr algn="ctr" indent="0" marL="0">
+              <a:buNone/>
+            </a:pPr>
+            <a:r>
+              <a:rPr lang="en-US" sz="1400" i="1" dirty="0">
+                <a:solidFill>
+                  <a:srgbClr val="5B6785"/>
+                </a:solidFill>
+                <a:latin typeface="Calibri" pitchFamily="34" charset="0"/>
+                <a:ea typeface="Calibri" pitchFamily="34" charset="-122"/>
+                <a:cs typeface="Calibri" pitchFamily="34" charset="-120"/>
+              </a:rPr>
+              <a:t>UI-built and CI/CD-built teams stay in sync from the same design.</a:t>
             </a:r>
             <a:endParaRPr lang="en-US" sz="1400" dirty="0"/>
           </a:p>
@@ -8166,299 +9772,7 @@
       </p:sp>
       <p:sp>
         <p:nvSpPr>
-          <p:cNvPr id="15" name="Text 13"/>
-          <p:cNvSpPr/>
-          <p:nvPr/>
-        </p:nvSpPr>
-        <p:spPr>
-          <a:xfrm>
-            <a:off x="3611880" y="4014216"/>
-            <a:ext cx="3657600" cy="603504"/>
-          </a:xfrm>
-          <a:prstGeom prst="rect">
-            <a:avLst/>
-          </a:prstGeom>
-          <a:noFill/>
-          <a:ln/>
-        </p:spPr>
-        <p:txBody>
-          <a:bodyPr wrap="square" lIns="0" tIns="0" rIns="0" bIns="0" rtlCol="0" anchor="ctr"/>
-          <a:lstStyle/>
-          <a:p>
-            <a:pPr indent="0" marL="0">
-              <a:buNone/>
-            </a:pPr>
-            <a:r>
-              <a:rPr lang="en-US" sz="1250" dirty="0">
-                <a:solidFill>
-                  <a:srgbClr val="22284B"/>
-                </a:solidFill>
-                <a:latin typeface="Calibri" pitchFamily="34" charset="0"/>
-                <a:ea typeface="Calibri" pitchFamily="34" charset="-122"/>
-                <a:cs typeface="Calibri" pitchFamily="34" charset="-120"/>
-              </a:rPr>
-              <a:t>before/after model + after-tool logic</a:t>
-            </a:r>
-            <a:endParaRPr lang="en-US" sz="1250" dirty="0"/>
-          </a:p>
-        </p:txBody>
-      </p:sp>
-      <p:sp>
-        <p:nvSpPr>
-          <p:cNvPr id="16" name="Shape 14"/>
-          <p:cNvSpPr/>
-          <p:nvPr/>
-        </p:nvSpPr>
-        <p:spPr>
-          <a:xfrm>
-            <a:off x="640080" y="4727448"/>
-            <a:ext cx="6766560" cy="603504"/>
-          </a:xfrm>
-          <a:prstGeom prst="roundRect">
-            <a:avLst>
-              <a:gd name="adj" fmla="val 13636"/>
-            </a:avLst>
-          </a:prstGeom>
-          <a:solidFill>
-            <a:srgbClr val="F2F6FF"/>
-          </a:solidFill>
-          <a:ln/>
-          <a:effectLst>
-            <a:outerShdw sx="100000" sy="100000" kx="0" ky="0" algn="bl" rotWithShape="0" blurRad="88900" dist="38100" dir="5400000">
-              <a:srgbClr val="000000">
-                <a:alpha val="13000"/>
-              </a:srgbClr>
-            </a:outerShdw>
-          </a:effectLst>
-        </p:spPr>
-      </p:sp>
-      <p:sp>
-        <p:nvSpPr>
-          <p:cNvPr id="17" name="Text 15"/>
-          <p:cNvSpPr/>
-          <p:nvPr/>
-        </p:nvSpPr>
-        <p:spPr>
-          <a:xfrm>
-            <a:off x="914400" y="4727448"/>
-            <a:ext cx="2651760" cy="603504"/>
-          </a:xfrm>
-          <a:prstGeom prst="rect">
-            <a:avLst/>
-          </a:prstGeom>
-          <a:noFill/>
-          <a:ln/>
-        </p:spPr>
-        <p:txBody>
-          <a:bodyPr wrap="square" lIns="0" tIns="0" rIns="0" bIns="0" rtlCol="0" anchor="ctr"/>
-          <a:lstStyle/>
-          <a:p>
-            <a:pPr indent="0" marL="0">
-              <a:buNone/>
-            </a:pPr>
-            <a:r>
-              <a:rPr lang="en-US" sz="1400" b="1" dirty="0">
-                <a:solidFill>
-                  <a:srgbClr val="1E2761"/>
-                </a:solidFill>
-                <a:latin typeface="Cambria" pitchFamily="34" charset="0"/>
-                <a:ea typeface="Cambria" pitchFamily="34" charset="-122"/>
-                <a:cs typeface="Cambria" pitchFamily="34" charset="-120"/>
-              </a:rPr>
-              <a:t>Turn Evals</a:t>
-            </a:r>
-            <a:endParaRPr lang="en-US" sz="1400" dirty="0"/>
-          </a:p>
-        </p:txBody>
-      </p:sp>
-      <p:sp>
-        <p:nvSpPr>
-          <p:cNvPr id="18" name="Text 16"/>
-          <p:cNvSpPr/>
-          <p:nvPr/>
-        </p:nvSpPr>
-        <p:spPr>
-          <a:xfrm>
-            <a:off x="3611880" y="4727448"/>
-            <a:ext cx="3657600" cy="603504"/>
-          </a:xfrm>
-          <a:prstGeom prst="rect">
-            <a:avLst/>
-          </a:prstGeom>
-          <a:noFill/>
-          <a:ln/>
-        </p:spPr>
-        <p:txBody>
-          <a:bodyPr wrap="square" lIns="0" tIns="0" rIns="0" bIns="0" rtlCol="0" anchor="ctr"/>
-          <a:lstStyle/>
-          <a:p>
-            <a:pPr indent="0" marL="0">
-              <a:buNone/>
-            </a:pPr>
-            <a:r>
-              <a:rPr lang="en-US" sz="1250" dirty="0">
-                <a:solidFill>
-                  <a:srgbClr val="22284B"/>
-                </a:solidFill>
-                <a:latin typeface="Calibri" pitchFamily="34" charset="0"/>
-                <a:ea typeface="Calibri" pitchFamily="34" charset="-122"/>
-                <a:cs typeface="Calibri" pitchFamily="34" charset="-120"/>
-              </a:rPr>
-              <a:t>Right tool, grounded answer, no PII leak</a:t>
-            </a:r>
-            <a:endParaRPr lang="en-US" sz="1250" dirty="0"/>
-          </a:p>
-        </p:txBody>
-      </p:sp>
-      <p:sp>
-        <p:nvSpPr>
-          <p:cNvPr id="19" name="Shape 17"/>
-          <p:cNvSpPr/>
-          <p:nvPr/>
-        </p:nvSpPr>
-        <p:spPr>
-          <a:xfrm>
-            <a:off x="7955280" y="1874520"/>
-            <a:ext cx="3657600" cy="3520440"/>
-          </a:xfrm>
-          <a:prstGeom prst="roundRect">
-            <a:avLst>
-              <a:gd name="adj" fmla="val 2338"/>
-            </a:avLst>
-          </a:prstGeom>
-          <a:solidFill>
-            <a:srgbClr val="1E2761"/>
-          </a:solidFill>
-          <a:ln/>
-          <a:effectLst>
-            <a:outerShdw sx="100000" sy="100000" kx="0" ky="0" algn="bl" rotWithShape="0" blurRad="88900" dist="38100" dir="5400000">
-              <a:srgbClr val="000000">
-                <a:alpha val="13000"/>
-              </a:srgbClr>
-            </a:outerShdw>
-          </a:effectLst>
-        </p:spPr>
-      </p:sp>
-      <p:sp>
-        <p:nvSpPr>
-          <p:cNvPr id="20" name="Text 18"/>
-          <p:cNvSpPr/>
-          <p:nvPr/>
-        </p:nvSpPr>
-        <p:spPr>
-          <a:xfrm>
-            <a:off x="7955280" y="2286000"/>
-            <a:ext cx="3657600" cy="1097280"/>
-          </a:xfrm>
-          <a:prstGeom prst="rect">
-            <a:avLst/>
-          </a:prstGeom>
-          <a:noFill/>
-          <a:ln/>
-        </p:spPr>
-        <p:txBody>
-          <a:bodyPr wrap="square" lIns="0" tIns="0" rIns="0" bIns="0" rtlCol="0" anchor="ctr"/>
-          <a:lstStyle/>
-          <a:p>
-            <a:pPr algn="ctr" indent="0" marL="0">
-              <a:buNone/>
-            </a:pPr>
-            <a:r>
-              <a:rPr lang="en-US" sz="6400" b="1" dirty="0">
-                <a:solidFill>
-                  <a:srgbClr val="02C39A"/>
-                </a:solidFill>
-                <a:latin typeface="Cambria" pitchFamily="34" charset="0"/>
-                <a:ea typeface="Cambria" pitchFamily="34" charset="-122"/>
-                <a:cs typeface="Cambria" pitchFamily="34" charset="-120"/>
-              </a:rPr>
-              <a:t>100%</a:t>
-            </a:r>
-            <a:endParaRPr lang="en-US" sz="6400" dirty="0"/>
-          </a:p>
-        </p:txBody>
-      </p:sp>
-      <p:sp>
-        <p:nvSpPr>
-          <p:cNvPr id="21" name="Text 19"/>
-          <p:cNvSpPr/>
-          <p:nvPr/>
-        </p:nvSpPr>
-        <p:spPr>
-          <a:xfrm>
-            <a:off x="7955280" y="3429000"/>
-            <a:ext cx="3657600" cy="457200"/>
-          </a:xfrm>
-          <a:prstGeom prst="rect">
-            <a:avLst/>
-          </a:prstGeom>
-          <a:noFill/>
-          <a:ln/>
-        </p:spPr>
-        <p:txBody>
-          <a:bodyPr wrap="square" lIns="0" tIns="0" rIns="0" bIns="0" rtlCol="0" anchor="ctr"/>
-          <a:lstStyle/>
-          <a:p>
-            <a:pPr algn="ctr" indent="0" marL="0">
-              <a:buNone/>
-            </a:pPr>
-            <a:r>
-              <a:rPr lang="en-US" sz="1400" dirty="0">
-                <a:solidFill>
-                  <a:srgbClr val="CADCFC"/>
-                </a:solidFill>
-                <a:latin typeface="Calibri" pitchFamily="34" charset="0"/>
-                <a:ea typeface="Calibri" pitchFamily="34" charset="-122"/>
-                <a:cs typeface="Calibri" pitchFamily="34" charset="-120"/>
-              </a:rPr>
-              <a:t>requirement → eval coverage</a:t>
-            </a:r>
-            <a:endParaRPr lang="en-US" sz="1400" dirty="0"/>
-          </a:p>
-        </p:txBody>
-      </p:sp>
-      <p:sp>
-        <p:nvSpPr>
-          <p:cNvPr id="22" name="Text 20"/>
-          <p:cNvSpPr/>
-          <p:nvPr/>
-        </p:nvSpPr>
-        <p:spPr>
-          <a:xfrm>
-            <a:off x="8183880" y="3977640"/>
-            <a:ext cx="3200400" cy="1280160"/>
-          </a:xfrm>
-          <a:prstGeom prst="rect">
-            <a:avLst/>
-          </a:prstGeom>
-          <a:noFill/>
-          <a:ln/>
-        </p:spPr>
-        <p:txBody>
-          <a:bodyPr wrap="square" lIns="0" tIns="0" rIns="0" bIns="0" rtlCol="0" anchor="ctr"/>
-          <a:lstStyle/>
-          <a:p>
-            <a:pPr algn="ctr" indent="0" marL="0">
-              <a:buNone/>
-            </a:pPr>
-            <a:r>
-              <a:rPr lang="en-US" sz="1250" dirty="0">
-                <a:solidFill>
-                  <a:srgbClr val="FFFFFF"/>
-                </a:solidFill>
-                <a:latin typeface="Calibri" pitchFamily="34" charset="0"/>
-                <a:ea typeface="Calibri" pitchFamily="34" charset="-122"/>
-                <a:cs typeface="Calibri" pitchFamily="34" charset="-120"/>
-              </a:rPr>
-              <a:t>Thresholds tie to KPIs: tool-call accuracy ≥ 0.95, 0 PII/card leaks, latency ≤ budget.</a:t>
-            </a:r>
-            <a:endParaRPr lang="en-US" sz="1250" dirty="0"/>
-          </a:p>
-        </p:txBody>
-      </p:sp>
-      <p:sp>
-        <p:nvSpPr>
-          <p:cNvPr id="23" name="Text 21"/>
+          <p:cNvPr id="13" name="Text 11"/>
           <p:cNvSpPr/>
           <p:nvPr/>
         </p:nvSpPr>
@@ -8497,7 +9811,7 @@
       </p:sp>
       <p:sp>
         <p:nvSpPr>
-          <p:cNvPr id="24" name="Text 22"/>
+          <p:cNvPr id="14" name="Text 12"/>
           <p:cNvSpPr/>
           <p:nvPr/>
         </p:nvSpPr>
@@ -8599,7 +9913,7 @@
                 <a:ea typeface="Calibri" pitchFamily="34" charset="-122"/>
                 <a:cs typeface="Calibri" pitchFamily="34" charset="-120"/>
               </a:rPr>
-              <a:t>CLOSING THE LOOP</a:t>
+              <a:t>TEST DISCIPLINE</a:t>
             </a:r>
             <a:endParaRPr lang="en-US" sz="1200" dirty="0"/>
           </a:p>
@@ -8638,7 +9952,7 @@
                 <a:ea typeface="Cambria" pitchFamily="34" charset="-122"/>
                 <a:cs typeface="Cambria" pitchFamily="34" charset="-120"/>
               </a:rPr>
-              <a:t>Every bug becomes a permanent test</a:t>
+              <a:t>All 5 cxas eval types — 100% requirement coverage</a:t>
             </a:r>
             <a:endParaRPr lang="en-US" sz="3000" dirty="0"/>
           </a:p>
@@ -8646,116 +9960,18 @@
       </p:sp>
       <p:sp>
         <p:nvSpPr>
-          <p:cNvPr id="4" name="Text 2"/>
-          <p:cNvSpPr/>
-          <p:nvPr/>
-        </p:nvSpPr>
-        <p:spPr>
-          <a:xfrm>
-            <a:off x="640080" y="1508760"/>
-            <a:ext cx="10972800" cy="365760"/>
-          </a:xfrm>
-          <a:prstGeom prst="rect">
-            <a:avLst/>
-          </a:prstGeom>
-          <a:noFill/>
-          <a:ln/>
-        </p:spPr>
-        <p:txBody>
-          <a:bodyPr wrap="square" lIns="0" tIns="0" rIns="0" bIns="0" rtlCol="0" anchor="ctr"/>
-          <a:lstStyle/>
-          <a:p>
-            <a:pPr indent="0" marL="0">
-              <a:buNone/>
-            </a:pPr>
-            <a:r>
-              <a:rPr lang="en-US" sz="1600" b="1" dirty="0">
-                <a:solidFill>
-                  <a:srgbClr val="1E2761"/>
-                </a:solidFill>
-                <a:latin typeface="Cambria" pitchFamily="34" charset="0"/>
-                <a:ea typeface="Cambria" pitchFamily="34" charset="-122"/>
-                <a:cs typeface="Cambria" pitchFamily="34" charset="-120"/>
-              </a:rPr>
-              <a:t>BUG-01  ·  the agent upsold during checkout (Turn Eval TE-02 failed)</a:t>
-            </a:r>
-            <a:endParaRPr lang="en-US" sz="1600" dirty="0"/>
-          </a:p>
-        </p:txBody>
-      </p:sp>
-      <p:sp>
-        <p:nvSpPr>
-          <p:cNvPr id="5" name="Shape 3"/>
-          <p:cNvSpPr/>
-          <p:nvPr/>
-        </p:nvSpPr>
-        <p:spPr>
-          <a:xfrm>
-            <a:off x="640080" y="2011680"/>
-            <a:ext cx="548640" cy="548640"/>
-          </a:xfrm>
-          <a:prstGeom prst="ellipse">
-            <a:avLst/>
-          </a:prstGeom>
-          <a:solidFill>
-            <a:srgbClr val="1E2761"/>
-          </a:solidFill>
-          <a:ln/>
-        </p:spPr>
-      </p:sp>
-      <p:sp>
-        <p:nvSpPr>
-          <p:cNvPr id="6" name="Text 4"/>
-          <p:cNvSpPr/>
-          <p:nvPr/>
-        </p:nvSpPr>
-        <p:spPr>
-          <a:xfrm>
-            <a:off x="640080" y="2011680"/>
-            <a:ext cx="548640" cy="548640"/>
-          </a:xfrm>
-          <a:prstGeom prst="rect">
-            <a:avLst/>
-          </a:prstGeom>
-          <a:noFill/>
-          <a:ln/>
-        </p:spPr>
-        <p:txBody>
-          <a:bodyPr wrap="square" lIns="0" tIns="0" rIns="0" bIns="0" rtlCol="0" anchor="ctr"/>
-          <a:lstStyle/>
-          <a:p>
-            <a:pPr algn="ctr" indent="0" marL="0">
-              <a:buNone/>
-            </a:pPr>
-            <a:r>
-              <a:rPr lang="en-US" sz="1300" b="1" dirty="0">
-                <a:solidFill>
-                  <a:srgbClr val="FFFFFF"/>
-                </a:solidFill>
-                <a:latin typeface="Cambria" pitchFamily="34" charset="0"/>
-                <a:ea typeface="Cambria" pitchFamily="34" charset="-122"/>
-                <a:cs typeface="Cambria" pitchFamily="34" charset="-120"/>
-              </a:rPr>
-              <a:t>1</a:t>
-            </a:r>
-            <a:endParaRPr lang="en-US" sz="1300" dirty="0"/>
-          </a:p>
-        </p:txBody>
-      </p:sp>
-      <p:sp>
-        <p:nvSpPr>
-          <p:cNvPr id="7" name="Shape 5"/>
-          <p:cNvSpPr/>
-          <p:nvPr/>
-        </p:nvSpPr>
-        <p:spPr>
-          <a:xfrm>
-            <a:off x="1417320" y="1975104"/>
-            <a:ext cx="10058400" cy="658368"/>
+          <p:cNvPr id="4" name="Shape 2"/>
+          <p:cNvSpPr/>
+          <p:nvPr/>
+        </p:nvSpPr>
+        <p:spPr>
+          <a:xfrm>
+            <a:off x="640080" y="1874520"/>
+            <a:ext cx="6766560" cy="603504"/>
           </a:xfrm>
           <a:prstGeom prst="roundRect">
             <a:avLst>
-              <a:gd name="adj" fmla="val 12500"/>
+              <a:gd name="adj" fmla="val 13636"/>
             </a:avLst>
           </a:prstGeom>
           <a:solidFill>
@@ -8773,14 +9989,14 @@
       </p:sp>
       <p:sp>
         <p:nvSpPr>
-          <p:cNvPr id="8" name="Text 6"/>
-          <p:cNvSpPr/>
-          <p:nvPr/>
-        </p:nvSpPr>
-        <p:spPr>
-          <a:xfrm>
-            <a:off x="1645920" y="1975104"/>
-            <a:ext cx="2286000" cy="658368"/>
+          <p:cNvPr id="5" name="Text 3"/>
+          <p:cNvSpPr/>
+          <p:nvPr/>
+        </p:nvSpPr>
+        <p:spPr>
+          <a:xfrm>
+            <a:off x="914400" y="1874520"/>
+            <a:ext cx="2651760" cy="603504"/>
           </a:xfrm>
           <a:prstGeom prst="rect">
             <a:avLst/>
@@ -8804,7 +10020,7 @@
                 <a:ea typeface="Cambria" pitchFamily="34" charset="-122"/>
                 <a:cs typeface="Cambria" pitchFamily="34" charset="-120"/>
               </a:rPr>
-              <a:t>Reproduce</a:t>
+              <a:t>Platform Goldens</a:t>
             </a:r>
             <a:endParaRPr lang="en-US" sz="1400" dirty="0"/>
           </a:p>
@@ -8812,14 +10028,14 @@
       </p:sp>
       <p:sp>
         <p:nvSpPr>
-          <p:cNvPr id="9" name="Text 7"/>
-          <p:cNvSpPr/>
-          <p:nvPr/>
-        </p:nvSpPr>
-        <p:spPr>
-          <a:xfrm>
-            <a:off x="3840480" y="1975104"/>
-            <a:ext cx="7498080" cy="658368"/>
+          <p:cNvPr id="6" name="Text 4"/>
+          <p:cNvSpPr/>
+          <p:nvPr/>
+        </p:nvSpPr>
+        <p:spPr>
+          <a:xfrm>
+            <a:off x="3611880" y="1874520"/>
+            <a:ext cx="3657600" cy="603504"/>
           </a:xfrm>
           <a:prstGeom prst="rect">
             <a:avLst/>
@@ -8843,7 +10059,7 @@
                 <a:ea typeface="Calibri" pitchFamily="34" charset="-122"/>
                 <a:cs typeface="Calibri" pitchFamily="34" charset="-120"/>
               </a:rPr>
-              <a:t>Checkout turn → “Would you like potting soil too?”</a:t>
+              <a:t>Golden conversations, expected outcomes</a:t>
             </a:r>
             <a:endParaRPr lang="en-US" sz="1250" dirty="0"/>
           </a:p>
@@ -8851,77 +10067,18 @@
       </p:sp>
       <p:sp>
         <p:nvSpPr>
-          <p:cNvPr id="10" name="Shape 8"/>
-          <p:cNvSpPr/>
-          <p:nvPr/>
-        </p:nvSpPr>
-        <p:spPr>
-          <a:xfrm>
-            <a:off x="640080" y="2852928"/>
-            <a:ext cx="548640" cy="548640"/>
-          </a:xfrm>
-          <a:prstGeom prst="ellipse">
-            <a:avLst/>
-          </a:prstGeom>
-          <a:solidFill>
-            <a:srgbClr val="1E2761"/>
-          </a:solidFill>
-          <a:ln/>
-        </p:spPr>
-      </p:sp>
-      <p:sp>
-        <p:nvSpPr>
-          <p:cNvPr id="11" name="Text 9"/>
-          <p:cNvSpPr/>
-          <p:nvPr/>
-        </p:nvSpPr>
-        <p:spPr>
-          <a:xfrm>
-            <a:off x="640080" y="2852928"/>
-            <a:ext cx="548640" cy="548640"/>
-          </a:xfrm>
-          <a:prstGeom prst="rect">
-            <a:avLst/>
-          </a:prstGeom>
-          <a:noFill/>
-          <a:ln/>
-        </p:spPr>
-        <p:txBody>
-          <a:bodyPr wrap="square" lIns="0" tIns="0" rIns="0" bIns="0" rtlCol="0" anchor="ctr"/>
-          <a:lstStyle/>
-          <a:p>
-            <a:pPr algn="ctr" indent="0" marL="0">
-              <a:buNone/>
-            </a:pPr>
-            <a:r>
-              <a:rPr lang="en-US" sz="1300" b="1" dirty="0">
-                <a:solidFill>
-                  <a:srgbClr val="FFFFFF"/>
-                </a:solidFill>
-                <a:latin typeface="Cambria" pitchFamily="34" charset="0"/>
-                <a:ea typeface="Cambria" pitchFamily="34" charset="-122"/>
-                <a:cs typeface="Cambria" pitchFamily="34" charset="-120"/>
-              </a:rPr>
-              <a:t>2</a:t>
-            </a:r>
-            <a:endParaRPr lang="en-US" sz="1300" dirty="0"/>
-          </a:p>
-        </p:txBody>
-      </p:sp>
-      <p:sp>
-        <p:nvSpPr>
-          <p:cNvPr id="12" name="Shape 10"/>
-          <p:cNvSpPr/>
-          <p:nvPr/>
-        </p:nvSpPr>
-        <p:spPr>
-          <a:xfrm>
-            <a:off x="1417320" y="2816352"/>
-            <a:ext cx="10058400" cy="658368"/>
+          <p:cNvPr id="7" name="Shape 5"/>
+          <p:cNvSpPr/>
+          <p:nvPr/>
+        </p:nvSpPr>
+        <p:spPr>
+          <a:xfrm>
+            <a:off x="640080" y="2587752"/>
+            <a:ext cx="6766560" cy="603504"/>
           </a:xfrm>
           <a:prstGeom prst="roundRect">
             <a:avLst>
-              <a:gd name="adj" fmla="val 12500"/>
+              <a:gd name="adj" fmla="val 13636"/>
             </a:avLst>
           </a:prstGeom>
           <a:solidFill>
@@ -8939,14 +10096,14 @@
       </p:sp>
       <p:sp>
         <p:nvSpPr>
-          <p:cNvPr id="13" name="Text 11"/>
-          <p:cNvSpPr/>
-          <p:nvPr/>
-        </p:nvSpPr>
-        <p:spPr>
-          <a:xfrm>
-            <a:off x="1645920" y="2816352"/>
-            <a:ext cx="2286000" cy="658368"/>
+          <p:cNvPr id="8" name="Text 6"/>
+          <p:cNvSpPr/>
+          <p:nvPr/>
+        </p:nvSpPr>
+        <p:spPr>
+          <a:xfrm>
+            <a:off x="914400" y="2587752"/>
+            <a:ext cx="2651760" cy="603504"/>
           </a:xfrm>
           <a:prstGeom prst="rect">
             <a:avLst/>
@@ -8970,7 +10127,7 @@
                 <a:ea typeface="Cambria" pitchFamily="34" charset="-122"/>
                 <a:cs typeface="Cambria" pitchFamily="34" charset="-120"/>
               </a:rPr>
-              <a:t>Root cause</a:t>
+              <a:t>Local Simulations</a:t>
             </a:r>
             <a:endParaRPr lang="en-US" sz="1400" dirty="0"/>
           </a:p>
@@ -8978,14 +10135,14 @@
       </p:sp>
       <p:sp>
         <p:nvSpPr>
-          <p:cNvPr id="14" name="Text 12"/>
-          <p:cNvSpPr/>
-          <p:nvPr/>
-        </p:nvSpPr>
-        <p:spPr>
-          <a:xfrm>
-            <a:off x="3840480" y="2816352"/>
-            <a:ext cx="7498080" cy="658368"/>
+          <p:cNvPr id="9" name="Text 7"/>
+          <p:cNvSpPr/>
+          <p:nvPr/>
+        </p:nvSpPr>
+        <p:spPr>
+          <a:xfrm>
+            <a:off x="3611880" y="2587752"/>
+            <a:ext cx="3657600" cy="603504"/>
           </a:xfrm>
           <a:prstGeom prst="rect">
             <a:avLst/>
@@ -9009,7 +10166,7 @@
                 <a:ea typeface="Calibri" pitchFamily="34" charset="-122"/>
                 <a:cs typeface="Calibri" pitchFamily="34" charset="-120"/>
               </a:rPr>
-              <a:t>after_model suppressed upsell on complaints only — never on cart state.</a:t>
+              <a:t>Multi-turn personas incl. adversarial</a:t>
             </a:r>
             <a:endParaRPr lang="en-US" sz="1250" dirty="0"/>
           </a:p>
@@ -9017,77 +10174,18 @@
       </p:sp>
       <p:sp>
         <p:nvSpPr>
-          <p:cNvPr id="15" name="Shape 13"/>
-          <p:cNvSpPr/>
-          <p:nvPr/>
-        </p:nvSpPr>
-        <p:spPr>
-          <a:xfrm>
-            <a:off x="640080" y="3694176"/>
-            <a:ext cx="548640" cy="548640"/>
-          </a:xfrm>
-          <a:prstGeom prst="ellipse">
-            <a:avLst/>
-          </a:prstGeom>
-          <a:solidFill>
-            <a:srgbClr val="1E2761"/>
-          </a:solidFill>
-          <a:ln/>
-        </p:spPr>
-      </p:sp>
-      <p:sp>
-        <p:nvSpPr>
-          <p:cNvPr id="16" name="Text 14"/>
-          <p:cNvSpPr/>
-          <p:nvPr/>
-        </p:nvSpPr>
-        <p:spPr>
-          <a:xfrm>
-            <a:off x="640080" y="3694176"/>
-            <a:ext cx="548640" cy="548640"/>
-          </a:xfrm>
-          <a:prstGeom prst="rect">
-            <a:avLst/>
-          </a:prstGeom>
-          <a:noFill/>
-          <a:ln/>
-        </p:spPr>
-        <p:txBody>
-          <a:bodyPr wrap="square" lIns="0" tIns="0" rIns="0" bIns="0" rtlCol="0" anchor="ctr"/>
-          <a:lstStyle/>
-          <a:p>
-            <a:pPr algn="ctr" indent="0" marL="0">
-              <a:buNone/>
-            </a:pPr>
-            <a:r>
-              <a:rPr lang="en-US" sz="1300" b="1" dirty="0">
-                <a:solidFill>
-                  <a:srgbClr val="FFFFFF"/>
-                </a:solidFill>
-                <a:latin typeface="Cambria" pitchFamily="34" charset="0"/>
-                <a:ea typeface="Cambria" pitchFamily="34" charset="-122"/>
-                <a:cs typeface="Cambria" pitchFamily="34" charset="-120"/>
-              </a:rPr>
-              <a:t>3</a:t>
-            </a:r>
-            <a:endParaRPr lang="en-US" sz="1300" dirty="0"/>
-          </a:p>
-        </p:txBody>
-      </p:sp>
-      <p:sp>
-        <p:nvSpPr>
-          <p:cNvPr id="17" name="Shape 15"/>
-          <p:cNvSpPr/>
-          <p:nvPr/>
-        </p:nvSpPr>
-        <p:spPr>
-          <a:xfrm>
-            <a:off x="1417320" y="3657600"/>
-            <a:ext cx="10058400" cy="658368"/>
+          <p:cNvPr id="10" name="Shape 8"/>
+          <p:cNvSpPr/>
+          <p:nvPr/>
+        </p:nvSpPr>
+        <p:spPr>
+          <a:xfrm>
+            <a:off x="640080" y="3300984"/>
+            <a:ext cx="6766560" cy="603504"/>
           </a:xfrm>
           <a:prstGeom prst="roundRect">
             <a:avLst>
-              <a:gd name="adj" fmla="val 12500"/>
+              <a:gd name="adj" fmla="val 13636"/>
             </a:avLst>
           </a:prstGeom>
           <a:solidFill>
@@ -9105,14 +10203,14 @@
       </p:sp>
       <p:sp>
         <p:nvSpPr>
-          <p:cNvPr id="18" name="Text 16"/>
-          <p:cNvSpPr/>
-          <p:nvPr/>
-        </p:nvSpPr>
-        <p:spPr>
-          <a:xfrm>
-            <a:off x="1645920" y="3657600"/>
-            <a:ext cx="2286000" cy="658368"/>
+          <p:cNvPr id="11" name="Text 9"/>
+          <p:cNvSpPr/>
+          <p:nvPr/>
+        </p:nvSpPr>
+        <p:spPr>
+          <a:xfrm>
+            <a:off x="914400" y="3300984"/>
+            <a:ext cx="2651760" cy="603504"/>
           </a:xfrm>
           <a:prstGeom prst="rect">
             <a:avLst/>
@@ -9136,7 +10234,7 @@
                 <a:ea typeface="Cambria" pitchFamily="34" charset="-122"/>
                 <a:cs typeface="Cambria" pitchFamily="34" charset="-120"/>
               </a:rPr>
-              <a:t>Minimal fix</a:t>
+              <a:t>Tool Tests</a:t>
             </a:r>
             <a:endParaRPr lang="en-US" sz="1400" dirty="0"/>
           </a:p>
@@ -9144,14 +10242,14 @@
       </p:sp>
       <p:sp>
         <p:nvSpPr>
-          <p:cNvPr id="19" name="Text 17"/>
-          <p:cNvSpPr/>
-          <p:nvPr/>
-        </p:nvSpPr>
-        <p:spPr>
-          <a:xfrm>
-            <a:off x="3840480" y="3657600"/>
-            <a:ext cx="7498080" cy="658368"/>
+          <p:cNvPr id="12" name="Text 10"/>
+          <p:cNvSpPr/>
+          <p:nvPr/>
+        </p:nvSpPr>
+        <p:spPr>
+          <a:xfrm>
+            <a:off x="3611880" y="3300984"/>
+            <a:ext cx="3657600" cy="603504"/>
           </a:xfrm>
           <a:prstGeom prst="rect">
             <a:avLst/>
@@ -9175,7 +10273,7 @@
                 <a:ea typeface="Calibri" pitchFamily="34" charset="-122"/>
                 <a:cs typeface="Calibri" pitchFamily="34" charset="-120"/>
               </a:rPr>
-              <a:t>suppress = complaint  →  complaint OR cart_state ∈ {checkout, payment}</a:t>
+              <a:t>Per-tool I/O, including failure paths</a:t>
             </a:r>
             <a:endParaRPr lang="en-US" sz="1250" dirty="0"/>
           </a:p>
@@ -9183,77 +10281,18 @@
       </p:sp>
       <p:sp>
         <p:nvSpPr>
-          <p:cNvPr id="20" name="Shape 18"/>
-          <p:cNvSpPr/>
-          <p:nvPr/>
-        </p:nvSpPr>
-        <p:spPr>
-          <a:xfrm>
-            <a:off x="640080" y="4535424"/>
-            <a:ext cx="548640" cy="548640"/>
-          </a:xfrm>
-          <a:prstGeom prst="ellipse">
-            <a:avLst/>
-          </a:prstGeom>
-          <a:solidFill>
-            <a:srgbClr val="00A896"/>
-          </a:solidFill>
-          <a:ln/>
-        </p:spPr>
-      </p:sp>
-      <p:sp>
-        <p:nvSpPr>
-          <p:cNvPr id="21" name="Text 19"/>
-          <p:cNvSpPr/>
-          <p:nvPr/>
-        </p:nvSpPr>
-        <p:spPr>
-          <a:xfrm>
-            <a:off x="640080" y="4535424"/>
-            <a:ext cx="548640" cy="548640"/>
-          </a:xfrm>
-          <a:prstGeom prst="rect">
-            <a:avLst/>
-          </a:prstGeom>
-          <a:noFill/>
-          <a:ln/>
-        </p:spPr>
-        <p:txBody>
-          <a:bodyPr wrap="square" lIns="0" tIns="0" rIns="0" bIns="0" rtlCol="0" anchor="ctr"/>
-          <a:lstStyle/>
-          <a:p>
-            <a:pPr algn="ctr" indent="0" marL="0">
-              <a:buNone/>
-            </a:pPr>
-            <a:r>
-              <a:rPr lang="en-US" sz="1300" b="1" dirty="0">
-                <a:solidFill>
-                  <a:srgbClr val="FFFFFF"/>
-                </a:solidFill>
-                <a:latin typeface="Cambria" pitchFamily="34" charset="0"/>
-                <a:ea typeface="Cambria" pitchFamily="34" charset="-122"/>
-                <a:cs typeface="Cambria" pitchFamily="34" charset="-120"/>
-              </a:rPr>
-              <a:t>4</a:t>
-            </a:r>
-            <a:endParaRPr lang="en-US" sz="1300" dirty="0"/>
-          </a:p>
-        </p:txBody>
-      </p:sp>
-      <p:sp>
-        <p:nvSpPr>
-          <p:cNvPr id="22" name="Shape 20"/>
-          <p:cNvSpPr/>
-          <p:nvPr/>
-        </p:nvSpPr>
-        <p:spPr>
-          <a:xfrm>
-            <a:off x="1417320" y="4498848"/>
-            <a:ext cx="10058400" cy="658368"/>
+          <p:cNvPr id="13" name="Shape 11"/>
+          <p:cNvSpPr/>
+          <p:nvPr/>
+        </p:nvSpPr>
+        <p:spPr>
+          <a:xfrm>
+            <a:off x="640080" y="4014216"/>
+            <a:ext cx="6766560" cy="603504"/>
           </a:xfrm>
           <a:prstGeom prst="roundRect">
             <a:avLst>
-              <a:gd name="adj" fmla="val 12500"/>
+              <a:gd name="adj" fmla="val 13636"/>
             </a:avLst>
           </a:prstGeom>
           <a:solidFill>
@@ -9271,14 +10310,14 @@
       </p:sp>
       <p:sp>
         <p:nvSpPr>
-          <p:cNvPr id="23" name="Text 21"/>
-          <p:cNvSpPr/>
-          <p:nvPr/>
-        </p:nvSpPr>
-        <p:spPr>
-          <a:xfrm>
-            <a:off x="1645920" y="4498848"/>
-            <a:ext cx="2286000" cy="658368"/>
+          <p:cNvPr id="14" name="Text 12"/>
+          <p:cNvSpPr/>
+          <p:nvPr/>
+        </p:nvSpPr>
+        <p:spPr>
+          <a:xfrm>
+            <a:off x="914400" y="4014216"/>
+            <a:ext cx="2651760" cy="603504"/>
           </a:xfrm>
           <a:prstGeom prst="rect">
             <a:avLst/>
@@ -9302,7 +10341,7 @@
                 <a:ea typeface="Cambria" pitchFamily="34" charset="-122"/>
                 <a:cs typeface="Cambria" pitchFamily="34" charset="-120"/>
               </a:rPr>
-              <a:t>Regression eval</a:t>
+              <a:t>Callback Tests</a:t>
             </a:r>
             <a:endParaRPr lang="en-US" sz="1400" dirty="0"/>
           </a:p>
@@ -9310,14 +10349,14 @@
       </p:sp>
       <p:sp>
         <p:nvSpPr>
-          <p:cNvPr id="24" name="Text 22"/>
-          <p:cNvSpPr/>
-          <p:nvPr/>
-        </p:nvSpPr>
-        <p:spPr>
-          <a:xfrm>
-            <a:off x="3840480" y="4498848"/>
-            <a:ext cx="7498080" cy="658368"/>
+          <p:cNvPr id="15" name="Text 13"/>
+          <p:cNvSpPr/>
+          <p:nvPr/>
+        </p:nvSpPr>
+        <p:spPr>
+          <a:xfrm>
+            <a:off x="3611880" y="4014216"/>
+            <a:ext cx="3657600" cy="603504"/>
           </a:xfrm>
           <a:prstGeom prst="rect">
             <a:avLst/>
@@ -9341,7 +10380,7 @@
                 <a:ea typeface="Calibri" pitchFamily="34" charset="-122"/>
                 <a:cs typeface="Calibri" pitchFamily="34" charset="-120"/>
               </a:rPr>
-              <a:t>New Turn Eval TE-02b: RED before → GREEN after. Coverage R4: 1 → 2.</a:t>
+              <a:t>before/after model + after-tool logic</a:t>
             </a:r>
             <a:endParaRPr lang="en-US" sz="1250" dirty="0"/>
           </a:p>
@@ -9349,46 +10388,260 @@
       </p:sp>
       <p:sp>
         <p:nvSpPr>
-          <p:cNvPr id="25" name="Text 23"/>
-          <p:cNvSpPr/>
-          <p:nvPr/>
-        </p:nvSpPr>
-        <p:spPr>
-          <a:xfrm>
-            <a:off x="640080" y="5532120"/>
-            <a:ext cx="10972800" cy="365760"/>
-          </a:xfrm>
-          <a:prstGeom prst="rect">
-            <a:avLst/>
-          </a:prstGeom>
-          <a:noFill/>
-          <a:ln/>
-        </p:spPr>
-        <p:txBody>
-          <a:bodyPr wrap="square" lIns="0" tIns="0" rIns="0" bIns="0" rtlCol="0" anchor="ctr"/>
-          <a:lstStyle/>
-          <a:p>
-            <a:pPr indent="0" marL="0">
-              <a:buNone/>
-            </a:pPr>
-            <a:r>
-              <a:rPr lang="en-US" sz="1300" i="1" dirty="0">
-                <a:solidFill>
-                  <a:srgbClr val="5B6785"/>
-                </a:solidFill>
-                <a:latin typeface="Calibri" pitchFamily="34" charset="0"/>
-                <a:ea typeface="Calibri" pitchFamily="34" charset="-122"/>
-                <a:cs typeface="Calibri" pitchFamily="34" charset="-120"/>
-              </a:rPr>
-              <a:t>The fix targets the cause and generalizes — not a hard-coded test patch.</a:t>
-            </a:r>
-            <a:endParaRPr lang="en-US" sz="1300" dirty="0"/>
-          </a:p>
-        </p:txBody>
-      </p:sp>
-      <p:sp>
-        <p:nvSpPr>
-          <p:cNvPr id="26" name="Text 24"/>
+          <p:cNvPr id="16" name="Shape 14"/>
+          <p:cNvSpPr/>
+          <p:nvPr/>
+        </p:nvSpPr>
+        <p:spPr>
+          <a:xfrm>
+            <a:off x="640080" y="4727448"/>
+            <a:ext cx="6766560" cy="603504"/>
+          </a:xfrm>
+          <a:prstGeom prst="roundRect">
+            <a:avLst>
+              <a:gd name="adj" fmla="val 13636"/>
+            </a:avLst>
+          </a:prstGeom>
+          <a:solidFill>
+            <a:srgbClr val="F2F6FF"/>
+          </a:solidFill>
+          <a:ln/>
+          <a:effectLst>
+            <a:outerShdw sx="100000" sy="100000" kx="0" ky="0" algn="bl" rotWithShape="0" blurRad="88900" dist="38100" dir="5400000">
+              <a:srgbClr val="000000">
+                <a:alpha val="13000"/>
+              </a:srgbClr>
+            </a:outerShdw>
+          </a:effectLst>
+        </p:spPr>
+      </p:sp>
+      <p:sp>
+        <p:nvSpPr>
+          <p:cNvPr id="17" name="Text 15"/>
+          <p:cNvSpPr/>
+          <p:nvPr/>
+        </p:nvSpPr>
+        <p:spPr>
+          <a:xfrm>
+            <a:off x="914400" y="4727448"/>
+            <a:ext cx="2651760" cy="603504"/>
+          </a:xfrm>
+          <a:prstGeom prst="rect">
+            <a:avLst/>
+          </a:prstGeom>
+          <a:noFill/>
+          <a:ln/>
+        </p:spPr>
+        <p:txBody>
+          <a:bodyPr wrap="square" lIns="0" tIns="0" rIns="0" bIns="0" rtlCol="0" anchor="ctr"/>
+          <a:lstStyle/>
+          <a:p>
+            <a:pPr indent="0" marL="0">
+              <a:buNone/>
+            </a:pPr>
+            <a:r>
+              <a:rPr lang="en-US" sz="1400" b="1" dirty="0">
+                <a:solidFill>
+                  <a:srgbClr val="1E2761"/>
+                </a:solidFill>
+                <a:latin typeface="Cambria" pitchFamily="34" charset="0"/>
+                <a:ea typeface="Cambria" pitchFamily="34" charset="-122"/>
+                <a:cs typeface="Cambria" pitchFamily="34" charset="-120"/>
+              </a:rPr>
+              <a:t>Turn Evals</a:t>
+            </a:r>
+            <a:endParaRPr lang="en-US" sz="1400" dirty="0"/>
+          </a:p>
+        </p:txBody>
+      </p:sp>
+      <p:sp>
+        <p:nvSpPr>
+          <p:cNvPr id="18" name="Text 16"/>
+          <p:cNvSpPr/>
+          <p:nvPr/>
+        </p:nvSpPr>
+        <p:spPr>
+          <a:xfrm>
+            <a:off x="3611880" y="4727448"/>
+            <a:ext cx="3657600" cy="603504"/>
+          </a:xfrm>
+          <a:prstGeom prst="rect">
+            <a:avLst/>
+          </a:prstGeom>
+          <a:noFill/>
+          <a:ln/>
+        </p:spPr>
+        <p:txBody>
+          <a:bodyPr wrap="square" lIns="0" tIns="0" rIns="0" bIns="0" rtlCol="0" anchor="ctr"/>
+          <a:lstStyle/>
+          <a:p>
+            <a:pPr indent="0" marL="0">
+              <a:buNone/>
+            </a:pPr>
+            <a:r>
+              <a:rPr lang="en-US" sz="1250" dirty="0">
+                <a:solidFill>
+                  <a:srgbClr val="22284B"/>
+                </a:solidFill>
+                <a:latin typeface="Calibri" pitchFamily="34" charset="0"/>
+                <a:ea typeface="Calibri" pitchFamily="34" charset="-122"/>
+                <a:cs typeface="Calibri" pitchFamily="34" charset="-120"/>
+              </a:rPr>
+              <a:t>Right tool, grounded answer, no PII leak</a:t>
+            </a:r>
+            <a:endParaRPr lang="en-US" sz="1250" dirty="0"/>
+          </a:p>
+        </p:txBody>
+      </p:sp>
+      <p:sp>
+        <p:nvSpPr>
+          <p:cNvPr id="19" name="Shape 17"/>
+          <p:cNvSpPr/>
+          <p:nvPr/>
+        </p:nvSpPr>
+        <p:spPr>
+          <a:xfrm>
+            <a:off x="7955280" y="1874520"/>
+            <a:ext cx="3657600" cy="3520440"/>
+          </a:xfrm>
+          <a:prstGeom prst="roundRect">
+            <a:avLst>
+              <a:gd name="adj" fmla="val 2338"/>
+            </a:avLst>
+          </a:prstGeom>
+          <a:solidFill>
+            <a:srgbClr val="1E2761"/>
+          </a:solidFill>
+          <a:ln/>
+          <a:effectLst>
+            <a:outerShdw sx="100000" sy="100000" kx="0" ky="0" algn="bl" rotWithShape="0" blurRad="88900" dist="38100" dir="5400000">
+              <a:srgbClr val="000000">
+                <a:alpha val="13000"/>
+              </a:srgbClr>
+            </a:outerShdw>
+          </a:effectLst>
+        </p:spPr>
+      </p:sp>
+      <p:sp>
+        <p:nvSpPr>
+          <p:cNvPr id="20" name="Text 18"/>
+          <p:cNvSpPr/>
+          <p:nvPr/>
+        </p:nvSpPr>
+        <p:spPr>
+          <a:xfrm>
+            <a:off x="7955280" y="2286000"/>
+            <a:ext cx="3657600" cy="1097280"/>
+          </a:xfrm>
+          <a:prstGeom prst="rect">
+            <a:avLst/>
+          </a:prstGeom>
+          <a:noFill/>
+          <a:ln/>
+        </p:spPr>
+        <p:txBody>
+          <a:bodyPr wrap="square" lIns="0" tIns="0" rIns="0" bIns="0" rtlCol="0" anchor="ctr"/>
+          <a:lstStyle/>
+          <a:p>
+            <a:pPr algn="ctr" indent="0" marL="0">
+              <a:buNone/>
+            </a:pPr>
+            <a:r>
+              <a:rPr lang="en-US" sz="6400" b="1" dirty="0">
+                <a:solidFill>
+                  <a:srgbClr val="02C39A"/>
+                </a:solidFill>
+                <a:latin typeface="Cambria" pitchFamily="34" charset="0"/>
+                <a:ea typeface="Cambria" pitchFamily="34" charset="-122"/>
+                <a:cs typeface="Cambria" pitchFamily="34" charset="-120"/>
+              </a:rPr>
+              <a:t>100%</a:t>
+            </a:r>
+            <a:endParaRPr lang="en-US" sz="6400" dirty="0"/>
+          </a:p>
+        </p:txBody>
+      </p:sp>
+      <p:sp>
+        <p:nvSpPr>
+          <p:cNvPr id="21" name="Text 19"/>
+          <p:cNvSpPr/>
+          <p:nvPr/>
+        </p:nvSpPr>
+        <p:spPr>
+          <a:xfrm>
+            <a:off x="7955280" y="3429000"/>
+            <a:ext cx="3657600" cy="457200"/>
+          </a:xfrm>
+          <a:prstGeom prst="rect">
+            <a:avLst/>
+          </a:prstGeom>
+          <a:noFill/>
+          <a:ln/>
+        </p:spPr>
+        <p:txBody>
+          <a:bodyPr wrap="square" lIns="0" tIns="0" rIns="0" bIns="0" rtlCol="0" anchor="ctr"/>
+          <a:lstStyle/>
+          <a:p>
+            <a:pPr algn="ctr" indent="0" marL="0">
+              <a:buNone/>
+            </a:pPr>
+            <a:r>
+              <a:rPr lang="en-US" sz="1400" dirty="0">
+                <a:solidFill>
+                  <a:srgbClr val="CADCFC"/>
+                </a:solidFill>
+                <a:latin typeface="Calibri" pitchFamily="34" charset="0"/>
+                <a:ea typeface="Calibri" pitchFamily="34" charset="-122"/>
+                <a:cs typeface="Calibri" pitchFamily="34" charset="-120"/>
+              </a:rPr>
+              <a:t>requirement → eval coverage</a:t>
+            </a:r>
+            <a:endParaRPr lang="en-US" sz="1400" dirty="0"/>
+          </a:p>
+        </p:txBody>
+      </p:sp>
+      <p:sp>
+        <p:nvSpPr>
+          <p:cNvPr id="22" name="Text 20"/>
+          <p:cNvSpPr/>
+          <p:nvPr/>
+        </p:nvSpPr>
+        <p:spPr>
+          <a:xfrm>
+            <a:off x="8183880" y="3977640"/>
+            <a:ext cx="3200400" cy="1280160"/>
+          </a:xfrm>
+          <a:prstGeom prst="rect">
+            <a:avLst/>
+          </a:prstGeom>
+          <a:noFill/>
+          <a:ln/>
+        </p:spPr>
+        <p:txBody>
+          <a:bodyPr wrap="square" lIns="0" tIns="0" rIns="0" bIns="0" rtlCol="0" anchor="ctr"/>
+          <a:lstStyle/>
+          <a:p>
+            <a:pPr algn="ctr" indent="0" marL="0">
+              <a:buNone/>
+            </a:pPr>
+            <a:r>
+              <a:rPr lang="en-US" sz="1250" dirty="0">
+                <a:solidFill>
+                  <a:srgbClr val="FFFFFF"/>
+                </a:solidFill>
+                <a:latin typeface="Calibri" pitchFamily="34" charset="0"/>
+                <a:ea typeface="Calibri" pitchFamily="34" charset="-122"/>
+                <a:cs typeface="Calibri" pitchFamily="34" charset="-120"/>
+              </a:rPr>
+              <a:t>Thresholds tie to KPIs: tool-call accuracy ≥ 0.95, 0 PII/card leaks, latency ≤ budget.</a:t>
+            </a:r>
+            <a:endParaRPr lang="en-US" sz="1250" dirty="0"/>
+          </a:p>
+        </p:txBody>
+      </p:sp>
+      <p:sp>
+        <p:nvSpPr>
+          <p:cNvPr id="23" name="Text 21"/>
           <p:cNvSpPr/>
           <p:nvPr/>
         </p:nvSpPr>
@@ -9427,7 +10680,7 @@
       </p:sp>
       <p:sp>
         <p:nvSpPr>
-          <p:cNvPr id="27" name="Text 25"/>
+          <p:cNvPr id="24" name="Text 22"/>
           <p:cNvSpPr/>
           <p:nvPr/>
         </p:nvSpPr>
@@ -9529,7 +10782,7 @@
                 <a:ea typeface="Calibri" pitchFamily="34" charset="-122"/>
                 <a:cs typeface="Calibri" pitchFamily="34" charset="-120"/>
               </a:rPr>
-              <a:t>WHY IT HOLDS UP</a:t>
+              <a:t>CLOSING THE LOOP</a:t>
             </a:r>
             <a:endParaRPr lang="en-US" sz="1200" dirty="0"/>
           </a:p>
@@ -9568,7 +10821,7 @@
                 <a:ea typeface="Cambria" pitchFamily="34" charset="-122"/>
                 <a:cs typeface="Cambria" pitchFamily="34" charset="-120"/>
               </a:rPr>
-              <a:t>Engineering discipline, not a clever one-shot prompt</a:t>
+              <a:t>Every bug becomes a permanent test</a:t>
             </a:r>
             <a:endParaRPr lang="en-US" sz="3000" dirty="0"/>
           </a:p>
@@ -9576,18 +10829,116 @@
       </p:sp>
       <p:sp>
         <p:nvSpPr>
-          <p:cNvPr id="4" name="Shape 2"/>
-          <p:cNvSpPr/>
-          <p:nvPr/>
-        </p:nvSpPr>
-        <p:spPr>
-          <a:xfrm>
-            <a:off x="640080" y="1920240"/>
-            <a:ext cx="5303520" cy="1463040"/>
+          <p:cNvPr id="4" name="Text 2"/>
+          <p:cNvSpPr/>
+          <p:nvPr/>
+        </p:nvSpPr>
+        <p:spPr>
+          <a:xfrm>
+            <a:off x="640080" y="1508760"/>
+            <a:ext cx="10972800" cy="365760"/>
+          </a:xfrm>
+          <a:prstGeom prst="rect">
+            <a:avLst/>
+          </a:prstGeom>
+          <a:noFill/>
+          <a:ln/>
+        </p:spPr>
+        <p:txBody>
+          <a:bodyPr wrap="square" lIns="0" tIns="0" rIns="0" bIns="0" rtlCol="0" anchor="ctr"/>
+          <a:lstStyle/>
+          <a:p>
+            <a:pPr indent="0" marL="0">
+              <a:buNone/>
+            </a:pPr>
+            <a:r>
+              <a:rPr lang="en-US" sz="1600" b="1" dirty="0">
+                <a:solidFill>
+                  <a:srgbClr val="1E2761"/>
+                </a:solidFill>
+                <a:latin typeface="Cambria" pitchFamily="34" charset="0"/>
+                <a:ea typeface="Cambria" pitchFamily="34" charset="-122"/>
+                <a:cs typeface="Cambria" pitchFamily="34" charset="-120"/>
+              </a:rPr>
+              <a:t>BUG-01  ·  the agent upsold during checkout (Turn Eval TE-02 failed)</a:t>
+            </a:r>
+            <a:endParaRPr lang="en-US" sz="1600" dirty="0"/>
+          </a:p>
+        </p:txBody>
+      </p:sp>
+      <p:sp>
+        <p:nvSpPr>
+          <p:cNvPr id="5" name="Shape 3"/>
+          <p:cNvSpPr/>
+          <p:nvPr/>
+        </p:nvSpPr>
+        <p:spPr>
+          <a:xfrm>
+            <a:off x="640080" y="2011680"/>
+            <a:ext cx="548640" cy="548640"/>
+          </a:xfrm>
+          <a:prstGeom prst="ellipse">
+            <a:avLst/>
+          </a:prstGeom>
+          <a:solidFill>
+            <a:srgbClr val="1E2761"/>
+          </a:solidFill>
+          <a:ln/>
+        </p:spPr>
+      </p:sp>
+      <p:sp>
+        <p:nvSpPr>
+          <p:cNvPr id="6" name="Text 4"/>
+          <p:cNvSpPr/>
+          <p:nvPr/>
+        </p:nvSpPr>
+        <p:spPr>
+          <a:xfrm>
+            <a:off x="640080" y="2011680"/>
+            <a:ext cx="548640" cy="548640"/>
+          </a:xfrm>
+          <a:prstGeom prst="rect">
+            <a:avLst/>
+          </a:prstGeom>
+          <a:noFill/>
+          <a:ln/>
+        </p:spPr>
+        <p:txBody>
+          <a:bodyPr wrap="square" lIns="0" tIns="0" rIns="0" bIns="0" rtlCol="0" anchor="ctr"/>
+          <a:lstStyle/>
+          <a:p>
+            <a:pPr algn="ctr" indent="0" marL="0">
+              <a:buNone/>
+            </a:pPr>
+            <a:r>
+              <a:rPr lang="en-US" sz="1300" b="1" dirty="0">
+                <a:solidFill>
+                  <a:srgbClr val="FFFFFF"/>
+                </a:solidFill>
+                <a:latin typeface="Cambria" pitchFamily="34" charset="0"/>
+                <a:ea typeface="Cambria" pitchFamily="34" charset="-122"/>
+                <a:cs typeface="Cambria" pitchFamily="34" charset="-120"/>
+              </a:rPr>
+              <a:t>1</a:t>
+            </a:r>
+            <a:endParaRPr lang="en-US" sz="1300" dirty="0"/>
+          </a:p>
+        </p:txBody>
+      </p:sp>
+      <p:sp>
+        <p:nvSpPr>
+          <p:cNvPr id="7" name="Shape 5"/>
+          <p:cNvSpPr/>
+          <p:nvPr/>
+        </p:nvSpPr>
+        <p:spPr>
+          <a:xfrm>
+            <a:off x="1417320" y="1975104"/>
+            <a:ext cx="10058400" cy="658368"/>
           </a:xfrm>
           <a:prstGeom prst="roundRect">
             <a:avLst>
-              <a:gd name="adj" fmla="val 5625"/>
+              <a:gd name="adj" fmla="val 12500"/>
             </a:avLst>
           </a:prstGeom>
           <a:solidFill>
@@ -9605,136 +10956,136 @@
       </p:sp>
       <p:sp>
         <p:nvSpPr>
-          <p:cNvPr id="5" name="Shape 3"/>
-          <p:cNvSpPr/>
-          <p:nvPr/>
-        </p:nvSpPr>
-        <p:spPr>
-          <a:xfrm>
-            <a:off x="914400" y="2331720"/>
-            <a:ext cx="640080" cy="640080"/>
-          </a:xfrm>
-          <a:prstGeom prst="ellipse">
-            <a:avLst/>
-          </a:prstGeom>
-          <a:solidFill>
-            <a:srgbClr val="00A896"/>
-          </a:solidFill>
-          <a:ln/>
-        </p:spPr>
-      </p:sp>
-      <p:sp>
-        <p:nvSpPr>
-          <p:cNvPr id="6" name="Text 4"/>
-          <p:cNvSpPr/>
-          <p:nvPr/>
-        </p:nvSpPr>
-        <p:spPr>
-          <a:xfrm>
-            <a:off x="914400" y="2331720"/>
-            <a:ext cx="640080" cy="640080"/>
-          </a:xfrm>
-          <a:prstGeom prst="rect">
-            <a:avLst/>
-          </a:prstGeom>
-          <a:noFill/>
-          <a:ln/>
-        </p:spPr>
-        <p:txBody>
-          <a:bodyPr wrap="square" lIns="0" tIns="0" rIns="0" bIns="0" rtlCol="0" anchor="ctr"/>
-          <a:lstStyle/>
-          <a:p>
-            <a:pPr algn="ctr" indent="0" marL="0">
-              <a:buNone/>
-            </a:pPr>
-            <a:r>
-              <a:rPr lang="en-US" sz="1800" b="1" dirty="0">
-                <a:solidFill>
-                  <a:srgbClr val="FFFFFF"/>
+          <p:cNvPr id="8" name="Text 6"/>
+          <p:cNvSpPr/>
+          <p:nvPr/>
+        </p:nvSpPr>
+        <p:spPr>
+          <a:xfrm>
+            <a:off x="1645920" y="1975104"/>
+            <a:ext cx="2286000" cy="658368"/>
+          </a:xfrm>
+          <a:prstGeom prst="rect">
+            <a:avLst/>
+          </a:prstGeom>
+          <a:noFill/>
+          <a:ln/>
+        </p:spPr>
+        <p:txBody>
+          <a:bodyPr wrap="square" lIns="0" tIns="0" rIns="0" bIns="0" rtlCol="0" anchor="ctr"/>
+          <a:lstStyle/>
+          <a:p>
+            <a:pPr indent="0" marL="0">
+              <a:buNone/>
+            </a:pPr>
+            <a:r>
+              <a:rPr lang="en-US" sz="1400" b="1" dirty="0">
+                <a:solidFill>
+                  <a:srgbClr val="1E2761"/>
                 </a:solidFill>
                 <a:latin typeface="Cambria" pitchFamily="34" charset="0"/>
                 <a:ea typeface="Cambria" pitchFamily="34" charset="-122"/>
                 <a:cs typeface="Cambria" pitchFamily="34" charset="-120"/>
               </a:rPr>
-              <a:t>1</a:t>
-            </a:r>
-            <a:endParaRPr lang="en-US" sz="1800" dirty="0"/>
-          </a:p>
-        </p:txBody>
-      </p:sp>
-      <p:sp>
-        <p:nvSpPr>
-          <p:cNvPr id="7" name="Text 5"/>
-          <p:cNvSpPr/>
-          <p:nvPr/>
-        </p:nvSpPr>
-        <p:spPr>
-          <a:xfrm>
-            <a:off x="1737360" y="2103120"/>
-            <a:ext cx="4023360" cy="457200"/>
-          </a:xfrm>
-          <a:prstGeom prst="rect">
-            <a:avLst/>
-          </a:prstGeom>
-          <a:noFill/>
-          <a:ln/>
-        </p:spPr>
-        <p:txBody>
-          <a:bodyPr wrap="square" lIns="0" tIns="0" rIns="0" bIns="0" rtlCol="0" anchor="ctr"/>
-          <a:lstStyle/>
-          <a:p>
-            <a:pPr indent="0" marL="0">
-              <a:buNone/>
-            </a:pPr>
-            <a:r>
-              <a:rPr lang="en-US" sz="1700" b="1" dirty="0">
-                <a:solidFill>
-                  <a:srgbClr val="1E2761"/>
+              <a:t>Reproduce</a:t>
+            </a:r>
+            <a:endParaRPr lang="en-US" sz="1400" dirty="0"/>
+          </a:p>
+        </p:txBody>
+      </p:sp>
+      <p:sp>
+        <p:nvSpPr>
+          <p:cNvPr id="9" name="Text 7"/>
+          <p:cNvSpPr/>
+          <p:nvPr/>
+        </p:nvSpPr>
+        <p:spPr>
+          <a:xfrm>
+            <a:off x="3840480" y="1975104"/>
+            <a:ext cx="7498080" cy="658368"/>
+          </a:xfrm>
+          <a:prstGeom prst="rect">
+            <a:avLst/>
+          </a:prstGeom>
+          <a:noFill/>
+          <a:ln/>
+        </p:spPr>
+        <p:txBody>
+          <a:bodyPr wrap="square" lIns="0" tIns="0" rIns="0" bIns="0" rtlCol="0" anchor="ctr"/>
+          <a:lstStyle/>
+          <a:p>
+            <a:pPr indent="0" marL="0">
+              <a:buNone/>
+            </a:pPr>
+            <a:r>
+              <a:rPr lang="en-US" sz="1250" dirty="0">
+                <a:solidFill>
+                  <a:srgbClr val="22284B"/>
+                </a:solidFill>
+                <a:latin typeface="Calibri" pitchFamily="34" charset="0"/>
+                <a:ea typeface="Calibri" pitchFamily="34" charset="-122"/>
+                <a:cs typeface="Calibri" pitchFamily="34" charset="-120"/>
+              </a:rPr>
+              <a:t>Checkout turn → “Would you like potting soil too?”</a:t>
+            </a:r>
+            <a:endParaRPr lang="en-US" sz="1250" dirty="0"/>
+          </a:p>
+        </p:txBody>
+      </p:sp>
+      <p:sp>
+        <p:nvSpPr>
+          <p:cNvPr id="10" name="Shape 8"/>
+          <p:cNvSpPr/>
+          <p:nvPr/>
+        </p:nvSpPr>
+        <p:spPr>
+          <a:xfrm>
+            <a:off x="640080" y="2852928"/>
+            <a:ext cx="548640" cy="548640"/>
+          </a:xfrm>
+          <a:prstGeom prst="ellipse">
+            <a:avLst/>
+          </a:prstGeom>
+          <a:solidFill>
+            <a:srgbClr val="1E2761"/>
+          </a:solidFill>
+          <a:ln/>
+        </p:spPr>
+      </p:sp>
+      <p:sp>
+        <p:nvSpPr>
+          <p:cNvPr id="11" name="Text 9"/>
+          <p:cNvSpPr/>
+          <p:nvPr/>
+        </p:nvSpPr>
+        <p:spPr>
+          <a:xfrm>
+            <a:off x="640080" y="2852928"/>
+            <a:ext cx="548640" cy="548640"/>
+          </a:xfrm>
+          <a:prstGeom prst="rect">
+            <a:avLst/>
+          </a:prstGeom>
+          <a:noFill/>
+          <a:ln/>
+        </p:spPr>
+        <p:txBody>
+          <a:bodyPr wrap="square" lIns="0" tIns="0" rIns="0" bIns="0" rtlCol="0" anchor="ctr"/>
+          <a:lstStyle/>
+          <a:p>
+            <a:pPr algn="ctr" indent="0" marL="0">
+              <a:buNone/>
+            </a:pPr>
+            <a:r>
+              <a:rPr lang="en-US" sz="1300" b="1" dirty="0">
+                <a:solidFill>
+                  <a:srgbClr val="FFFFFF"/>
                 </a:solidFill>
                 <a:latin typeface="Cambria" pitchFamily="34" charset="0"/>
                 <a:ea typeface="Cambria" pitchFamily="34" charset="-122"/>
                 <a:cs typeface="Cambria" pitchFamily="34" charset="-120"/>
               </a:rPr>
-              <a:t>Traceability</a:t>
-            </a:r>
-            <a:endParaRPr lang="en-US" sz="1700" dirty="0"/>
-          </a:p>
-        </p:txBody>
-      </p:sp>
-      <p:sp>
-        <p:nvSpPr>
-          <p:cNvPr id="8" name="Text 6"/>
-          <p:cNvSpPr/>
-          <p:nvPr/>
-        </p:nvSpPr>
-        <p:spPr>
-          <a:xfrm>
-            <a:off x="1737360" y="2578608"/>
-            <a:ext cx="4023360" cy="731520"/>
-          </a:xfrm>
-          <a:prstGeom prst="rect">
-            <a:avLst/>
-          </a:prstGeom>
-          <a:noFill/>
-          <a:ln/>
-        </p:spPr>
-        <p:txBody>
-          <a:bodyPr wrap="square" lIns="0" tIns="0" rIns="0" bIns="0" rtlCol="0" anchor="ctr"/>
-          <a:lstStyle/>
-          <a:p>
-            <a:pPr indent="0" marL="0">
-              <a:buNone/>
-            </a:pPr>
-            <a:r>
-              <a:rPr lang="en-US" sz="1300" dirty="0">
-                <a:solidFill>
-                  <a:srgbClr val="22284B"/>
-                </a:solidFill>
-                <a:latin typeface="Calibri" pitchFamily="34" charset="0"/>
-                <a:ea typeface="Calibri" pitchFamily="34" charset="-122"/>
-                <a:cs typeface="Calibri" pitchFamily="34" charset="-120"/>
-              </a:rPr>
-              <a:t>Requirement → design → eval, with coverage as a number.</a:t>
+              <a:t>2</a:t>
             </a:r>
             <a:endParaRPr lang="en-US" sz="1300" dirty="0"/>
           </a:p>
@@ -9742,22 +11093,22 @@
       </p:sp>
       <p:sp>
         <p:nvSpPr>
-          <p:cNvPr id="9" name="Shape 7"/>
-          <p:cNvSpPr/>
-          <p:nvPr/>
-        </p:nvSpPr>
-        <p:spPr>
-          <a:xfrm>
-            <a:off x="6217920" y="1920240"/>
-            <a:ext cx="5303520" cy="1463040"/>
+          <p:cNvPr id="12" name="Shape 10"/>
+          <p:cNvSpPr/>
+          <p:nvPr/>
+        </p:nvSpPr>
+        <p:spPr>
+          <a:xfrm>
+            <a:off x="1417320" y="2816352"/>
+            <a:ext cx="10058400" cy="658368"/>
           </a:xfrm>
           <a:prstGeom prst="roundRect">
             <a:avLst>
-              <a:gd name="adj" fmla="val 5625"/>
+              <a:gd name="adj" fmla="val 12500"/>
             </a:avLst>
           </a:prstGeom>
           <a:solidFill>
-            <a:srgbClr val="F2F6FF"/>
+            <a:srgbClr val="EAF7F3"/>
           </a:solidFill>
           <a:ln/>
           <a:effectLst>
@@ -9771,136 +11122,136 @@
       </p:sp>
       <p:sp>
         <p:nvSpPr>
-          <p:cNvPr id="10" name="Shape 8"/>
-          <p:cNvSpPr/>
-          <p:nvPr/>
-        </p:nvSpPr>
-        <p:spPr>
-          <a:xfrm>
-            <a:off x="6492240" y="2331720"/>
-            <a:ext cx="640080" cy="640080"/>
-          </a:xfrm>
-          <a:prstGeom prst="ellipse">
-            <a:avLst/>
-          </a:prstGeom>
-          <a:solidFill>
-            <a:srgbClr val="00A896"/>
-          </a:solidFill>
-          <a:ln/>
-        </p:spPr>
-      </p:sp>
-      <p:sp>
-        <p:nvSpPr>
-          <p:cNvPr id="11" name="Text 9"/>
-          <p:cNvSpPr/>
-          <p:nvPr/>
-        </p:nvSpPr>
-        <p:spPr>
-          <a:xfrm>
-            <a:off x="6492240" y="2331720"/>
-            <a:ext cx="640080" cy="640080"/>
-          </a:xfrm>
-          <a:prstGeom prst="rect">
-            <a:avLst/>
-          </a:prstGeom>
-          <a:noFill/>
-          <a:ln/>
-        </p:spPr>
-        <p:txBody>
-          <a:bodyPr wrap="square" lIns="0" tIns="0" rIns="0" bIns="0" rtlCol="0" anchor="ctr"/>
-          <a:lstStyle/>
-          <a:p>
-            <a:pPr algn="ctr" indent="0" marL="0">
-              <a:buNone/>
-            </a:pPr>
-            <a:r>
-              <a:rPr lang="en-US" sz="1800" b="1" dirty="0">
-                <a:solidFill>
-                  <a:srgbClr val="FFFFFF"/>
+          <p:cNvPr id="13" name="Text 11"/>
+          <p:cNvSpPr/>
+          <p:nvPr/>
+        </p:nvSpPr>
+        <p:spPr>
+          <a:xfrm>
+            <a:off x="1645920" y="2816352"/>
+            <a:ext cx="2286000" cy="658368"/>
+          </a:xfrm>
+          <a:prstGeom prst="rect">
+            <a:avLst/>
+          </a:prstGeom>
+          <a:noFill/>
+          <a:ln/>
+        </p:spPr>
+        <p:txBody>
+          <a:bodyPr wrap="square" lIns="0" tIns="0" rIns="0" bIns="0" rtlCol="0" anchor="ctr"/>
+          <a:lstStyle/>
+          <a:p>
+            <a:pPr indent="0" marL="0">
+              <a:buNone/>
+            </a:pPr>
+            <a:r>
+              <a:rPr lang="en-US" sz="1400" b="1" dirty="0">
+                <a:solidFill>
+                  <a:srgbClr val="1E2761"/>
                 </a:solidFill>
                 <a:latin typeface="Cambria" pitchFamily="34" charset="0"/>
                 <a:ea typeface="Cambria" pitchFamily="34" charset="-122"/>
                 <a:cs typeface="Cambria" pitchFamily="34" charset="-120"/>
               </a:rPr>
-              <a:t>2</a:t>
-            </a:r>
-            <a:endParaRPr lang="en-US" sz="1800" dirty="0"/>
-          </a:p>
-        </p:txBody>
-      </p:sp>
-      <p:sp>
-        <p:nvSpPr>
-          <p:cNvPr id="12" name="Text 10"/>
-          <p:cNvSpPr/>
-          <p:nvPr/>
-        </p:nvSpPr>
-        <p:spPr>
-          <a:xfrm>
-            <a:off x="7315200" y="2103120"/>
-            <a:ext cx="4023360" cy="457200"/>
-          </a:xfrm>
-          <a:prstGeom prst="rect">
-            <a:avLst/>
-          </a:prstGeom>
-          <a:noFill/>
-          <a:ln/>
-        </p:spPr>
-        <p:txBody>
-          <a:bodyPr wrap="square" lIns="0" tIns="0" rIns="0" bIns="0" rtlCol="0" anchor="ctr"/>
-          <a:lstStyle/>
-          <a:p>
-            <a:pPr indent="0" marL="0">
-              <a:buNone/>
-            </a:pPr>
-            <a:r>
-              <a:rPr lang="en-US" sz="1700" b="1" dirty="0">
-                <a:solidFill>
-                  <a:srgbClr val="1E2761"/>
+              <a:t>Root cause</a:t>
+            </a:r>
+            <a:endParaRPr lang="en-US" sz="1400" dirty="0"/>
+          </a:p>
+        </p:txBody>
+      </p:sp>
+      <p:sp>
+        <p:nvSpPr>
+          <p:cNvPr id="14" name="Text 12"/>
+          <p:cNvSpPr/>
+          <p:nvPr/>
+        </p:nvSpPr>
+        <p:spPr>
+          <a:xfrm>
+            <a:off x="3840480" y="2816352"/>
+            <a:ext cx="7498080" cy="658368"/>
+          </a:xfrm>
+          <a:prstGeom prst="rect">
+            <a:avLst/>
+          </a:prstGeom>
+          <a:noFill/>
+          <a:ln/>
+        </p:spPr>
+        <p:txBody>
+          <a:bodyPr wrap="square" lIns="0" tIns="0" rIns="0" bIns="0" rtlCol="0" anchor="ctr"/>
+          <a:lstStyle/>
+          <a:p>
+            <a:pPr indent="0" marL="0">
+              <a:buNone/>
+            </a:pPr>
+            <a:r>
+              <a:rPr lang="en-US" sz="1250" dirty="0">
+                <a:solidFill>
+                  <a:srgbClr val="22284B"/>
+                </a:solidFill>
+                <a:latin typeface="Calibri" pitchFamily="34" charset="0"/>
+                <a:ea typeface="Calibri" pitchFamily="34" charset="-122"/>
+                <a:cs typeface="Calibri" pitchFamily="34" charset="-120"/>
+              </a:rPr>
+              <a:t>after_model suppressed upsell on complaints only — never on cart state.</a:t>
+            </a:r>
+            <a:endParaRPr lang="en-US" sz="1250" dirty="0"/>
+          </a:p>
+        </p:txBody>
+      </p:sp>
+      <p:sp>
+        <p:nvSpPr>
+          <p:cNvPr id="15" name="Shape 13"/>
+          <p:cNvSpPr/>
+          <p:nvPr/>
+        </p:nvSpPr>
+        <p:spPr>
+          <a:xfrm>
+            <a:off x="640080" y="3694176"/>
+            <a:ext cx="548640" cy="548640"/>
+          </a:xfrm>
+          <a:prstGeom prst="ellipse">
+            <a:avLst/>
+          </a:prstGeom>
+          <a:solidFill>
+            <a:srgbClr val="1E2761"/>
+          </a:solidFill>
+          <a:ln/>
+        </p:spPr>
+      </p:sp>
+      <p:sp>
+        <p:nvSpPr>
+          <p:cNvPr id="16" name="Text 14"/>
+          <p:cNvSpPr/>
+          <p:nvPr/>
+        </p:nvSpPr>
+        <p:spPr>
+          <a:xfrm>
+            <a:off x="640080" y="3694176"/>
+            <a:ext cx="548640" cy="548640"/>
+          </a:xfrm>
+          <a:prstGeom prst="rect">
+            <a:avLst/>
+          </a:prstGeom>
+          <a:noFill/>
+          <a:ln/>
+        </p:spPr>
+        <p:txBody>
+          <a:bodyPr wrap="square" lIns="0" tIns="0" rIns="0" bIns="0" rtlCol="0" anchor="ctr"/>
+          <a:lstStyle/>
+          <a:p>
+            <a:pPr algn="ctr" indent="0" marL="0">
+              <a:buNone/>
+            </a:pPr>
+            <a:r>
+              <a:rPr lang="en-US" sz="1300" b="1" dirty="0">
+                <a:solidFill>
+                  <a:srgbClr val="FFFFFF"/>
                 </a:solidFill>
                 <a:latin typeface="Cambria" pitchFamily="34" charset="0"/>
                 <a:ea typeface="Cambria" pitchFamily="34" charset="-122"/>
                 <a:cs typeface="Cambria" pitchFamily="34" charset="-120"/>
               </a:rPr>
-              <a:t>Grounded</a:t>
-            </a:r>
-            <a:endParaRPr lang="en-US" sz="1700" dirty="0"/>
-          </a:p>
-        </p:txBody>
-      </p:sp>
-      <p:sp>
-        <p:nvSpPr>
-          <p:cNvPr id="13" name="Text 11"/>
-          <p:cNvSpPr/>
-          <p:nvPr/>
-        </p:nvSpPr>
-        <p:spPr>
-          <a:xfrm>
-            <a:off x="7315200" y="2578608"/>
-            <a:ext cx="4023360" cy="731520"/>
-          </a:xfrm>
-          <a:prstGeom prst="rect">
-            <a:avLst/>
-          </a:prstGeom>
-          <a:noFill/>
-          <a:ln/>
-        </p:spPr>
-        <p:txBody>
-          <a:bodyPr wrap="square" lIns="0" tIns="0" rIns="0" bIns="0" rtlCol="0" anchor="ctr"/>
-          <a:lstStyle/>
-          <a:p>
-            <a:pPr indent="0" marL="0">
-              <a:buNone/>
-            </a:pPr>
-            <a:r>
-              <a:rPr lang="en-US" sz="1300" dirty="0">
-                <a:solidFill>
-                  <a:srgbClr val="22284B"/>
-                </a:solidFill>
-                <a:latin typeface="Calibri" pitchFamily="34" charset="0"/>
-                <a:ea typeface="Calibri" pitchFamily="34" charset="-122"/>
-                <a:cs typeface="Calibri" pitchFamily="34" charset="-120"/>
-              </a:rPr>
-              <a:t>Facts route through tools; guardrails on every agent.</a:t>
+              <a:t>3</a:t>
             </a:r>
             <a:endParaRPr lang="en-US" sz="1300" dirty="0"/>
           </a:p>
@@ -9908,18 +11259,18 @@
       </p:sp>
       <p:sp>
         <p:nvSpPr>
-          <p:cNvPr id="14" name="Shape 12"/>
-          <p:cNvSpPr/>
-          <p:nvPr/>
-        </p:nvSpPr>
-        <p:spPr>
-          <a:xfrm>
-            <a:off x="640080" y="3611880"/>
-            <a:ext cx="5303520" cy="1463040"/>
+          <p:cNvPr id="17" name="Shape 15"/>
+          <p:cNvSpPr/>
+          <p:nvPr/>
+        </p:nvSpPr>
+        <p:spPr>
+          <a:xfrm>
+            <a:off x="1417320" y="3657600"/>
+            <a:ext cx="10058400" cy="658368"/>
           </a:xfrm>
           <a:prstGeom prst="roundRect">
             <a:avLst>
-              <a:gd name="adj" fmla="val 5625"/>
+              <a:gd name="adj" fmla="val 12500"/>
             </a:avLst>
           </a:prstGeom>
           <a:solidFill>
@@ -9937,14 +11288,92 @@
       </p:sp>
       <p:sp>
         <p:nvSpPr>
-          <p:cNvPr id="15" name="Shape 13"/>
-          <p:cNvSpPr/>
-          <p:nvPr/>
-        </p:nvSpPr>
-        <p:spPr>
-          <a:xfrm>
-            <a:off x="914400" y="4023360"/>
-            <a:ext cx="640080" cy="640080"/>
+          <p:cNvPr id="18" name="Text 16"/>
+          <p:cNvSpPr/>
+          <p:nvPr/>
+        </p:nvSpPr>
+        <p:spPr>
+          <a:xfrm>
+            <a:off x="1645920" y="3657600"/>
+            <a:ext cx="2286000" cy="658368"/>
+          </a:xfrm>
+          <a:prstGeom prst="rect">
+            <a:avLst/>
+          </a:prstGeom>
+          <a:noFill/>
+          <a:ln/>
+        </p:spPr>
+        <p:txBody>
+          <a:bodyPr wrap="square" lIns="0" tIns="0" rIns="0" bIns="0" rtlCol="0" anchor="ctr"/>
+          <a:lstStyle/>
+          <a:p>
+            <a:pPr indent="0" marL="0">
+              <a:buNone/>
+            </a:pPr>
+            <a:r>
+              <a:rPr lang="en-US" sz="1400" b="1" dirty="0">
+                <a:solidFill>
+                  <a:srgbClr val="1E2761"/>
+                </a:solidFill>
+                <a:latin typeface="Cambria" pitchFamily="34" charset="0"/>
+                <a:ea typeface="Cambria" pitchFamily="34" charset="-122"/>
+                <a:cs typeface="Cambria" pitchFamily="34" charset="-120"/>
+              </a:rPr>
+              <a:t>Minimal fix</a:t>
+            </a:r>
+            <a:endParaRPr lang="en-US" sz="1400" dirty="0"/>
+          </a:p>
+        </p:txBody>
+      </p:sp>
+      <p:sp>
+        <p:nvSpPr>
+          <p:cNvPr id="19" name="Text 17"/>
+          <p:cNvSpPr/>
+          <p:nvPr/>
+        </p:nvSpPr>
+        <p:spPr>
+          <a:xfrm>
+            <a:off x="3840480" y="3657600"/>
+            <a:ext cx="7498080" cy="658368"/>
+          </a:xfrm>
+          <a:prstGeom prst="rect">
+            <a:avLst/>
+          </a:prstGeom>
+          <a:noFill/>
+          <a:ln/>
+        </p:spPr>
+        <p:txBody>
+          <a:bodyPr wrap="square" lIns="0" tIns="0" rIns="0" bIns="0" rtlCol="0" anchor="ctr"/>
+          <a:lstStyle/>
+          <a:p>
+            <a:pPr indent="0" marL="0">
+              <a:buNone/>
+            </a:pPr>
+            <a:r>
+              <a:rPr lang="en-US" sz="1250" dirty="0">
+                <a:solidFill>
+                  <a:srgbClr val="22284B"/>
+                </a:solidFill>
+                <a:latin typeface="Calibri" pitchFamily="34" charset="0"/>
+                <a:ea typeface="Calibri" pitchFamily="34" charset="-122"/>
+                <a:cs typeface="Calibri" pitchFamily="34" charset="-120"/>
+              </a:rPr>
+              <a:t>suppress = complaint  →  complaint OR cart_state ∈ {checkout, payment}</a:t>
+            </a:r>
+            <a:endParaRPr lang="en-US" sz="1250" dirty="0"/>
+          </a:p>
+        </p:txBody>
+      </p:sp>
+      <p:sp>
+        <p:nvSpPr>
+          <p:cNvPr id="20" name="Shape 18"/>
+          <p:cNvSpPr/>
+          <p:nvPr/>
+        </p:nvSpPr>
+        <p:spPr>
+          <a:xfrm>
+            <a:off x="640080" y="4535424"/>
+            <a:ext cx="548640" cy="548640"/>
           </a:xfrm>
           <a:prstGeom prst="ellipse">
             <a:avLst/>
@@ -9957,14 +11386,14 @@
       </p:sp>
       <p:sp>
         <p:nvSpPr>
-          <p:cNvPr id="16" name="Text 14"/>
-          <p:cNvSpPr/>
-          <p:nvPr/>
-        </p:nvSpPr>
-        <p:spPr>
-          <a:xfrm>
-            <a:off x="914400" y="4023360"/>
-            <a:ext cx="640080" cy="640080"/>
+          <p:cNvPr id="21" name="Text 19"/>
+          <p:cNvSpPr/>
+          <p:nvPr/>
+        </p:nvSpPr>
+        <p:spPr>
+          <a:xfrm>
+            <a:off x="640080" y="4535424"/>
+            <a:ext cx="548640" cy="548640"/>
           </a:xfrm>
           <a:prstGeom prst="rect">
             <a:avLst/>
@@ -9980,7 +11409,7 @@
               <a:buNone/>
             </a:pPr>
             <a:r>
-              <a:rPr lang="en-US" sz="1800" b="1" dirty="0">
+              <a:rPr lang="en-US" sz="1300" b="1" dirty="0">
                 <a:solidFill>
                   <a:srgbClr val="FFFFFF"/>
                 </a:solidFill>
@@ -9988,85 +11417,7 @@
                 <a:ea typeface="Cambria" pitchFamily="34" charset="-122"/>
                 <a:cs typeface="Cambria" pitchFamily="34" charset="-120"/>
               </a:rPr>
-              <a:t>3</a:t>
-            </a:r>
-            <a:endParaRPr lang="en-US" sz="1800" dirty="0"/>
-          </a:p>
-        </p:txBody>
-      </p:sp>
-      <p:sp>
-        <p:nvSpPr>
-          <p:cNvPr id="17" name="Text 15"/>
-          <p:cNvSpPr/>
-          <p:nvPr/>
-        </p:nvSpPr>
-        <p:spPr>
-          <a:xfrm>
-            <a:off x="1737360" y="3794760"/>
-            <a:ext cx="4023360" cy="457200"/>
-          </a:xfrm>
-          <a:prstGeom prst="rect">
-            <a:avLst/>
-          </a:prstGeom>
-          <a:noFill/>
-          <a:ln/>
-        </p:spPr>
-        <p:txBody>
-          <a:bodyPr wrap="square" lIns="0" tIns="0" rIns="0" bIns="0" rtlCol="0" anchor="ctr"/>
-          <a:lstStyle/>
-          <a:p>
-            <a:pPr indent="0" marL="0">
-              <a:buNone/>
-            </a:pPr>
-            <a:r>
-              <a:rPr lang="en-US" sz="1700" b="1" dirty="0">
-                <a:solidFill>
-                  <a:srgbClr val="1E2761"/>
-                </a:solidFill>
-                <a:latin typeface="Cambria" pitchFamily="34" charset="0"/>
-                <a:ea typeface="Cambria" pitchFamily="34" charset="-122"/>
-                <a:cs typeface="Cambria" pitchFamily="34" charset="-120"/>
-              </a:rPr>
-              <a:t>Self-auditing</a:t>
-            </a:r>
-            <a:endParaRPr lang="en-US" sz="1700" dirty="0"/>
-          </a:p>
-        </p:txBody>
-      </p:sp>
-      <p:sp>
-        <p:nvSpPr>
-          <p:cNvPr id="18" name="Text 16"/>
-          <p:cNvSpPr/>
-          <p:nvPr/>
-        </p:nvSpPr>
-        <p:spPr>
-          <a:xfrm>
-            <a:off x="1737360" y="4270248"/>
-            <a:ext cx="4023360" cy="731520"/>
-          </a:xfrm>
-          <a:prstGeom prst="rect">
-            <a:avLst/>
-          </a:prstGeom>
-          <a:noFill/>
-          <a:ln/>
-        </p:spPr>
-        <p:txBody>
-          <a:bodyPr wrap="square" lIns="0" tIns="0" rIns="0" bIns="0" rtlCol="0" anchor="ctr"/>
-          <a:lstStyle/>
-          <a:p>
-            <a:pPr indent="0" marL="0">
-              <a:buNone/>
-            </a:pPr>
-            <a:r>
-              <a:rPr lang="en-US" sz="1300" dirty="0">
-                <a:solidFill>
-                  <a:srgbClr val="22284B"/>
-                </a:solidFill>
-                <a:latin typeface="Calibri" pitchFamily="34" charset="0"/>
-                <a:ea typeface="Calibri" pitchFamily="34" charset="-122"/>
-                <a:cs typeface="Calibri" pitchFamily="34" charset="-120"/>
-              </a:rPr>
-              <a:t>An assessor scores the prompts — it even caught a bug in its own rubric.</a:t>
+              <a:t>4</a:t>
             </a:r>
             <a:endParaRPr lang="en-US" sz="1300" dirty="0"/>
           </a:p>
@@ -10074,22 +11425,22 @@
       </p:sp>
       <p:sp>
         <p:nvSpPr>
-          <p:cNvPr id="19" name="Shape 17"/>
-          <p:cNvSpPr/>
-          <p:nvPr/>
-        </p:nvSpPr>
-        <p:spPr>
-          <a:xfrm>
-            <a:off x="6217920" y="3611880"/>
-            <a:ext cx="5303520" cy="1463040"/>
+          <p:cNvPr id="22" name="Shape 20"/>
+          <p:cNvSpPr/>
+          <p:nvPr/>
+        </p:nvSpPr>
+        <p:spPr>
+          <a:xfrm>
+            <a:off x="1417320" y="4498848"/>
+            <a:ext cx="10058400" cy="658368"/>
           </a:xfrm>
           <a:prstGeom prst="roundRect">
             <a:avLst>
-              <a:gd name="adj" fmla="val 5625"/>
+              <a:gd name="adj" fmla="val 12500"/>
             </a:avLst>
           </a:prstGeom>
           <a:solidFill>
-            <a:srgbClr val="F2F6FF"/>
+            <a:srgbClr val="EAF7F3"/>
           </a:solidFill>
           <a:ln/>
           <a:effectLst>
@@ -10103,128 +11454,69 @@
       </p:sp>
       <p:sp>
         <p:nvSpPr>
-          <p:cNvPr id="20" name="Shape 18"/>
-          <p:cNvSpPr/>
-          <p:nvPr/>
-        </p:nvSpPr>
-        <p:spPr>
-          <a:xfrm>
-            <a:off x="6492240" y="4023360"/>
-            <a:ext cx="640080" cy="640080"/>
-          </a:xfrm>
-          <a:prstGeom prst="ellipse">
-            <a:avLst/>
-          </a:prstGeom>
-          <a:solidFill>
-            <a:srgbClr val="00A896"/>
-          </a:solidFill>
-          <a:ln/>
-        </p:spPr>
-      </p:sp>
-      <p:sp>
-        <p:nvSpPr>
-          <p:cNvPr id="21" name="Text 19"/>
-          <p:cNvSpPr/>
-          <p:nvPr/>
-        </p:nvSpPr>
-        <p:spPr>
-          <a:xfrm>
-            <a:off x="6492240" y="4023360"/>
-            <a:ext cx="640080" cy="640080"/>
-          </a:xfrm>
-          <a:prstGeom prst="rect">
-            <a:avLst/>
-          </a:prstGeom>
-          <a:noFill/>
-          <a:ln/>
-        </p:spPr>
-        <p:txBody>
-          <a:bodyPr wrap="square" lIns="0" tIns="0" rIns="0" bIns="0" rtlCol="0" anchor="ctr"/>
-          <a:lstStyle/>
-          <a:p>
-            <a:pPr algn="ctr" indent="0" marL="0">
-              <a:buNone/>
-            </a:pPr>
-            <a:r>
-              <a:rPr lang="en-US" sz="1800" b="1" dirty="0">
-                <a:solidFill>
-                  <a:srgbClr val="FFFFFF"/>
+          <p:cNvPr id="23" name="Text 21"/>
+          <p:cNvSpPr/>
+          <p:nvPr/>
+        </p:nvSpPr>
+        <p:spPr>
+          <a:xfrm>
+            <a:off x="1645920" y="4498848"/>
+            <a:ext cx="2286000" cy="658368"/>
+          </a:xfrm>
+          <a:prstGeom prst="rect">
+            <a:avLst/>
+          </a:prstGeom>
+          <a:noFill/>
+          <a:ln/>
+        </p:spPr>
+        <p:txBody>
+          <a:bodyPr wrap="square" lIns="0" tIns="0" rIns="0" bIns="0" rtlCol="0" anchor="ctr"/>
+          <a:lstStyle/>
+          <a:p>
+            <a:pPr indent="0" marL="0">
+              <a:buNone/>
+            </a:pPr>
+            <a:r>
+              <a:rPr lang="en-US" sz="1400" b="1" dirty="0">
+                <a:solidFill>
+                  <a:srgbClr val="1E2761"/>
                 </a:solidFill>
                 <a:latin typeface="Cambria" pitchFamily="34" charset="0"/>
                 <a:ea typeface="Cambria" pitchFamily="34" charset="-122"/>
                 <a:cs typeface="Cambria" pitchFamily="34" charset="-120"/>
               </a:rPr>
-              <a:t>4</a:t>
-            </a:r>
-            <a:endParaRPr lang="en-US" sz="1800" dirty="0"/>
-          </a:p>
-        </p:txBody>
-      </p:sp>
-      <p:sp>
-        <p:nvSpPr>
-          <p:cNvPr id="22" name="Text 20"/>
-          <p:cNvSpPr/>
-          <p:nvPr/>
-        </p:nvSpPr>
-        <p:spPr>
-          <a:xfrm>
-            <a:off x="7315200" y="3794760"/>
-            <a:ext cx="4023360" cy="457200"/>
-          </a:xfrm>
-          <a:prstGeom prst="rect">
-            <a:avLst/>
-          </a:prstGeom>
-          <a:noFill/>
-          <a:ln/>
-        </p:spPr>
-        <p:txBody>
-          <a:bodyPr wrap="square" lIns="0" tIns="0" rIns="0" bIns="0" rtlCol="0" anchor="ctr"/>
-          <a:lstStyle/>
-          <a:p>
-            <a:pPr indent="0" marL="0">
-              <a:buNone/>
-            </a:pPr>
-            <a:r>
-              <a:rPr lang="en-US" sz="1700" b="1" dirty="0">
-                <a:solidFill>
-                  <a:srgbClr val="1E2761"/>
-                </a:solidFill>
-                <a:latin typeface="Cambria" pitchFamily="34" charset="0"/>
-                <a:ea typeface="Cambria" pitchFamily="34" charset="-122"/>
-                <a:cs typeface="Cambria" pitchFamily="34" charset="-120"/>
-              </a:rPr>
-              <a:t>Full lifecycle</a:t>
-            </a:r>
-            <a:endParaRPr lang="en-US" sz="1700" dirty="0"/>
-          </a:p>
-        </p:txBody>
-      </p:sp>
-      <p:sp>
-        <p:nvSpPr>
-          <p:cNvPr id="23" name="Text 21"/>
-          <p:cNvSpPr/>
-          <p:nvPr/>
-        </p:nvSpPr>
-        <p:spPr>
-          <a:xfrm>
-            <a:off x="7315200" y="4270248"/>
-            <a:ext cx="4023360" cy="731520"/>
-          </a:xfrm>
-          <a:prstGeom prst="rect">
-            <a:avLst/>
-          </a:prstGeom>
-          <a:noFill/>
-          <a:ln/>
-        </p:spPr>
-        <p:txBody>
-          <a:bodyPr wrap="square" lIns="0" tIns="0" rIns="0" bIns="0" rtlCol="0" anchor="ctr"/>
-          <a:lstStyle/>
-          <a:p>
-            <a:pPr indent="0" marL="0">
-              <a:buNone/>
-            </a:pPr>
-            <a:r>
-              <a:rPr lang="en-US" sz="1300" dirty="0">
+              <a:t>Regression eval</a:t>
+            </a:r>
+            <a:endParaRPr lang="en-US" sz="1400" dirty="0"/>
+          </a:p>
+        </p:txBody>
+      </p:sp>
+      <p:sp>
+        <p:nvSpPr>
+          <p:cNvPr id="24" name="Text 22"/>
+          <p:cNvSpPr/>
+          <p:nvPr/>
+        </p:nvSpPr>
+        <p:spPr>
+          <a:xfrm>
+            <a:off x="3840480" y="4498848"/>
+            <a:ext cx="7498080" cy="658368"/>
+          </a:xfrm>
+          <a:prstGeom prst="rect">
+            <a:avLst/>
+          </a:prstGeom>
+          <a:noFill/>
+          <a:ln/>
+        </p:spPr>
+        <p:txBody>
+          <a:bodyPr wrap="square" lIns="0" tIns="0" rIns="0" bIns="0" rtlCol="0" anchor="ctr"/>
+          <a:lstStyle/>
+          <a:p>
+            <a:pPr indent="0" marL="0">
+              <a:buNone/>
+            </a:pPr>
+            <a:r>
+              <a:rPr lang="en-US" sz="1250" dirty="0">
                 <a:solidFill>
                   <a:srgbClr val="22284B"/>
                 </a:solidFill>
@@ -10232,7 +11524,46 @@
                 <a:ea typeface="Calibri" pitchFamily="34" charset="-122"/>
                 <a:cs typeface="Calibri" pitchFamily="34" charset="-120"/>
               </a:rPr>
-              <a:t>Interview through debug/regression, not just generation.</a:t>
+              <a:t>New Turn Eval TE-02b: RED before → GREEN after. Coverage R4: 1 → 2.</a:t>
+            </a:r>
+            <a:endParaRPr lang="en-US" sz="1250" dirty="0"/>
+          </a:p>
+        </p:txBody>
+      </p:sp>
+      <p:sp>
+        <p:nvSpPr>
+          <p:cNvPr id="25" name="Text 23"/>
+          <p:cNvSpPr/>
+          <p:nvPr/>
+        </p:nvSpPr>
+        <p:spPr>
+          <a:xfrm>
+            <a:off x="640080" y="5532120"/>
+            <a:ext cx="10972800" cy="365760"/>
+          </a:xfrm>
+          <a:prstGeom prst="rect">
+            <a:avLst/>
+          </a:prstGeom>
+          <a:noFill/>
+          <a:ln/>
+        </p:spPr>
+        <p:txBody>
+          <a:bodyPr wrap="square" lIns="0" tIns="0" rIns="0" bIns="0" rtlCol="0" anchor="ctr"/>
+          <a:lstStyle/>
+          <a:p>
+            <a:pPr indent="0" marL="0">
+              <a:buNone/>
+            </a:pPr>
+            <a:r>
+              <a:rPr lang="en-US" sz="1300" i="1" dirty="0">
+                <a:solidFill>
+                  <a:srgbClr val="5B6785"/>
+                </a:solidFill>
+                <a:latin typeface="Calibri" pitchFamily="34" charset="0"/>
+                <a:ea typeface="Calibri" pitchFamily="34" charset="-122"/>
+                <a:cs typeface="Calibri" pitchFamily="34" charset="-120"/>
+              </a:rPr>
+              <a:t>The fix targets the cause and generalizes — not a hard-coded test patch.</a:t>
             </a:r>
             <a:endParaRPr lang="en-US" sz="1300" dirty="0"/>
           </a:p>
@@ -10240,7 +11571,7 @@
       </p:sp>
       <p:sp>
         <p:nvSpPr>
-          <p:cNvPr id="24" name="Text 22"/>
+          <p:cNvPr id="26" name="Text 24"/>
           <p:cNvSpPr/>
           <p:nvPr/>
         </p:nvSpPr>
@@ -10279,7 +11610,7 @@
       </p:sp>
       <p:sp>
         <p:nvSpPr>
-          <p:cNvPr id="25" name="Text 23"/>
+          <p:cNvPr id="27" name="Text 25"/>
           <p:cNvSpPr/>
           <p:nvPr/>
         </p:nvSpPr>
